--- a/ch1/slides/ch1.pptx
+++ b/ch1/slides/ch1.pptx
@@ -9,9 +9,6 @@
   </p:notesMasterIdLst>
   <p:sldIdLst>
     <p:sldId id="307" r:id="rId2"/>
-    <p:sldId id="320" r:id="rId3"/>
-    <p:sldId id="308" r:id="rId4"/>
-    <p:sldId id="309" r:id="rId5"/>
     <p:sldId id="256" r:id="rId6"/>
     <p:sldId id="304" r:id="rId7"/>
     <p:sldId id="257" r:id="rId8"/>
@@ -222,3824 +219,6 @@
     <p1510:client id="{DD862511-F152-4BA5-8873-1225875C6259}" v="21" dt="2025-03-07T00:25:56.813"/>
   </p1510:revLst>
 </p1510:revInfo>
-</file>
-
-<file path=ppt/diagrams/colors1.xml><?xml version="1.0" encoding="utf-8"?>
-<dgm:colorsDef xmlns:dgm="http://schemas.openxmlformats.org/drawingml/2006/diagram" xmlns:a="http://schemas.openxmlformats.org/drawingml/2006/main" uniqueId="urn:microsoft.com/office/officeart/2005/8/colors/accent1_2">
-  <dgm:title val=""/>
-  <dgm:desc val=""/>
-  <dgm:catLst>
-    <dgm:cat type="accent1" pri="11200"/>
-  </dgm:catLst>
-  <dgm:styleLbl name="node0">
-    <dgm:fillClrLst meth="repeat">
-      <a:schemeClr val="accent1"/>
-    </dgm:fillClrLst>
-    <dgm:linClrLst meth="repeat">
-      <a:schemeClr val="lt1"/>
-    </dgm:linClrLst>
-    <dgm:effectClrLst/>
-    <dgm:txLinClrLst/>
-    <dgm:txFillClrLst/>
-    <dgm:txEffectClrLst/>
-  </dgm:styleLbl>
-  <dgm:styleLbl name="alignNode1">
-    <dgm:fillClrLst meth="repeat">
-      <a:schemeClr val="accent1"/>
-    </dgm:fillClrLst>
-    <dgm:linClrLst meth="repeat">
-      <a:schemeClr val="accent1"/>
-    </dgm:linClrLst>
-    <dgm:effectClrLst/>
-    <dgm:txLinClrLst/>
-    <dgm:txFillClrLst/>
-    <dgm:txEffectClrLst/>
-  </dgm:styleLbl>
-  <dgm:styleLbl name="node1">
-    <dgm:fillClrLst meth="repeat">
-      <a:schemeClr val="accent1"/>
-    </dgm:fillClrLst>
-    <dgm:linClrLst meth="repeat">
-      <a:schemeClr val="lt1"/>
-    </dgm:linClrLst>
-    <dgm:effectClrLst/>
-    <dgm:txLinClrLst/>
-    <dgm:txFillClrLst/>
-    <dgm:txEffectClrLst/>
-  </dgm:styleLbl>
-  <dgm:styleLbl name="lnNode1">
-    <dgm:fillClrLst meth="repeat">
-      <a:schemeClr val="accent1"/>
-    </dgm:fillClrLst>
-    <dgm:linClrLst meth="repeat">
-      <a:schemeClr val="lt1"/>
-    </dgm:linClrLst>
-    <dgm:effectClrLst/>
-    <dgm:txLinClrLst/>
-    <dgm:txFillClrLst/>
-    <dgm:txEffectClrLst/>
-  </dgm:styleLbl>
-  <dgm:styleLbl name="vennNode1">
-    <dgm:fillClrLst meth="repeat">
-      <a:schemeClr val="accent1">
-        <a:alpha val="50000"/>
-      </a:schemeClr>
-    </dgm:fillClrLst>
-    <dgm:linClrLst meth="repeat">
-      <a:schemeClr val="lt1"/>
-    </dgm:linClrLst>
-    <dgm:effectClrLst/>
-    <dgm:txLinClrLst/>
-    <dgm:txFillClrLst/>
-    <dgm:txEffectClrLst/>
-  </dgm:styleLbl>
-  <dgm:styleLbl name="node2">
-    <dgm:fillClrLst meth="repeat">
-      <a:schemeClr val="accent1"/>
-    </dgm:fillClrLst>
-    <dgm:linClrLst meth="repeat">
-      <a:schemeClr val="lt1"/>
-    </dgm:linClrLst>
-    <dgm:effectClrLst/>
-    <dgm:txLinClrLst/>
-    <dgm:txFillClrLst/>
-    <dgm:txEffectClrLst/>
-  </dgm:styleLbl>
-  <dgm:styleLbl name="node3">
-    <dgm:fillClrLst meth="repeat">
-      <a:schemeClr val="accent1"/>
-    </dgm:fillClrLst>
-    <dgm:linClrLst meth="repeat">
-      <a:schemeClr val="lt1"/>
-    </dgm:linClrLst>
-    <dgm:effectClrLst/>
-    <dgm:txLinClrLst/>
-    <dgm:txFillClrLst/>
-    <dgm:txEffectClrLst/>
-  </dgm:styleLbl>
-  <dgm:styleLbl name="node4">
-    <dgm:fillClrLst meth="repeat">
-      <a:schemeClr val="accent1"/>
-    </dgm:fillClrLst>
-    <dgm:linClrLst meth="repeat">
-      <a:schemeClr val="lt1"/>
-    </dgm:linClrLst>
-    <dgm:effectClrLst/>
-    <dgm:txLinClrLst/>
-    <dgm:txFillClrLst/>
-    <dgm:txEffectClrLst/>
-  </dgm:styleLbl>
-  <dgm:styleLbl name="fgImgPlace1">
-    <dgm:fillClrLst meth="repeat">
-      <a:schemeClr val="accent1">
-        <a:tint val="50000"/>
-      </a:schemeClr>
-    </dgm:fillClrLst>
-    <dgm:linClrLst meth="repeat">
-      <a:schemeClr val="lt1"/>
-    </dgm:linClrLst>
-    <dgm:effectClrLst/>
-    <dgm:txLinClrLst/>
-    <dgm:txFillClrLst meth="repeat">
-      <a:schemeClr val="lt1"/>
-    </dgm:txFillClrLst>
-    <dgm:txEffectClrLst/>
-  </dgm:styleLbl>
-  <dgm:styleLbl name="alignImgPlace1">
-    <dgm:fillClrLst meth="repeat">
-      <a:schemeClr val="accent1">
-        <a:tint val="50000"/>
-      </a:schemeClr>
-    </dgm:fillClrLst>
-    <dgm:linClrLst meth="repeat">
-      <a:schemeClr val="lt1"/>
-    </dgm:linClrLst>
-    <dgm:effectClrLst/>
-    <dgm:txLinClrLst/>
-    <dgm:txFillClrLst meth="repeat">
-      <a:schemeClr val="lt1"/>
-    </dgm:txFillClrLst>
-    <dgm:txEffectClrLst/>
-  </dgm:styleLbl>
-  <dgm:styleLbl name="bgImgPlace1">
-    <dgm:fillClrLst meth="repeat">
-      <a:schemeClr val="accent1">
-        <a:tint val="50000"/>
-      </a:schemeClr>
-    </dgm:fillClrLst>
-    <dgm:linClrLst meth="repeat">
-      <a:schemeClr val="lt1"/>
-    </dgm:linClrLst>
-    <dgm:effectClrLst/>
-    <dgm:txLinClrLst/>
-    <dgm:txFillClrLst meth="repeat">
-      <a:schemeClr val="lt1"/>
-    </dgm:txFillClrLst>
-    <dgm:txEffectClrLst/>
-  </dgm:styleLbl>
-  <dgm:styleLbl name="sibTrans2D1">
-    <dgm:fillClrLst meth="repeat">
-      <a:schemeClr val="accent1">
-        <a:tint val="60000"/>
-      </a:schemeClr>
-    </dgm:fillClrLst>
-    <dgm:linClrLst meth="repeat">
-      <a:schemeClr val="accent1">
-        <a:tint val="60000"/>
-      </a:schemeClr>
-    </dgm:linClrLst>
-    <dgm:effectClrLst/>
-    <dgm:txLinClrLst/>
-    <dgm:txFillClrLst/>
-    <dgm:txEffectClrLst/>
-  </dgm:styleLbl>
-  <dgm:styleLbl name="fgSibTrans2D1">
-    <dgm:fillClrLst meth="repeat">
-      <a:schemeClr val="accent1">
-        <a:tint val="60000"/>
-      </a:schemeClr>
-    </dgm:fillClrLst>
-    <dgm:linClrLst meth="repeat">
-      <a:schemeClr val="accent1">
-        <a:tint val="60000"/>
-      </a:schemeClr>
-    </dgm:linClrLst>
-    <dgm:effectClrLst/>
-    <dgm:txLinClrLst/>
-    <dgm:txFillClrLst/>
-    <dgm:txEffectClrLst/>
-  </dgm:styleLbl>
-  <dgm:styleLbl name="bgSibTrans2D1">
-    <dgm:fillClrLst meth="repeat">
-      <a:schemeClr val="accent1">
-        <a:tint val="60000"/>
-      </a:schemeClr>
-    </dgm:fillClrLst>
-    <dgm:linClrLst meth="repeat">
-      <a:schemeClr val="accent1">
-        <a:tint val="60000"/>
-      </a:schemeClr>
-    </dgm:linClrLst>
-    <dgm:effectClrLst/>
-    <dgm:txLinClrLst/>
-    <dgm:txFillClrLst/>
-    <dgm:txEffectClrLst/>
-  </dgm:styleLbl>
-  <dgm:styleLbl name="sibTrans1D1">
-    <dgm:fillClrLst meth="repeat">
-      <a:schemeClr val="accent1"/>
-    </dgm:fillClrLst>
-    <dgm:linClrLst meth="repeat">
-      <a:schemeClr val="accent1"/>
-    </dgm:linClrLst>
-    <dgm:effectClrLst/>
-    <dgm:txLinClrLst/>
-    <dgm:txFillClrLst meth="repeat">
-      <a:schemeClr val="tx1"/>
-    </dgm:txFillClrLst>
-    <dgm:txEffectClrLst/>
-  </dgm:styleLbl>
-  <dgm:styleLbl name="callout">
-    <dgm:fillClrLst meth="repeat">
-      <a:schemeClr val="accent1"/>
-    </dgm:fillClrLst>
-    <dgm:linClrLst meth="repeat">
-      <a:schemeClr val="accent1">
-        <a:tint val="50000"/>
-      </a:schemeClr>
-    </dgm:linClrLst>
-    <dgm:effectClrLst/>
-    <dgm:txLinClrLst/>
-    <dgm:txFillClrLst meth="repeat">
-      <a:schemeClr val="tx1"/>
-    </dgm:txFillClrLst>
-    <dgm:txEffectClrLst/>
-  </dgm:styleLbl>
-  <dgm:styleLbl name="asst0">
-    <dgm:fillClrLst meth="repeat">
-      <a:schemeClr val="accent1"/>
-    </dgm:fillClrLst>
-    <dgm:linClrLst meth="repeat">
-      <a:schemeClr val="lt1"/>
-    </dgm:linClrLst>
-    <dgm:effectClrLst/>
-    <dgm:txLinClrLst/>
-    <dgm:txFillClrLst/>
-    <dgm:txEffectClrLst/>
-  </dgm:styleLbl>
-  <dgm:styleLbl name="asst1">
-    <dgm:fillClrLst meth="repeat">
-      <a:schemeClr val="accent1"/>
-    </dgm:fillClrLst>
-    <dgm:linClrLst meth="repeat">
-      <a:schemeClr val="lt1"/>
-    </dgm:linClrLst>
-    <dgm:effectClrLst/>
-    <dgm:txLinClrLst/>
-    <dgm:txFillClrLst/>
-    <dgm:txEffectClrLst/>
-  </dgm:styleLbl>
-  <dgm:styleLbl name="asst2">
-    <dgm:fillClrLst meth="repeat">
-      <a:schemeClr val="accent1"/>
-    </dgm:fillClrLst>
-    <dgm:linClrLst meth="repeat">
-      <a:schemeClr val="lt1"/>
-    </dgm:linClrLst>
-    <dgm:effectClrLst/>
-    <dgm:txLinClrLst/>
-    <dgm:txFillClrLst/>
-    <dgm:txEffectClrLst/>
-  </dgm:styleLbl>
-  <dgm:styleLbl name="asst3">
-    <dgm:fillClrLst meth="repeat">
-      <a:schemeClr val="accent1"/>
-    </dgm:fillClrLst>
-    <dgm:linClrLst meth="repeat">
-      <a:schemeClr val="lt1"/>
-    </dgm:linClrLst>
-    <dgm:effectClrLst/>
-    <dgm:txLinClrLst/>
-    <dgm:txFillClrLst/>
-    <dgm:txEffectClrLst/>
-  </dgm:styleLbl>
-  <dgm:styleLbl name="asst4">
-    <dgm:fillClrLst meth="repeat">
-      <a:schemeClr val="accent1"/>
-    </dgm:fillClrLst>
-    <dgm:linClrLst meth="repeat">
-      <a:schemeClr val="lt1"/>
-    </dgm:linClrLst>
-    <dgm:effectClrLst/>
-    <dgm:txLinClrLst/>
-    <dgm:txFillClrLst/>
-    <dgm:txEffectClrLst/>
-  </dgm:styleLbl>
-  <dgm:styleLbl name="parChTrans2D1">
-    <dgm:fillClrLst meth="repeat">
-      <a:schemeClr val="accent1">
-        <a:tint val="60000"/>
-      </a:schemeClr>
-    </dgm:fillClrLst>
-    <dgm:linClrLst meth="repeat">
-      <a:schemeClr val="accent1">
-        <a:tint val="60000"/>
-      </a:schemeClr>
-    </dgm:linClrLst>
-    <dgm:effectClrLst/>
-    <dgm:txLinClrLst/>
-    <dgm:txFillClrLst meth="repeat">
-      <a:schemeClr val="lt1"/>
-    </dgm:txFillClrLst>
-    <dgm:txEffectClrLst/>
-  </dgm:styleLbl>
-  <dgm:styleLbl name="parChTrans2D2">
-    <dgm:fillClrLst meth="repeat">
-      <a:schemeClr val="accent1"/>
-    </dgm:fillClrLst>
-    <dgm:linClrLst meth="repeat">
-      <a:schemeClr val="accent1"/>
-    </dgm:linClrLst>
-    <dgm:effectClrLst/>
-    <dgm:txLinClrLst/>
-    <dgm:txFillClrLst meth="repeat">
-      <a:schemeClr val="lt1"/>
-    </dgm:txFillClrLst>
-    <dgm:txEffectClrLst/>
-  </dgm:styleLbl>
-  <dgm:styleLbl name="parChTrans2D3">
-    <dgm:fillClrLst meth="repeat">
-      <a:schemeClr val="accent1"/>
-    </dgm:fillClrLst>
-    <dgm:linClrLst meth="repeat">
-      <a:schemeClr val="accent1"/>
-    </dgm:linClrLst>
-    <dgm:effectClrLst/>
-    <dgm:txLinClrLst/>
-    <dgm:txFillClrLst meth="repeat">
-      <a:schemeClr val="lt1"/>
-    </dgm:txFillClrLst>
-    <dgm:txEffectClrLst/>
-  </dgm:styleLbl>
-  <dgm:styleLbl name="parChTrans2D4">
-    <dgm:fillClrLst meth="repeat">
-      <a:schemeClr val="accent1"/>
-    </dgm:fillClrLst>
-    <dgm:linClrLst meth="repeat">
-      <a:schemeClr val="accent1"/>
-    </dgm:linClrLst>
-    <dgm:effectClrLst/>
-    <dgm:txLinClrLst/>
-    <dgm:txFillClrLst meth="repeat">
-      <a:schemeClr val="lt1"/>
-    </dgm:txFillClrLst>
-    <dgm:txEffectClrLst/>
-  </dgm:styleLbl>
-  <dgm:styleLbl name="parChTrans1D1">
-    <dgm:fillClrLst meth="repeat">
-      <a:schemeClr val="accent1"/>
-    </dgm:fillClrLst>
-    <dgm:linClrLst meth="repeat">
-      <a:schemeClr val="accent1">
-        <a:shade val="60000"/>
-      </a:schemeClr>
-    </dgm:linClrLst>
-    <dgm:effectClrLst/>
-    <dgm:txLinClrLst/>
-    <dgm:txFillClrLst meth="repeat">
-      <a:schemeClr val="tx1"/>
-    </dgm:txFillClrLst>
-    <dgm:txEffectClrLst/>
-  </dgm:styleLbl>
-  <dgm:styleLbl name="parChTrans1D2">
-    <dgm:fillClrLst meth="repeat">
-      <a:schemeClr val="accent1"/>
-    </dgm:fillClrLst>
-    <dgm:linClrLst meth="repeat">
-      <a:schemeClr val="accent1">
-        <a:shade val="60000"/>
-      </a:schemeClr>
-    </dgm:linClrLst>
-    <dgm:effectClrLst/>
-    <dgm:txLinClrLst/>
-    <dgm:txFillClrLst meth="repeat">
-      <a:schemeClr val="tx1"/>
-    </dgm:txFillClrLst>
-    <dgm:txEffectClrLst/>
-  </dgm:styleLbl>
-  <dgm:styleLbl name="parChTrans1D3">
-    <dgm:fillClrLst meth="repeat">
-      <a:schemeClr val="accent1"/>
-    </dgm:fillClrLst>
-    <dgm:linClrLst meth="repeat">
-      <a:schemeClr val="accent1">
-        <a:shade val="80000"/>
-      </a:schemeClr>
-    </dgm:linClrLst>
-    <dgm:effectClrLst/>
-    <dgm:txLinClrLst/>
-    <dgm:txFillClrLst meth="repeat">
-      <a:schemeClr val="tx1"/>
-    </dgm:txFillClrLst>
-    <dgm:txEffectClrLst/>
-  </dgm:styleLbl>
-  <dgm:styleLbl name="parChTrans1D4">
-    <dgm:fillClrLst meth="repeat">
-      <a:schemeClr val="accent1"/>
-    </dgm:fillClrLst>
-    <dgm:linClrLst meth="repeat">
-      <a:schemeClr val="accent1">
-        <a:shade val="80000"/>
-      </a:schemeClr>
-    </dgm:linClrLst>
-    <dgm:effectClrLst/>
-    <dgm:txLinClrLst/>
-    <dgm:txFillClrLst meth="repeat">
-      <a:schemeClr val="tx1"/>
-    </dgm:txFillClrLst>
-    <dgm:txEffectClrLst/>
-  </dgm:styleLbl>
-  <dgm:styleLbl name="fgAcc1">
-    <dgm:fillClrLst meth="repeat">
-      <a:schemeClr val="lt1">
-        <a:alpha val="90000"/>
-      </a:schemeClr>
-    </dgm:fillClrLst>
-    <dgm:linClrLst meth="repeat">
-      <a:schemeClr val="accent1"/>
-    </dgm:linClrLst>
-    <dgm:effectClrLst/>
-    <dgm:txLinClrLst/>
-    <dgm:txFillClrLst meth="repeat">
-      <a:schemeClr val="dk1"/>
-    </dgm:txFillClrLst>
-    <dgm:txEffectClrLst/>
-  </dgm:styleLbl>
-  <dgm:styleLbl name="conFgAcc1">
-    <dgm:fillClrLst meth="repeat">
-      <a:schemeClr val="lt1">
-        <a:alpha val="90000"/>
-      </a:schemeClr>
-    </dgm:fillClrLst>
-    <dgm:linClrLst meth="repeat">
-      <a:schemeClr val="accent1"/>
-    </dgm:linClrLst>
-    <dgm:effectClrLst/>
-    <dgm:txLinClrLst/>
-    <dgm:txFillClrLst meth="repeat">
-      <a:schemeClr val="dk1"/>
-    </dgm:txFillClrLst>
-    <dgm:txEffectClrLst/>
-  </dgm:styleLbl>
-  <dgm:styleLbl name="alignAcc1">
-    <dgm:fillClrLst meth="repeat">
-      <a:schemeClr val="lt1">
-        <a:alpha val="90000"/>
-      </a:schemeClr>
-    </dgm:fillClrLst>
-    <dgm:linClrLst meth="repeat">
-      <a:schemeClr val="accent1"/>
-    </dgm:linClrLst>
-    <dgm:effectClrLst/>
-    <dgm:txLinClrLst/>
-    <dgm:txFillClrLst meth="repeat">
-      <a:schemeClr val="dk1"/>
-    </dgm:txFillClrLst>
-    <dgm:txEffectClrLst/>
-  </dgm:styleLbl>
-  <dgm:styleLbl name="trAlignAcc1">
-    <dgm:fillClrLst meth="repeat">
-      <a:schemeClr val="lt1">
-        <a:alpha val="40000"/>
-      </a:schemeClr>
-    </dgm:fillClrLst>
-    <dgm:linClrLst meth="repeat">
-      <a:schemeClr val="accent1"/>
-    </dgm:linClrLst>
-    <dgm:effectClrLst/>
-    <dgm:txLinClrLst/>
-    <dgm:txFillClrLst meth="repeat">
-      <a:schemeClr val="dk1"/>
-    </dgm:txFillClrLst>
-    <dgm:txEffectClrLst/>
-  </dgm:styleLbl>
-  <dgm:styleLbl name="bgAcc1">
-    <dgm:fillClrLst meth="repeat">
-      <a:schemeClr val="lt1">
-        <a:alpha val="90000"/>
-      </a:schemeClr>
-    </dgm:fillClrLst>
-    <dgm:linClrLst meth="repeat">
-      <a:schemeClr val="accent1"/>
-    </dgm:linClrLst>
-    <dgm:effectClrLst/>
-    <dgm:txLinClrLst/>
-    <dgm:txFillClrLst meth="repeat">
-      <a:schemeClr val="dk1"/>
-    </dgm:txFillClrLst>
-    <dgm:txEffectClrLst/>
-  </dgm:styleLbl>
-  <dgm:styleLbl name="solidFgAcc1">
-    <dgm:fillClrLst meth="repeat">
-      <a:schemeClr val="lt1"/>
-    </dgm:fillClrLst>
-    <dgm:linClrLst meth="repeat">
-      <a:schemeClr val="accent1"/>
-    </dgm:linClrLst>
-    <dgm:effectClrLst/>
-    <dgm:txLinClrLst/>
-    <dgm:txFillClrLst meth="repeat">
-      <a:schemeClr val="dk1"/>
-    </dgm:txFillClrLst>
-    <dgm:txEffectClrLst/>
-  </dgm:styleLbl>
-  <dgm:styleLbl name="solidAlignAcc1">
-    <dgm:fillClrLst meth="repeat">
-      <a:schemeClr val="lt1"/>
-    </dgm:fillClrLst>
-    <dgm:linClrLst meth="repeat">
-      <a:schemeClr val="accent1"/>
-    </dgm:linClrLst>
-    <dgm:effectClrLst/>
-    <dgm:txLinClrLst/>
-    <dgm:txFillClrLst meth="repeat">
-      <a:schemeClr val="dk1"/>
-    </dgm:txFillClrLst>
-    <dgm:txEffectClrLst/>
-  </dgm:styleLbl>
-  <dgm:styleLbl name="solidBgAcc1">
-    <dgm:fillClrLst meth="repeat">
-      <a:schemeClr val="lt1"/>
-    </dgm:fillClrLst>
-    <dgm:linClrLst meth="repeat">
-      <a:schemeClr val="accent1"/>
-    </dgm:linClrLst>
-    <dgm:effectClrLst/>
-    <dgm:txLinClrLst/>
-    <dgm:txFillClrLst meth="repeat">
-      <a:schemeClr val="dk1"/>
-    </dgm:txFillClrLst>
-    <dgm:txEffectClrLst/>
-  </dgm:styleLbl>
-  <dgm:styleLbl name="fgAccFollowNode1">
-    <dgm:fillClrLst meth="repeat">
-      <a:schemeClr val="accent1">
-        <a:alpha val="90000"/>
-        <a:tint val="40000"/>
-      </a:schemeClr>
-    </dgm:fillClrLst>
-    <dgm:linClrLst meth="repeat">
-      <a:schemeClr val="accent1">
-        <a:alpha val="90000"/>
-        <a:tint val="40000"/>
-      </a:schemeClr>
-    </dgm:linClrLst>
-    <dgm:effectClrLst/>
-    <dgm:txLinClrLst/>
-    <dgm:txFillClrLst meth="repeat">
-      <a:schemeClr val="dk1"/>
-    </dgm:txFillClrLst>
-    <dgm:txEffectClrLst/>
-  </dgm:styleLbl>
-  <dgm:styleLbl name="alignAccFollowNode1">
-    <dgm:fillClrLst meth="repeat">
-      <a:schemeClr val="accent1">
-        <a:alpha val="90000"/>
-        <a:tint val="40000"/>
-      </a:schemeClr>
-    </dgm:fillClrLst>
-    <dgm:linClrLst meth="repeat">
-      <a:schemeClr val="accent1">
-        <a:alpha val="90000"/>
-        <a:tint val="40000"/>
-      </a:schemeClr>
-    </dgm:linClrLst>
-    <dgm:effectClrLst/>
-    <dgm:txLinClrLst/>
-    <dgm:txFillClrLst meth="repeat">
-      <a:schemeClr val="dk1"/>
-    </dgm:txFillClrLst>
-    <dgm:txEffectClrLst/>
-  </dgm:styleLbl>
-  <dgm:styleLbl name="bgAccFollowNode1">
-    <dgm:fillClrLst meth="repeat">
-      <a:schemeClr val="accent1">
-        <a:alpha val="90000"/>
-        <a:tint val="40000"/>
-      </a:schemeClr>
-    </dgm:fillClrLst>
-    <dgm:linClrLst meth="repeat">
-      <a:schemeClr val="accent1">
-        <a:alpha val="90000"/>
-        <a:tint val="40000"/>
-      </a:schemeClr>
-    </dgm:linClrLst>
-    <dgm:effectClrLst/>
-    <dgm:txLinClrLst/>
-    <dgm:txFillClrLst meth="repeat">
-      <a:schemeClr val="dk1"/>
-    </dgm:txFillClrLst>
-    <dgm:txEffectClrLst/>
-  </dgm:styleLbl>
-  <dgm:styleLbl name="fgAcc0">
-    <dgm:fillClrLst meth="repeat">
-      <a:schemeClr val="lt1">
-        <a:alpha val="90000"/>
-      </a:schemeClr>
-    </dgm:fillClrLst>
-    <dgm:linClrLst meth="repeat">
-      <a:schemeClr val="accent1"/>
-    </dgm:linClrLst>
-    <dgm:effectClrLst/>
-    <dgm:txLinClrLst/>
-    <dgm:txFillClrLst meth="repeat">
-      <a:schemeClr val="dk1"/>
-    </dgm:txFillClrLst>
-    <dgm:txEffectClrLst/>
-  </dgm:styleLbl>
-  <dgm:styleLbl name="fgAcc2">
-    <dgm:fillClrLst meth="repeat">
-      <a:schemeClr val="lt1">
-        <a:alpha val="90000"/>
-      </a:schemeClr>
-    </dgm:fillClrLst>
-    <dgm:linClrLst meth="repeat">
-      <a:schemeClr val="accent1"/>
-    </dgm:linClrLst>
-    <dgm:effectClrLst/>
-    <dgm:txLinClrLst/>
-    <dgm:txFillClrLst meth="repeat">
-      <a:schemeClr val="dk1"/>
-    </dgm:txFillClrLst>
-    <dgm:txEffectClrLst/>
-  </dgm:styleLbl>
-  <dgm:styleLbl name="fgAcc3">
-    <dgm:fillClrLst meth="repeat">
-      <a:schemeClr val="lt1">
-        <a:alpha val="90000"/>
-      </a:schemeClr>
-    </dgm:fillClrLst>
-    <dgm:linClrLst meth="repeat">
-      <a:schemeClr val="accent1"/>
-    </dgm:linClrLst>
-    <dgm:effectClrLst/>
-    <dgm:txLinClrLst/>
-    <dgm:txFillClrLst meth="repeat">
-      <a:schemeClr val="dk1"/>
-    </dgm:txFillClrLst>
-    <dgm:txEffectClrLst/>
-  </dgm:styleLbl>
-  <dgm:styleLbl name="fgAcc4">
-    <dgm:fillClrLst meth="repeat">
-      <a:schemeClr val="lt1">
-        <a:alpha val="90000"/>
-      </a:schemeClr>
-    </dgm:fillClrLst>
-    <dgm:linClrLst meth="repeat">
-      <a:schemeClr val="accent1"/>
-    </dgm:linClrLst>
-    <dgm:effectClrLst/>
-    <dgm:txLinClrLst/>
-    <dgm:txFillClrLst meth="repeat">
-      <a:schemeClr val="dk1"/>
-    </dgm:txFillClrLst>
-    <dgm:txEffectClrLst/>
-  </dgm:styleLbl>
-  <dgm:styleLbl name="bgShp">
-    <dgm:fillClrLst meth="repeat">
-      <a:schemeClr val="accent1">
-        <a:tint val="40000"/>
-      </a:schemeClr>
-    </dgm:fillClrLst>
-    <dgm:linClrLst meth="repeat">
-      <a:schemeClr val="accent1"/>
-    </dgm:linClrLst>
-    <dgm:effectClrLst/>
-    <dgm:txLinClrLst/>
-    <dgm:txFillClrLst meth="repeat">
-      <a:schemeClr val="dk1"/>
-    </dgm:txFillClrLst>
-    <dgm:txEffectClrLst/>
-  </dgm:styleLbl>
-  <dgm:styleLbl name="dkBgShp">
-    <dgm:fillClrLst meth="repeat">
-      <a:schemeClr val="accent1">
-        <a:shade val="80000"/>
-      </a:schemeClr>
-    </dgm:fillClrLst>
-    <dgm:linClrLst meth="repeat">
-      <a:schemeClr val="accent1"/>
-    </dgm:linClrLst>
-    <dgm:effectClrLst/>
-    <dgm:txLinClrLst/>
-    <dgm:txFillClrLst meth="repeat">
-      <a:schemeClr val="lt1"/>
-    </dgm:txFillClrLst>
-    <dgm:txEffectClrLst/>
-  </dgm:styleLbl>
-  <dgm:styleLbl name="trBgShp">
-    <dgm:fillClrLst meth="repeat">
-      <a:schemeClr val="accent1">
-        <a:tint val="50000"/>
-        <a:alpha val="40000"/>
-      </a:schemeClr>
-    </dgm:fillClrLst>
-    <dgm:linClrLst meth="repeat">
-      <a:schemeClr val="accent1"/>
-    </dgm:linClrLst>
-    <dgm:effectClrLst/>
-    <dgm:txLinClrLst/>
-    <dgm:txFillClrLst meth="repeat">
-      <a:schemeClr val="lt1"/>
-    </dgm:txFillClrLst>
-    <dgm:txEffectClrLst/>
-  </dgm:styleLbl>
-  <dgm:styleLbl name="fgShp">
-    <dgm:fillClrLst meth="repeat">
-      <a:schemeClr val="accent1">
-        <a:tint val="60000"/>
-      </a:schemeClr>
-    </dgm:fillClrLst>
-    <dgm:linClrLst meth="repeat">
-      <a:schemeClr val="lt1"/>
-    </dgm:linClrLst>
-    <dgm:effectClrLst/>
-    <dgm:txLinClrLst/>
-    <dgm:txFillClrLst meth="repeat">
-      <a:schemeClr val="dk1"/>
-    </dgm:txFillClrLst>
-    <dgm:txEffectClrLst/>
-  </dgm:styleLbl>
-  <dgm:styleLbl name="revTx">
-    <dgm:fillClrLst meth="repeat">
-      <a:schemeClr val="lt1">
-        <a:alpha val="0"/>
-      </a:schemeClr>
-    </dgm:fillClrLst>
-    <dgm:linClrLst meth="repeat">
-      <a:schemeClr val="dk1">
-        <a:alpha val="0"/>
-      </a:schemeClr>
-    </dgm:linClrLst>
-    <dgm:effectClrLst/>
-    <dgm:txLinClrLst/>
-    <dgm:txFillClrLst meth="repeat">
-      <a:schemeClr val="tx1"/>
-    </dgm:txFillClrLst>
-    <dgm:txEffectClrLst/>
-  </dgm:styleLbl>
-</dgm:colorsDef>
-</file>
-
-<file path=ppt/diagrams/data1.xml><?xml version="1.0" encoding="utf-8"?>
-<dgm:dataModel xmlns:dgm="http://schemas.openxmlformats.org/drawingml/2006/diagram" xmlns:a="http://schemas.openxmlformats.org/drawingml/2006/main">
-  <dgm:ptLst>
-    <dgm:pt modelId="{D08BA451-C321-4943-B78A-53683E9DC78E}" type="doc">
-      <dgm:prSet loTypeId="urn:microsoft.com/office/officeart/2008/layout/LinedList" loCatId="list" qsTypeId="urn:microsoft.com/office/officeart/2005/8/quickstyle/simple1" qsCatId="simple" csTypeId="urn:microsoft.com/office/officeart/2005/8/colors/accent1_2" csCatId="accent1"/>
-      <dgm:spPr/>
-      <dgm:t>
-        <a:bodyPr/>
-        <a:lstStyle/>
-        <a:p>
-          <a:endParaRPr lang="en-US"/>
-        </a:p>
-      </dgm:t>
-    </dgm:pt>
-    <dgm:pt modelId="{E8BCB541-2CA4-48EF-8A00-F09EE3482684}">
-      <dgm:prSet/>
-      <dgm:spPr/>
-      <dgm:t>
-        <a:bodyPr/>
-        <a:lstStyle/>
-        <a:p>
-          <a:r>
-            <a:rPr lang="zh-TW"/>
-            <a:t>描述資料特徵的統計量及圖表 </a:t>
-          </a:r>
-          <a:endParaRPr lang="en-US"/>
-        </a:p>
-      </dgm:t>
-    </dgm:pt>
-    <dgm:pt modelId="{4A2005BD-8AD9-49A7-852F-E1673CCE2824}" type="parTrans" cxnId="{5F6D7F89-9873-4EBD-A079-9D68603D1A28}">
-      <dgm:prSet/>
-      <dgm:spPr/>
-      <dgm:t>
-        <a:bodyPr/>
-        <a:lstStyle/>
-        <a:p>
-          <a:endParaRPr lang="en-US"/>
-        </a:p>
-      </dgm:t>
-    </dgm:pt>
-    <dgm:pt modelId="{A9D83356-F80E-4A34-AFF6-2834D0280C55}" type="sibTrans" cxnId="{5F6D7F89-9873-4EBD-A079-9D68603D1A28}">
-      <dgm:prSet/>
-      <dgm:spPr/>
-      <dgm:t>
-        <a:bodyPr/>
-        <a:lstStyle/>
-        <a:p>
-          <a:endParaRPr lang="en-US"/>
-        </a:p>
-      </dgm:t>
-    </dgm:pt>
-    <dgm:pt modelId="{A71798FF-F0C7-4E98-B728-F62030BB2E04}">
-      <dgm:prSet/>
-      <dgm:spPr/>
-      <dgm:t>
-        <a:bodyPr/>
-        <a:lstStyle/>
-        <a:p>
-          <a:r>
-            <a:rPr lang="zh-TW"/>
-            <a:t>基礎機率及分配、抽樣分配 </a:t>
-          </a:r>
-          <a:endParaRPr lang="en-US"/>
-        </a:p>
-      </dgm:t>
-    </dgm:pt>
-    <dgm:pt modelId="{5607174A-F261-4DF5-8725-3AA8D04208E4}" type="parTrans" cxnId="{BD45167B-CE5A-4D8D-ABC4-E37E7FDE0538}">
-      <dgm:prSet/>
-      <dgm:spPr/>
-      <dgm:t>
-        <a:bodyPr/>
-        <a:lstStyle/>
-        <a:p>
-          <a:endParaRPr lang="en-US"/>
-        </a:p>
-      </dgm:t>
-    </dgm:pt>
-    <dgm:pt modelId="{2BC817B1-22A1-4D49-85FE-8EC9A63FE20B}" type="sibTrans" cxnId="{BD45167B-CE5A-4D8D-ABC4-E37E7FDE0538}">
-      <dgm:prSet/>
-      <dgm:spPr/>
-      <dgm:t>
-        <a:bodyPr/>
-        <a:lstStyle/>
-        <a:p>
-          <a:endParaRPr lang="en-US"/>
-        </a:p>
-      </dgm:t>
-    </dgm:pt>
-    <dgm:pt modelId="{9D31A52D-A9E8-4331-8122-767715720E26}">
-      <dgm:prSet/>
-      <dgm:spPr/>
-      <dgm:t>
-        <a:bodyPr/>
-        <a:lstStyle/>
-        <a:p>
-          <a:r>
-            <a:rPr lang="zh-TW"/>
-            <a:t>估計及假設檢定 </a:t>
-          </a:r>
-          <a:endParaRPr lang="en-US"/>
-        </a:p>
-      </dgm:t>
-    </dgm:pt>
-    <dgm:pt modelId="{F2DE9C85-F585-43C0-BBBD-8CC213F9C160}" type="parTrans" cxnId="{55D14811-46E9-41A0-B9A4-874DE401D75F}">
-      <dgm:prSet/>
-      <dgm:spPr/>
-      <dgm:t>
-        <a:bodyPr/>
-        <a:lstStyle/>
-        <a:p>
-          <a:endParaRPr lang="en-US"/>
-        </a:p>
-      </dgm:t>
-    </dgm:pt>
-    <dgm:pt modelId="{B43044AF-2C81-4149-BDB4-D800DF3F9664}" type="sibTrans" cxnId="{55D14811-46E9-41A0-B9A4-874DE401D75F}">
-      <dgm:prSet/>
-      <dgm:spPr/>
-      <dgm:t>
-        <a:bodyPr/>
-        <a:lstStyle/>
-        <a:p>
-          <a:endParaRPr lang="en-US"/>
-        </a:p>
-      </dgm:t>
-    </dgm:pt>
-    <dgm:pt modelId="{99D18AE3-CB62-4981-B874-2B64043BF0FA}">
-      <dgm:prSet/>
-      <dgm:spPr/>
-      <dgm:t>
-        <a:bodyPr/>
-        <a:lstStyle/>
-        <a:p>
-          <a:r>
-            <a:rPr lang="zh-TW"/>
-            <a:t>單樣本及雙樣本檢定 </a:t>
-          </a:r>
-          <a:endParaRPr lang="en-US"/>
-        </a:p>
-      </dgm:t>
-    </dgm:pt>
-    <dgm:pt modelId="{0C37CF01-1005-41A6-BA47-B19ED6E158B2}" type="parTrans" cxnId="{90375B06-A81D-402F-9A70-E8B5790D0C20}">
-      <dgm:prSet/>
-      <dgm:spPr/>
-      <dgm:t>
-        <a:bodyPr/>
-        <a:lstStyle/>
-        <a:p>
-          <a:endParaRPr lang="en-US"/>
-        </a:p>
-      </dgm:t>
-    </dgm:pt>
-    <dgm:pt modelId="{9EAB1074-9BD3-4454-8C3C-4FCE7F089E3D}" type="sibTrans" cxnId="{90375B06-A81D-402F-9A70-E8B5790D0C20}">
-      <dgm:prSet/>
-      <dgm:spPr/>
-      <dgm:t>
-        <a:bodyPr/>
-        <a:lstStyle/>
-        <a:p>
-          <a:endParaRPr lang="en-US"/>
-        </a:p>
-      </dgm:t>
-    </dgm:pt>
-    <dgm:pt modelId="{1E4BE391-50F6-44F6-947F-7CBB39E94BD2}">
-      <dgm:prSet/>
-      <dgm:spPr/>
-      <dgm:t>
-        <a:bodyPr/>
-        <a:lstStyle/>
-        <a:p>
-          <a:r>
-            <a:rPr lang="zh-TW"/>
-            <a:t>平均數檢定：多組樣本 </a:t>
-          </a:r>
-          <a:endParaRPr lang="en-US"/>
-        </a:p>
-      </dgm:t>
-    </dgm:pt>
-    <dgm:pt modelId="{995B025B-E2B1-4706-8304-BD9CC9646257}" type="parTrans" cxnId="{BEC44CB1-128B-43C7-BC32-B1EC5094AD59}">
-      <dgm:prSet/>
-      <dgm:spPr/>
-      <dgm:t>
-        <a:bodyPr/>
-        <a:lstStyle/>
-        <a:p>
-          <a:endParaRPr lang="en-US"/>
-        </a:p>
-      </dgm:t>
-    </dgm:pt>
-    <dgm:pt modelId="{38B69F17-989D-4BA0-B9EA-609D8FF802D2}" type="sibTrans" cxnId="{BEC44CB1-128B-43C7-BC32-B1EC5094AD59}">
-      <dgm:prSet/>
-      <dgm:spPr/>
-      <dgm:t>
-        <a:bodyPr/>
-        <a:lstStyle/>
-        <a:p>
-          <a:endParaRPr lang="en-US"/>
-        </a:p>
-      </dgm:t>
-    </dgm:pt>
-    <dgm:pt modelId="{A84A2553-929F-4DE3-B4B4-F42B8AFDB651}">
-      <dgm:prSet/>
-      <dgm:spPr/>
-      <dgm:t>
-        <a:bodyPr/>
-        <a:lstStyle/>
-        <a:p>
-          <a:r>
-            <a:rPr lang="zh-TW"/>
-            <a:t>兩個類別變數之檢定 </a:t>
-          </a:r>
-          <a:endParaRPr lang="en-US"/>
-        </a:p>
-      </dgm:t>
-    </dgm:pt>
-    <dgm:pt modelId="{00E1B453-9EA1-437F-9D2B-703F8F338579}" type="parTrans" cxnId="{AF84948D-FF21-41F2-8FFB-D8B1C5B75F1E}">
-      <dgm:prSet/>
-      <dgm:spPr/>
-      <dgm:t>
-        <a:bodyPr/>
-        <a:lstStyle/>
-        <a:p>
-          <a:endParaRPr lang="en-US"/>
-        </a:p>
-      </dgm:t>
-    </dgm:pt>
-    <dgm:pt modelId="{FC5291B4-DC7C-4A3B-90BD-23FAA833DACF}" type="sibTrans" cxnId="{AF84948D-FF21-41F2-8FFB-D8B1C5B75F1E}">
-      <dgm:prSet/>
-      <dgm:spPr/>
-      <dgm:t>
-        <a:bodyPr/>
-        <a:lstStyle/>
-        <a:p>
-          <a:endParaRPr lang="en-US"/>
-        </a:p>
-      </dgm:t>
-    </dgm:pt>
-    <dgm:pt modelId="{DE5258EF-96ED-4E39-913D-CE602BE62CD8}">
-      <dgm:prSet/>
-      <dgm:spPr/>
-      <dgm:t>
-        <a:bodyPr/>
-        <a:lstStyle/>
-        <a:p>
-          <a:r>
-            <a:rPr lang="zh-TW"/>
-            <a:t>相關和廻歸分析（一） </a:t>
-          </a:r>
-          <a:endParaRPr lang="en-US"/>
-        </a:p>
-      </dgm:t>
-    </dgm:pt>
-    <dgm:pt modelId="{698F0D21-1E24-4E8A-9A28-2C16578D679D}" type="parTrans" cxnId="{AD73AF77-DB8D-422F-A954-81716AFAD29A}">
-      <dgm:prSet/>
-      <dgm:spPr/>
-      <dgm:t>
-        <a:bodyPr/>
-        <a:lstStyle/>
-        <a:p>
-          <a:endParaRPr lang="en-US"/>
-        </a:p>
-      </dgm:t>
-    </dgm:pt>
-    <dgm:pt modelId="{E46B09AE-55E0-4471-94AF-5D0A48D78893}" type="sibTrans" cxnId="{AD73AF77-DB8D-422F-A954-81716AFAD29A}">
-      <dgm:prSet/>
-      <dgm:spPr/>
-      <dgm:t>
-        <a:bodyPr/>
-        <a:lstStyle/>
-        <a:p>
-          <a:endParaRPr lang="en-US"/>
-        </a:p>
-      </dgm:t>
-    </dgm:pt>
-    <dgm:pt modelId="{A9C86947-7E8D-41C7-8D04-2447178D58C8}">
-      <dgm:prSet/>
-      <dgm:spPr/>
-      <dgm:t>
-        <a:bodyPr/>
-        <a:lstStyle/>
-        <a:p>
-          <a:r>
-            <a:rPr lang="zh-TW"/>
-            <a:t>相關和廻歸分析（二）</a:t>
-          </a:r>
-          <a:endParaRPr lang="en-US"/>
-        </a:p>
-      </dgm:t>
-    </dgm:pt>
-    <dgm:pt modelId="{0C32D36E-3B44-40B7-8278-18EF683FEF73}" type="parTrans" cxnId="{5764AABA-CAEE-4BE9-85C6-8773C40A4DD3}">
-      <dgm:prSet/>
-      <dgm:spPr/>
-      <dgm:t>
-        <a:bodyPr/>
-        <a:lstStyle/>
-        <a:p>
-          <a:endParaRPr lang="en-US"/>
-        </a:p>
-      </dgm:t>
-    </dgm:pt>
-    <dgm:pt modelId="{4F35F32F-428A-4336-8ECC-2A7AEE3E2069}" type="sibTrans" cxnId="{5764AABA-CAEE-4BE9-85C6-8773C40A4DD3}">
-      <dgm:prSet/>
-      <dgm:spPr/>
-      <dgm:t>
-        <a:bodyPr/>
-        <a:lstStyle/>
-        <a:p>
-          <a:endParaRPr lang="en-US"/>
-        </a:p>
-      </dgm:t>
-    </dgm:pt>
-    <dgm:pt modelId="{C607AE3F-8750-4854-86CF-EFD9E128F73F}">
-      <dgm:prSet/>
-      <dgm:spPr/>
-      <dgm:t>
-        <a:bodyPr/>
-        <a:lstStyle/>
-        <a:p>
-          <a:r>
-            <a:rPr lang="zh-TW"/>
-            <a:t>多變項迴歸分析 </a:t>
-          </a:r>
-          <a:endParaRPr lang="en-US"/>
-        </a:p>
-      </dgm:t>
-    </dgm:pt>
-    <dgm:pt modelId="{6A773635-A933-49F8-9B18-DBC6DFE45CD5}" type="parTrans" cxnId="{E7963C13-0768-4935-8AA6-1B93ABB0028E}">
-      <dgm:prSet/>
-      <dgm:spPr/>
-      <dgm:t>
-        <a:bodyPr/>
-        <a:lstStyle/>
-        <a:p>
-          <a:endParaRPr lang="en-US"/>
-        </a:p>
-      </dgm:t>
-    </dgm:pt>
-    <dgm:pt modelId="{024C2D3E-299A-4B87-B781-1D0F219A66FA}" type="sibTrans" cxnId="{E7963C13-0768-4935-8AA6-1B93ABB0028E}">
-      <dgm:prSet/>
-      <dgm:spPr/>
-      <dgm:t>
-        <a:bodyPr/>
-        <a:lstStyle/>
-        <a:p>
-          <a:endParaRPr lang="en-US"/>
-        </a:p>
-      </dgm:t>
-    </dgm:pt>
-    <dgm:pt modelId="{32C057CA-9202-47B9-AD7D-50A86F21230B}" type="pres">
-      <dgm:prSet presAssocID="{D08BA451-C321-4943-B78A-53683E9DC78E}" presName="vert0" presStyleCnt="0">
-        <dgm:presLayoutVars>
-          <dgm:dir/>
-          <dgm:animOne val="branch"/>
-          <dgm:animLvl val="lvl"/>
-        </dgm:presLayoutVars>
-      </dgm:prSet>
-      <dgm:spPr/>
-    </dgm:pt>
-    <dgm:pt modelId="{85A58F84-4DCA-491D-98FA-A6A75C5844E3}" type="pres">
-      <dgm:prSet presAssocID="{E8BCB541-2CA4-48EF-8A00-F09EE3482684}" presName="thickLine" presStyleLbl="alignNode1" presStyleIdx="0" presStyleCnt="9"/>
-      <dgm:spPr/>
-    </dgm:pt>
-    <dgm:pt modelId="{A53763EB-98D8-4086-96C8-77239AE667E4}" type="pres">
-      <dgm:prSet presAssocID="{E8BCB541-2CA4-48EF-8A00-F09EE3482684}" presName="horz1" presStyleCnt="0"/>
-      <dgm:spPr/>
-    </dgm:pt>
-    <dgm:pt modelId="{E873261E-7A94-4CA9-A872-967EA2483D37}" type="pres">
-      <dgm:prSet presAssocID="{E8BCB541-2CA4-48EF-8A00-F09EE3482684}" presName="tx1" presStyleLbl="revTx" presStyleIdx="0" presStyleCnt="9"/>
-      <dgm:spPr/>
-    </dgm:pt>
-    <dgm:pt modelId="{8FA66CF2-F5E6-4F94-A5C2-DB4E1D154EE7}" type="pres">
-      <dgm:prSet presAssocID="{E8BCB541-2CA4-48EF-8A00-F09EE3482684}" presName="vert1" presStyleCnt="0"/>
-      <dgm:spPr/>
-    </dgm:pt>
-    <dgm:pt modelId="{E58D3F3C-8D43-4518-AC65-259ADEAE0A32}" type="pres">
-      <dgm:prSet presAssocID="{A71798FF-F0C7-4E98-B728-F62030BB2E04}" presName="thickLine" presStyleLbl="alignNode1" presStyleIdx="1" presStyleCnt="9"/>
-      <dgm:spPr/>
-    </dgm:pt>
-    <dgm:pt modelId="{F7123E10-217B-4CA2-B6CD-466EFAD0B89E}" type="pres">
-      <dgm:prSet presAssocID="{A71798FF-F0C7-4E98-B728-F62030BB2E04}" presName="horz1" presStyleCnt="0"/>
-      <dgm:spPr/>
-    </dgm:pt>
-    <dgm:pt modelId="{7134CFB3-B9B9-43E5-BC48-AE85D4ADB276}" type="pres">
-      <dgm:prSet presAssocID="{A71798FF-F0C7-4E98-B728-F62030BB2E04}" presName="tx1" presStyleLbl="revTx" presStyleIdx="1" presStyleCnt="9"/>
-      <dgm:spPr/>
-    </dgm:pt>
-    <dgm:pt modelId="{4CDA3C95-8D95-45EB-8094-D77A34C1D56B}" type="pres">
-      <dgm:prSet presAssocID="{A71798FF-F0C7-4E98-B728-F62030BB2E04}" presName="vert1" presStyleCnt="0"/>
-      <dgm:spPr/>
-    </dgm:pt>
-    <dgm:pt modelId="{EEF311F4-EF5C-4077-82DE-9276A4E1F1C6}" type="pres">
-      <dgm:prSet presAssocID="{9D31A52D-A9E8-4331-8122-767715720E26}" presName="thickLine" presStyleLbl="alignNode1" presStyleIdx="2" presStyleCnt="9"/>
-      <dgm:spPr/>
-    </dgm:pt>
-    <dgm:pt modelId="{316CFCAD-3C58-4D71-BFE8-A58D0290D0A7}" type="pres">
-      <dgm:prSet presAssocID="{9D31A52D-A9E8-4331-8122-767715720E26}" presName="horz1" presStyleCnt="0"/>
-      <dgm:spPr/>
-    </dgm:pt>
-    <dgm:pt modelId="{16C19FF4-AC88-4BDC-A123-71C79435D594}" type="pres">
-      <dgm:prSet presAssocID="{9D31A52D-A9E8-4331-8122-767715720E26}" presName="tx1" presStyleLbl="revTx" presStyleIdx="2" presStyleCnt="9"/>
-      <dgm:spPr/>
-    </dgm:pt>
-    <dgm:pt modelId="{910CA572-BC60-4774-8CBB-E3F14AAED9C1}" type="pres">
-      <dgm:prSet presAssocID="{9D31A52D-A9E8-4331-8122-767715720E26}" presName="vert1" presStyleCnt="0"/>
-      <dgm:spPr/>
-    </dgm:pt>
-    <dgm:pt modelId="{B207FA8F-1A13-4CA2-8354-B51039C53384}" type="pres">
-      <dgm:prSet presAssocID="{99D18AE3-CB62-4981-B874-2B64043BF0FA}" presName="thickLine" presStyleLbl="alignNode1" presStyleIdx="3" presStyleCnt="9"/>
-      <dgm:spPr/>
-    </dgm:pt>
-    <dgm:pt modelId="{6091A7B0-A7C7-4F3B-9DF8-3677BAC312F5}" type="pres">
-      <dgm:prSet presAssocID="{99D18AE3-CB62-4981-B874-2B64043BF0FA}" presName="horz1" presStyleCnt="0"/>
-      <dgm:spPr/>
-    </dgm:pt>
-    <dgm:pt modelId="{43C3574B-B92B-47F9-A205-6C9542AC19CD}" type="pres">
-      <dgm:prSet presAssocID="{99D18AE3-CB62-4981-B874-2B64043BF0FA}" presName="tx1" presStyleLbl="revTx" presStyleIdx="3" presStyleCnt="9"/>
-      <dgm:spPr/>
-    </dgm:pt>
-    <dgm:pt modelId="{771A2A9F-F0AF-4845-8BDB-4A7B8AF633A3}" type="pres">
-      <dgm:prSet presAssocID="{99D18AE3-CB62-4981-B874-2B64043BF0FA}" presName="vert1" presStyleCnt="0"/>
-      <dgm:spPr/>
-    </dgm:pt>
-    <dgm:pt modelId="{64200CC9-369A-4A6E-9357-6CCDF4A8046D}" type="pres">
-      <dgm:prSet presAssocID="{1E4BE391-50F6-44F6-947F-7CBB39E94BD2}" presName="thickLine" presStyleLbl="alignNode1" presStyleIdx="4" presStyleCnt="9"/>
-      <dgm:spPr/>
-    </dgm:pt>
-    <dgm:pt modelId="{AFB3EEEC-B5A9-422A-85C2-DC0A82EA749A}" type="pres">
-      <dgm:prSet presAssocID="{1E4BE391-50F6-44F6-947F-7CBB39E94BD2}" presName="horz1" presStyleCnt="0"/>
-      <dgm:spPr/>
-    </dgm:pt>
-    <dgm:pt modelId="{4FA2B502-C19E-4AEA-BA20-D6B75AE135DF}" type="pres">
-      <dgm:prSet presAssocID="{1E4BE391-50F6-44F6-947F-7CBB39E94BD2}" presName="tx1" presStyleLbl="revTx" presStyleIdx="4" presStyleCnt="9"/>
-      <dgm:spPr/>
-    </dgm:pt>
-    <dgm:pt modelId="{C96903C9-2CDE-4A50-A248-39ADDCFFE5AC}" type="pres">
-      <dgm:prSet presAssocID="{1E4BE391-50F6-44F6-947F-7CBB39E94BD2}" presName="vert1" presStyleCnt="0"/>
-      <dgm:spPr/>
-    </dgm:pt>
-    <dgm:pt modelId="{D4FC183D-67E0-422F-BF3F-6111C06270ED}" type="pres">
-      <dgm:prSet presAssocID="{A84A2553-929F-4DE3-B4B4-F42B8AFDB651}" presName="thickLine" presStyleLbl="alignNode1" presStyleIdx="5" presStyleCnt="9"/>
-      <dgm:spPr/>
-    </dgm:pt>
-    <dgm:pt modelId="{2608329F-18CE-4864-97EA-CCA8235339D2}" type="pres">
-      <dgm:prSet presAssocID="{A84A2553-929F-4DE3-B4B4-F42B8AFDB651}" presName="horz1" presStyleCnt="0"/>
-      <dgm:spPr/>
-    </dgm:pt>
-    <dgm:pt modelId="{4BF4FACB-F8F0-40DB-B5CE-533EBE569590}" type="pres">
-      <dgm:prSet presAssocID="{A84A2553-929F-4DE3-B4B4-F42B8AFDB651}" presName="tx1" presStyleLbl="revTx" presStyleIdx="5" presStyleCnt="9"/>
-      <dgm:spPr/>
-    </dgm:pt>
-    <dgm:pt modelId="{F1276651-8400-48FA-8898-582EBC656265}" type="pres">
-      <dgm:prSet presAssocID="{A84A2553-929F-4DE3-B4B4-F42B8AFDB651}" presName="vert1" presStyleCnt="0"/>
-      <dgm:spPr/>
-    </dgm:pt>
-    <dgm:pt modelId="{DD3E3AFE-9DC8-404D-9F57-A817433F199D}" type="pres">
-      <dgm:prSet presAssocID="{DE5258EF-96ED-4E39-913D-CE602BE62CD8}" presName="thickLine" presStyleLbl="alignNode1" presStyleIdx="6" presStyleCnt="9"/>
-      <dgm:spPr/>
-    </dgm:pt>
-    <dgm:pt modelId="{2FDD2CA5-59AC-4923-BF03-41722732A91F}" type="pres">
-      <dgm:prSet presAssocID="{DE5258EF-96ED-4E39-913D-CE602BE62CD8}" presName="horz1" presStyleCnt="0"/>
-      <dgm:spPr/>
-    </dgm:pt>
-    <dgm:pt modelId="{51242065-1B4A-462B-9E54-63D443E2961B}" type="pres">
-      <dgm:prSet presAssocID="{DE5258EF-96ED-4E39-913D-CE602BE62CD8}" presName="tx1" presStyleLbl="revTx" presStyleIdx="6" presStyleCnt="9"/>
-      <dgm:spPr/>
-    </dgm:pt>
-    <dgm:pt modelId="{53DE8EF3-9F85-4069-BFEC-5C61E6AC3D68}" type="pres">
-      <dgm:prSet presAssocID="{DE5258EF-96ED-4E39-913D-CE602BE62CD8}" presName="vert1" presStyleCnt="0"/>
-      <dgm:spPr/>
-    </dgm:pt>
-    <dgm:pt modelId="{B2227B60-0538-46C3-A293-858AECC296F0}" type="pres">
-      <dgm:prSet presAssocID="{A9C86947-7E8D-41C7-8D04-2447178D58C8}" presName="thickLine" presStyleLbl="alignNode1" presStyleIdx="7" presStyleCnt="9"/>
-      <dgm:spPr/>
-    </dgm:pt>
-    <dgm:pt modelId="{892676EA-2438-4BF5-9F19-FCAEF184D902}" type="pres">
-      <dgm:prSet presAssocID="{A9C86947-7E8D-41C7-8D04-2447178D58C8}" presName="horz1" presStyleCnt="0"/>
-      <dgm:spPr/>
-    </dgm:pt>
-    <dgm:pt modelId="{22546DCF-1FC9-4449-A34A-6C0208FB0591}" type="pres">
-      <dgm:prSet presAssocID="{A9C86947-7E8D-41C7-8D04-2447178D58C8}" presName="tx1" presStyleLbl="revTx" presStyleIdx="7" presStyleCnt="9"/>
-      <dgm:spPr/>
-    </dgm:pt>
-    <dgm:pt modelId="{FE1FDA58-F87B-4720-AEEF-52787BAE041B}" type="pres">
-      <dgm:prSet presAssocID="{A9C86947-7E8D-41C7-8D04-2447178D58C8}" presName="vert1" presStyleCnt="0"/>
-      <dgm:spPr/>
-    </dgm:pt>
-    <dgm:pt modelId="{10328081-F3D0-4976-BEA7-B48BA1E53F55}" type="pres">
-      <dgm:prSet presAssocID="{C607AE3F-8750-4854-86CF-EFD9E128F73F}" presName="thickLine" presStyleLbl="alignNode1" presStyleIdx="8" presStyleCnt="9"/>
-      <dgm:spPr/>
-    </dgm:pt>
-    <dgm:pt modelId="{7A560794-59E2-481C-97B0-B5444AB1D19A}" type="pres">
-      <dgm:prSet presAssocID="{C607AE3F-8750-4854-86CF-EFD9E128F73F}" presName="horz1" presStyleCnt="0"/>
-      <dgm:spPr/>
-    </dgm:pt>
-    <dgm:pt modelId="{580F1D3F-E0D3-4B76-8E4C-600E1C5C96BB}" type="pres">
-      <dgm:prSet presAssocID="{C607AE3F-8750-4854-86CF-EFD9E128F73F}" presName="tx1" presStyleLbl="revTx" presStyleIdx="8" presStyleCnt="9"/>
-      <dgm:spPr/>
-    </dgm:pt>
-    <dgm:pt modelId="{F85792B2-80A1-4A8F-B139-914440636D8F}" type="pres">
-      <dgm:prSet presAssocID="{C607AE3F-8750-4854-86CF-EFD9E128F73F}" presName="vert1" presStyleCnt="0"/>
-      <dgm:spPr/>
-    </dgm:pt>
-  </dgm:ptLst>
-  <dgm:cxnLst>
-    <dgm:cxn modelId="{90375B06-A81D-402F-9A70-E8B5790D0C20}" srcId="{D08BA451-C321-4943-B78A-53683E9DC78E}" destId="{99D18AE3-CB62-4981-B874-2B64043BF0FA}" srcOrd="3" destOrd="0" parTransId="{0C37CF01-1005-41A6-BA47-B19ED6E158B2}" sibTransId="{9EAB1074-9BD3-4454-8C3C-4FCE7F089E3D}"/>
-    <dgm:cxn modelId="{55D14811-46E9-41A0-B9A4-874DE401D75F}" srcId="{D08BA451-C321-4943-B78A-53683E9DC78E}" destId="{9D31A52D-A9E8-4331-8122-767715720E26}" srcOrd="2" destOrd="0" parTransId="{F2DE9C85-F585-43C0-BBBD-8CC213F9C160}" sibTransId="{B43044AF-2C81-4149-BDB4-D800DF3F9664}"/>
-    <dgm:cxn modelId="{E7963C13-0768-4935-8AA6-1B93ABB0028E}" srcId="{D08BA451-C321-4943-B78A-53683E9DC78E}" destId="{C607AE3F-8750-4854-86CF-EFD9E128F73F}" srcOrd="8" destOrd="0" parTransId="{6A773635-A933-49F8-9B18-DBC6DFE45CD5}" sibTransId="{024C2D3E-299A-4B87-B781-1D0F219A66FA}"/>
-    <dgm:cxn modelId="{7552B044-F8B8-451E-8035-FF4B50566FB6}" type="presOf" srcId="{DE5258EF-96ED-4E39-913D-CE602BE62CD8}" destId="{51242065-1B4A-462B-9E54-63D443E2961B}" srcOrd="0" destOrd="0" presId="urn:microsoft.com/office/officeart/2008/layout/LinedList"/>
-    <dgm:cxn modelId="{4393466E-5092-4FEB-B11E-351743022538}" type="presOf" srcId="{9D31A52D-A9E8-4331-8122-767715720E26}" destId="{16C19FF4-AC88-4BDC-A123-71C79435D594}" srcOrd="0" destOrd="0" presId="urn:microsoft.com/office/officeart/2008/layout/LinedList"/>
-    <dgm:cxn modelId="{23CD8776-C136-48DF-A2FA-1D1098D4ED7A}" type="presOf" srcId="{D08BA451-C321-4943-B78A-53683E9DC78E}" destId="{32C057CA-9202-47B9-AD7D-50A86F21230B}" srcOrd="0" destOrd="0" presId="urn:microsoft.com/office/officeart/2008/layout/LinedList"/>
-    <dgm:cxn modelId="{AD73AF77-DB8D-422F-A954-81716AFAD29A}" srcId="{D08BA451-C321-4943-B78A-53683E9DC78E}" destId="{DE5258EF-96ED-4E39-913D-CE602BE62CD8}" srcOrd="6" destOrd="0" parTransId="{698F0D21-1E24-4E8A-9A28-2C16578D679D}" sibTransId="{E46B09AE-55E0-4471-94AF-5D0A48D78893}"/>
-    <dgm:cxn modelId="{59B3BC5A-6496-44F8-9ED6-1BFF814F3DD4}" type="presOf" srcId="{A84A2553-929F-4DE3-B4B4-F42B8AFDB651}" destId="{4BF4FACB-F8F0-40DB-B5CE-533EBE569590}" srcOrd="0" destOrd="0" presId="urn:microsoft.com/office/officeart/2008/layout/LinedList"/>
-    <dgm:cxn modelId="{BD45167B-CE5A-4D8D-ABC4-E37E7FDE0538}" srcId="{D08BA451-C321-4943-B78A-53683E9DC78E}" destId="{A71798FF-F0C7-4E98-B728-F62030BB2E04}" srcOrd="1" destOrd="0" parTransId="{5607174A-F261-4DF5-8725-3AA8D04208E4}" sibTransId="{2BC817B1-22A1-4D49-85FE-8EC9A63FE20B}"/>
-    <dgm:cxn modelId="{736D0D7C-79F3-4ACA-A660-63983A069D49}" type="presOf" srcId="{C607AE3F-8750-4854-86CF-EFD9E128F73F}" destId="{580F1D3F-E0D3-4B76-8E4C-600E1C5C96BB}" srcOrd="0" destOrd="0" presId="urn:microsoft.com/office/officeart/2008/layout/LinedList"/>
-    <dgm:cxn modelId="{5F6D7F89-9873-4EBD-A079-9D68603D1A28}" srcId="{D08BA451-C321-4943-B78A-53683E9DC78E}" destId="{E8BCB541-2CA4-48EF-8A00-F09EE3482684}" srcOrd="0" destOrd="0" parTransId="{4A2005BD-8AD9-49A7-852F-E1673CCE2824}" sibTransId="{A9D83356-F80E-4A34-AFF6-2834D0280C55}"/>
-    <dgm:cxn modelId="{AF84948D-FF21-41F2-8FFB-D8B1C5B75F1E}" srcId="{D08BA451-C321-4943-B78A-53683E9DC78E}" destId="{A84A2553-929F-4DE3-B4B4-F42B8AFDB651}" srcOrd="5" destOrd="0" parTransId="{00E1B453-9EA1-437F-9D2B-703F8F338579}" sibTransId="{FC5291B4-DC7C-4A3B-90BD-23FAA833DACF}"/>
-    <dgm:cxn modelId="{A8B521A5-A0BA-482A-B38B-4EE3EB29ECEA}" type="presOf" srcId="{1E4BE391-50F6-44F6-947F-7CBB39E94BD2}" destId="{4FA2B502-C19E-4AEA-BA20-D6B75AE135DF}" srcOrd="0" destOrd="0" presId="urn:microsoft.com/office/officeart/2008/layout/LinedList"/>
-    <dgm:cxn modelId="{BEC44CB1-128B-43C7-BC32-B1EC5094AD59}" srcId="{D08BA451-C321-4943-B78A-53683E9DC78E}" destId="{1E4BE391-50F6-44F6-947F-7CBB39E94BD2}" srcOrd="4" destOrd="0" parTransId="{995B025B-E2B1-4706-8304-BD9CC9646257}" sibTransId="{38B69F17-989D-4BA0-B9EA-609D8FF802D2}"/>
-    <dgm:cxn modelId="{5764AABA-CAEE-4BE9-85C6-8773C40A4DD3}" srcId="{D08BA451-C321-4943-B78A-53683E9DC78E}" destId="{A9C86947-7E8D-41C7-8D04-2447178D58C8}" srcOrd="7" destOrd="0" parTransId="{0C32D36E-3B44-40B7-8278-18EF683FEF73}" sibTransId="{4F35F32F-428A-4336-8ECC-2A7AEE3E2069}"/>
-    <dgm:cxn modelId="{CE601DBF-36B9-490F-BCBC-2CC8DFD9D367}" type="presOf" srcId="{A9C86947-7E8D-41C7-8D04-2447178D58C8}" destId="{22546DCF-1FC9-4449-A34A-6C0208FB0591}" srcOrd="0" destOrd="0" presId="urn:microsoft.com/office/officeart/2008/layout/LinedList"/>
-    <dgm:cxn modelId="{4C664EBF-E4B9-493E-9AC9-45D987C1344B}" type="presOf" srcId="{99D18AE3-CB62-4981-B874-2B64043BF0FA}" destId="{43C3574B-B92B-47F9-A205-6C9542AC19CD}" srcOrd="0" destOrd="0" presId="urn:microsoft.com/office/officeart/2008/layout/LinedList"/>
-    <dgm:cxn modelId="{E5867AC7-3978-4169-98FF-8AD53F0A02F9}" type="presOf" srcId="{E8BCB541-2CA4-48EF-8A00-F09EE3482684}" destId="{E873261E-7A94-4CA9-A872-967EA2483D37}" srcOrd="0" destOrd="0" presId="urn:microsoft.com/office/officeart/2008/layout/LinedList"/>
-    <dgm:cxn modelId="{754B57F4-8EB9-4912-B902-A0E7AF7DBC05}" type="presOf" srcId="{A71798FF-F0C7-4E98-B728-F62030BB2E04}" destId="{7134CFB3-B9B9-43E5-BC48-AE85D4ADB276}" srcOrd="0" destOrd="0" presId="urn:microsoft.com/office/officeart/2008/layout/LinedList"/>
-    <dgm:cxn modelId="{D1E6BBD1-4CBE-41DA-A192-322C3D9FA832}" type="presParOf" srcId="{32C057CA-9202-47B9-AD7D-50A86F21230B}" destId="{85A58F84-4DCA-491D-98FA-A6A75C5844E3}" srcOrd="0" destOrd="0" presId="urn:microsoft.com/office/officeart/2008/layout/LinedList"/>
-    <dgm:cxn modelId="{24322C4F-FD30-44F5-BC77-98209C4DFBA0}" type="presParOf" srcId="{32C057CA-9202-47B9-AD7D-50A86F21230B}" destId="{A53763EB-98D8-4086-96C8-77239AE667E4}" srcOrd="1" destOrd="0" presId="urn:microsoft.com/office/officeart/2008/layout/LinedList"/>
-    <dgm:cxn modelId="{3FB5AEF2-52FA-4E3A-9191-B46252F0875A}" type="presParOf" srcId="{A53763EB-98D8-4086-96C8-77239AE667E4}" destId="{E873261E-7A94-4CA9-A872-967EA2483D37}" srcOrd="0" destOrd="0" presId="urn:microsoft.com/office/officeart/2008/layout/LinedList"/>
-    <dgm:cxn modelId="{4DBF86BC-4BB8-4E89-9469-1BF1607A2B62}" type="presParOf" srcId="{A53763EB-98D8-4086-96C8-77239AE667E4}" destId="{8FA66CF2-F5E6-4F94-A5C2-DB4E1D154EE7}" srcOrd="1" destOrd="0" presId="urn:microsoft.com/office/officeart/2008/layout/LinedList"/>
-    <dgm:cxn modelId="{1A569D2F-26EF-440D-980C-AAF849DFDCBB}" type="presParOf" srcId="{32C057CA-9202-47B9-AD7D-50A86F21230B}" destId="{E58D3F3C-8D43-4518-AC65-259ADEAE0A32}" srcOrd="2" destOrd="0" presId="urn:microsoft.com/office/officeart/2008/layout/LinedList"/>
-    <dgm:cxn modelId="{DB192C6A-D152-403F-88D6-43734434FDEF}" type="presParOf" srcId="{32C057CA-9202-47B9-AD7D-50A86F21230B}" destId="{F7123E10-217B-4CA2-B6CD-466EFAD0B89E}" srcOrd="3" destOrd="0" presId="urn:microsoft.com/office/officeart/2008/layout/LinedList"/>
-    <dgm:cxn modelId="{5E814C26-72F0-4269-ADAA-13612F0B7F17}" type="presParOf" srcId="{F7123E10-217B-4CA2-B6CD-466EFAD0B89E}" destId="{7134CFB3-B9B9-43E5-BC48-AE85D4ADB276}" srcOrd="0" destOrd="0" presId="urn:microsoft.com/office/officeart/2008/layout/LinedList"/>
-    <dgm:cxn modelId="{F25A509C-E280-4FA3-A4A5-14D24E4F6A21}" type="presParOf" srcId="{F7123E10-217B-4CA2-B6CD-466EFAD0B89E}" destId="{4CDA3C95-8D95-45EB-8094-D77A34C1D56B}" srcOrd="1" destOrd="0" presId="urn:microsoft.com/office/officeart/2008/layout/LinedList"/>
-    <dgm:cxn modelId="{D4F7AF5F-208F-44FD-A82B-72B2D95FCCAB}" type="presParOf" srcId="{32C057CA-9202-47B9-AD7D-50A86F21230B}" destId="{EEF311F4-EF5C-4077-82DE-9276A4E1F1C6}" srcOrd="4" destOrd="0" presId="urn:microsoft.com/office/officeart/2008/layout/LinedList"/>
-    <dgm:cxn modelId="{1C31C2C9-6BC4-4C8B-8846-0FEF9A0DD48F}" type="presParOf" srcId="{32C057CA-9202-47B9-AD7D-50A86F21230B}" destId="{316CFCAD-3C58-4D71-BFE8-A58D0290D0A7}" srcOrd="5" destOrd="0" presId="urn:microsoft.com/office/officeart/2008/layout/LinedList"/>
-    <dgm:cxn modelId="{7088415F-ECD1-4CD6-81FA-60129715001B}" type="presParOf" srcId="{316CFCAD-3C58-4D71-BFE8-A58D0290D0A7}" destId="{16C19FF4-AC88-4BDC-A123-71C79435D594}" srcOrd="0" destOrd="0" presId="urn:microsoft.com/office/officeart/2008/layout/LinedList"/>
-    <dgm:cxn modelId="{D4F72087-48B0-46E3-9DD0-2B0736EC8AFB}" type="presParOf" srcId="{316CFCAD-3C58-4D71-BFE8-A58D0290D0A7}" destId="{910CA572-BC60-4774-8CBB-E3F14AAED9C1}" srcOrd="1" destOrd="0" presId="urn:microsoft.com/office/officeart/2008/layout/LinedList"/>
-    <dgm:cxn modelId="{2AE9C495-B57E-4F9B-AEA2-0C32BEBE0900}" type="presParOf" srcId="{32C057CA-9202-47B9-AD7D-50A86F21230B}" destId="{B207FA8F-1A13-4CA2-8354-B51039C53384}" srcOrd="6" destOrd="0" presId="urn:microsoft.com/office/officeart/2008/layout/LinedList"/>
-    <dgm:cxn modelId="{FB9988EA-55AB-480E-9093-8BCCF798C318}" type="presParOf" srcId="{32C057CA-9202-47B9-AD7D-50A86F21230B}" destId="{6091A7B0-A7C7-4F3B-9DF8-3677BAC312F5}" srcOrd="7" destOrd="0" presId="urn:microsoft.com/office/officeart/2008/layout/LinedList"/>
-    <dgm:cxn modelId="{F99126AF-C598-4138-9E11-70AA83FB6E40}" type="presParOf" srcId="{6091A7B0-A7C7-4F3B-9DF8-3677BAC312F5}" destId="{43C3574B-B92B-47F9-A205-6C9542AC19CD}" srcOrd="0" destOrd="0" presId="urn:microsoft.com/office/officeart/2008/layout/LinedList"/>
-    <dgm:cxn modelId="{7EBDD83E-7148-4771-8438-A087BBA21246}" type="presParOf" srcId="{6091A7B0-A7C7-4F3B-9DF8-3677BAC312F5}" destId="{771A2A9F-F0AF-4845-8BDB-4A7B8AF633A3}" srcOrd="1" destOrd="0" presId="urn:microsoft.com/office/officeart/2008/layout/LinedList"/>
-    <dgm:cxn modelId="{57A9D2FE-7783-418E-9D4E-3C2187D5DE84}" type="presParOf" srcId="{32C057CA-9202-47B9-AD7D-50A86F21230B}" destId="{64200CC9-369A-4A6E-9357-6CCDF4A8046D}" srcOrd="8" destOrd="0" presId="urn:microsoft.com/office/officeart/2008/layout/LinedList"/>
-    <dgm:cxn modelId="{1BE32820-7C32-409A-A5EE-39E5866F2BD1}" type="presParOf" srcId="{32C057CA-9202-47B9-AD7D-50A86F21230B}" destId="{AFB3EEEC-B5A9-422A-85C2-DC0A82EA749A}" srcOrd="9" destOrd="0" presId="urn:microsoft.com/office/officeart/2008/layout/LinedList"/>
-    <dgm:cxn modelId="{47D77218-E141-44E1-BE25-8D206CF5B32B}" type="presParOf" srcId="{AFB3EEEC-B5A9-422A-85C2-DC0A82EA749A}" destId="{4FA2B502-C19E-4AEA-BA20-D6B75AE135DF}" srcOrd="0" destOrd="0" presId="urn:microsoft.com/office/officeart/2008/layout/LinedList"/>
-    <dgm:cxn modelId="{8D6B0DFF-0B48-4CCD-AAF9-02C2EA7D2D08}" type="presParOf" srcId="{AFB3EEEC-B5A9-422A-85C2-DC0A82EA749A}" destId="{C96903C9-2CDE-4A50-A248-39ADDCFFE5AC}" srcOrd="1" destOrd="0" presId="urn:microsoft.com/office/officeart/2008/layout/LinedList"/>
-    <dgm:cxn modelId="{DE535BB9-1658-4074-B0EE-32E5AA24C592}" type="presParOf" srcId="{32C057CA-9202-47B9-AD7D-50A86F21230B}" destId="{D4FC183D-67E0-422F-BF3F-6111C06270ED}" srcOrd="10" destOrd="0" presId="urn:microsoft.com/office/officeart/2008/layout/LinedList"/>
-    <dgm:cxn modelId="{90F6ACF3-5EE8-4E0F-8CFA-524F6A01B71D}" type="presParOf" srcId="{32C057CA-9202-47B9-AD7D-50A86F21230B}" destId="{2608329F-18CE-4864-97EA-CCA8235339D2}" srcOrd="11" destOrd="0" presId="urn:microsoft.com/office/officeart/2008/layout/LinedList"/>
-    <dgm:cxn modelId="{C59F244A-927C-49C8-B68F-D7663FA2513C}" type="presParOf" srcId="{2608329F-18CE-4864-97EA-CCA8235339D2}" destId="{4BF4FACB-F8F0-40DB-B5CE-533EBE569590}" srcOrd="0" destOrd="0" presId="urn:microsoft.com/office/officeart/2008/layout/LinedList"/>
-    <dgm:cxn modelId="{1AAE5765-988C-47EF-B8A0-DDBBC4425B56}" type="presParOf" srcId="{2608329F-18CE-4864-97EA-CCA8235339D2}" destId="{F1276651-8400-48FA-8898-582EBC656265}" srcOrd="1" destOrd="0" presId="urn:microsoft.com/office/officeart/2008/layout/LinedList"/>
-    <dgm:cxn modelId="{B11988BE-ACA1-4297-9CB8-8DAC887CDE93}" type="presParOf" srcId="{32C057CA-9202-47B9-AD7D-50A86F21230B}" destId="{DD3E3AFE-9DC8-404D-9F57-A817433F199D}" srcOrd="12" destOrd="0" presId="urn:microsoft.com/office/officeart/2008/layout/LinedList"/>
-    <dgm:cxn modelId="{A4488CF5-6972-4D96-86A6-CD24F6DBB2B1}" type="presParOf" srcId="{32C057CA-9202-47B9-AD7D-50A86F21230B}" destId="{2FDD2CA5-59AC-4923-BF03-41722732A91F}" srcOrd="13" destOrd="0" presId="urn:microsoft.com/office/officeart/2008/layout/LinedList"/>
-    <dgm:cxn modelId="{DF013E3D-E949-4A2F-BDEB-71FD3349516F}" type="presParOf" srcId="{2FDD2CA5-59AC-4923-BF03-41722732A91F}" destId="{51242065-1B4A-462B-9E54-63D443E2961B}" srcOrd="0" destOrd="0" presId="urn:microsoft.com/office/officeart/2008/layout/LinedList"/>
-    <dgm:cxn modelId="{F7E65262-3F4E-47EF-A4F8-220565AF3EBB}" type="presParOf" srcId="{2FDD2CA5-59AC-4923-BF03-41722732A91F}" destId="{53DE8EF3-9F85-4069-BFEC-5C61E6AC3D68}" srcOrd="1" destOrd="0" presId="urn:microsoft.com/office/officeart/2008/layout/LinedList"/>
-    <dgm:cxn modelId="{459A9C29-DE77-4583-A92F-FA5DB8A31658}" type="presParOf" srcId="{32C057CA-9202-47B9-AD7D-50A86F21230B}" destId="{B2227B60-0538-46C3-A293-858AECC296F0}" srcOrd="14" destOrd="0" presId="urn:microsoft.com/office/officeart/2008/layout/LinedList"/>
-    <dgm:cxn modelId="{2322C96A-2B66-40AC-A192-7D72A7CD9019}" type="presParOf" srcId="{32C057CA-9202-47B9-AD7D-50A86F21230B}" destId="{892676EA-2438-4BF5-9F19-FCAEF184D902}" srcOrd="15" destOrd="0" presId="urn:microsoft.com/office/officeart/2008/layout/LinedList"/>
-    <dgm:cxn modelId="{46FA453D-38DA-4978-AFBC-E9FB44A0C344}" type="presParOf" srcId="{892676EA-2438-4BF5-9F19-FCAEF184D902}" destId="{22546DCF-1FC9-4449-A34A-6C0208FB0591}" srcOrd="0" destOrd="0" presId="urn:microsoft.com/office/officeart/2008/layout/LinedList"/>
-    <dgm:cxn modelId="{4A2AACFD-10F5-4C4D-A932-AA0A00381568}" type="presParOf" srcId="{892676EA-2438-4BF5-9F19-FCAEF184D902}" destId="{FE1FDA58-F87B-4720-AEEF-52787BAE041B}" srcOrd="1" destOrd="0" presId="urn:microsoft.com/office/officeart/2008/layout/LinedList"/>
-    <dgm:cxn modelId="{177311CB-AEAC-4E34-9A66-70F2A797BF44}" type="presParOf" srcId="{32C057CA-9202-47B9-AD7D-50A86F21230B}" destId="{10328081-F3D0-4976-BEA7-B48BA1E53F55}" srcOrd="16" destOrd="0" presId="urn:microsoft.com/office/officeart/2008/layout/LinedList"/>
-    <dgm:cxn modelId="{94E63E3C-6074-4E6A-9EDE-48F0BB5F8245}" type="presParOf" srcId="{32C057CA-9202-47B9-AD7D-50A86F21230B}" destId="{7A560794-59E2-481C-97B0-B5444AB1D19A}" srcOrd="17" destOrd="0" presId="urn:microsoft.com/office/officeart/2008/layout/LinedList"/>
-    <dgm:cxn modelId="{8FB7F352-C60C-478F-8B17-A28B4A07643F}" type="presParOf" srcId="{7A560794-59E2-481C-97B0-B5444AB1D19A}" destId="{580F1D3F-E0D3-4B76-8E4C-600E1C5C96BB}" srcOrd="0" destOrd="0" presId="urn:microsoft.com/office/officeart/2008/layout/LinedList"/>
-    <dgm:cxn modelId="{B7BDA15F-ECCC-40EA-A358-607093251F16}" type="presParOf" srcId="{7A560794-59E2-481C-97B0-B5444AB1D19A}" destId="{F85792B2-80A1-4A8F-B139-914440636D8F}" srcOrd="1" destOrd="0" presId="urn:microsoft.com/office/officeart/2008/layout/LinedList"/>
-  </dgm:cxnLst>
-  <dgm:bg/>
-  <dgm:whole/>
-  <dgm:extLst>
-    <a:ext uri="http://schemas.microsoft.com/office/drawing/2008/diagram">
-      <dsp:dataModelExt xmlns:dsp="http://schemas.microsoft.com/office/drawing/2008/diagram" relId="rId6" minVer="http://schemas.openxmlformats.org/drawingml/2006/diagram"/>
-    </a:ext>
-  </dgm:extLst>
-</dgm:dataModel>
-</file>
-
-<file path=ppt/diagrams/drawing1.xml><?xml version="1.0" encoding="utf-8"?>
-<dsp:drawing xmlns:dgm="http://schemas.openxmlformats.org/drawingml/2006/diagram" xmlns:dsp="http://schemas.microsoft.com/office/drawing/2008/diagram" xmlns:a="http://schemas.openxmlformats.org/drawingml/2006/main">
-  <dsp:spTree>
-    <dsp:nvGrpSpPr>
-      <dsp:cNvPr id="0" name=""/>
-      <dsp:cNvGrpSpPr/>
-    </dsp:nvGrpSpPr>
-    <dsp:grpSpPr/>
-    <dsp:sp modelId="{85A58F84-4DCA-491D-98FA-A6A75C5844E3}">
-      <dsp:nvSpPr>
-        <dsp:cNvPr id="0" name=""/>
-        <dsp:cNvSpPr/>
-      </dsp:nvSpPr>
-      <dsp:spPr>
-        <a:xfrm>
-          <a:off x="0" y="694"/>
-          <a:ext cx="4896544" cy="0"/>
-        </a:xfrm>
-        <a:prstGeom prst="line">
-          <a:avLst/>
-        </a:prstGeom>
-        <a:solidFill>
-          <a:schemeClr val="accent1">
-            <a:hueOff val="0"/>
-            <a:satOff val="0"/>
-            <a:lumOff val="0"/>
-            <a:alphaOff val="0"/>
-          </a:schemeClr>
-        </a:solidFill>
-        <a:ln w="12700" cap="flat" cmpd="sng" algn="ctr">
-          <a:solidFill>
-            <a:schemeClr val="accent1">
-              <a:hueOff val="0"/>
-              <a:satOff val="0"/>
-              <a:lumOff val="0"/>
-              <a:alphaOff val="0"/>
-            </a:schemeClr>
-          </a:solidFill>
-          <a:prstDash val="solid"/>
-        </a:ln>
-        <a:effectLst/>
-      </dsp:spPr>
-      <dsp:style>
-        <a:lnRef idx="2">
-          <a:scrgbClr r="0" g="0" b="0"/>
-        </a:lnRef>
-        <a:fillRef idx="1">
-          <a:scrgbClr r="0" g="0" b="0"/>
-        </a:fillRef>
-        <a:effectRef idx="0">
-          <a:scrgbClr r="0" g="0" b="0"/>
-        </a:effectRef>
-        <a:fontRef idx="minor">
-          <a:schemeClr val="lt1"/>
-        </a:fontRef>
-      </dsp:style>
-    </dsp:sp>
-    <dsp:sp modelId="{E873261E-7A94-4CA9-A872-967EA2483D37}">
-      <dsp:nvSpPr>
-        <dsp:cNvPr id="0" name=""/>
-        <dsp:cNvSpPr/>
-      </dsp:nvSpPr>
-      <dsp:spPr>
-        <a:xfrm>
-          <a:off x="0" y="694"/>
-          <a:ext cx="4896544" cy="631915"/>
-        </a:xfrm>
-        <a:prstGeom prst="rect">
-          <a:avLst/>
-        </a:prstGeom>
-        <a:noFill/>
-        <a:ln>
-          <a:noFill/>
-        </a:ln>
-        <a:effectLst/>
-      </dsp:spPr>
-      <dsp:style>
-        <a:lnRef idx="0">
-          <a:scrgbClr r="0" g="0" b="0"/>
-        </a:lnRef>
-        <a:fillRef idx="0">
-          <a:scrgbClr r="0" g="0" b="0"/>
-        </a:fillRef>
-        <a:effectRef idx="0">
-          <a:scrgbClr r="0" g="0" b="0"/>
-        </a:effectRef>
-        <a:fontRef idx="minor"/>
-      </dsp:style>
-      <dsp:txBody>
-        <a:bodyPr spcFirstLastPara="0" vert="horz" wrap="square" lIns="102870" tIns="102870" rIns="102870" bIns="102870" numCol="1" spcCol="1270" anchor="t" anchorCtr="0">
-          <a:noAutofit/>
-        </a:bodyPr>
-        <a:lstStyle/>
-        <a:p>
-          <a:pPr marL="0" lvl="0" indent="0" algn="l" defTabSz="1200150">
-            <a:lnSpc>
-              <a:spcPct val="90000"/>
-            </a:lnSpc>
-            <a:spcBef>
-              <a:spcPct val="0"/>
-            </a:spcBef>
-            <a:spcAft>
-              <a:spcPct val="35000"/>
-            </a:spcAft>
-            <a:buNone/>
-          </a:pPr>
-          <a:r>
-            <a:rPr lang="zh-TW" sz="2700" kern="1200"/>
-            <a:t>描述資料特徵的統計量及圖表 </a:t>
-          </a:r>
-          <a:endParaRPr lang="en-US" sz="2700" kern="1200"/>
-        </a:p>
-      </dsp:txBody>
-      <dsp:txXfrm>
-        <a:off x="0" y="694"/>
-        <a:ext cx="4896544" cy="631915"/>
-      </dsp:txXfrm>
-    </dsp:sp>
-    <dsp:sp modelId="{E58D3F3C-8D43-4518-AC65-259ADEAE0A32}">
-      <dsp:nvSpPr>
-        <dsp:cNvPr id="0" name=""/>
-        <dsp:cNvSpPr/>
-      </dsp:nvSpPr>
-      <dsp:spPr>
-        <a:xfrm>
-          <a:off x="0" y="632610"/>
-          <a:ext cx="4896544" cy="0"/>
-        </a:xfrm>
-        <a:prstGeom prst="line">
-          <a:avLst/>
-        </a:prstGeom>
-        <a:solidFill>
-          <a:schemeClr val="accent1">
-            <a:hueOff val="0"/>
-            <a:satOff val="0"/>
-            <a:lumOff val="0"/>
-            <a:alphaOff val="0"/>
-          </a:schemeClr>
-        </a:solidFill>
-        <a:ln w="12700" cap="flat" cmpd="sng" algn="ctr">
-          <a:solidFill>
-            <a:schemeClr val="accent1">
-              <a:hueOff val="0"/>
-              <a:satOff val="0"/>
-              <a:lumOff val="0"/>
-              <a:alphaOff val="0"/>
-            </a:schemeClr>
-          </a:solidFill>
-          <a:prstDash val="solid"/>
-        </a:ln>
-        <a:effectLst/>
-      </dsp:spPr>
-      <dsp:style>
-        <a:lnRef idx="2">
-          <a:scrgbClr r="0" g="0" b="0"/>
-        </a:lnRef>
-        <a:fillRef idx="1">
-          <a:scrgbClr r="0" g="0" b="0"/>
-        </a:fillRef>
-        <a:effectRef idx="0">
-          <a:scrgbClr r="0" g="0" b="0"/>
-        </a:effectRef>
-        <a:fontRef idx="minor">
-          <a:schemeClr val="lt1"/>
-        </a:fontRef>
-      </dsp:style>
-    </dsp:sp>
-    <dsp:sp modelId="{7134CFB3-B9B9-43E5-BC48-AE85D4ADB276}">
-      <dsp:nvSpPr>
-        <dsp:cNvPr id="0" name=""/>
-        <dsp:cNvSpPr/>
-      </dsp:nvSpPr>
-      <dsp:spPr>
-        <a:xfrm>
-          <a:off x="0" y="632610"/>
-          <a:ext cx="4896544" cy="631915"/>
-        </a:xfrm>
-        <a:prstGeom prst="rect">
-          <a:avLst/>
-        </a:prstGeom>
-        <a:noFill/>
-        <a:ln>
-          <a:noFill/>
-        </a:ln>
-        <a:effectLst/>
-      </dsp:spPr>
-      <dsp:style>
-        <a:lnRef idx="0">
-          <a:scrgbClr r="0" g="0" b="0"/>
-        </a:lnRef>
-        <a:fillRef idx="0">
-          <a:scrgbClr r="0" g="0" b="0"/>
-        </a:fillRef>
-        <a:effectRef idx="0">
-          <a:scrgbClr r="0" g="0" b="0"/>
-        </a:effectRef>
-        <a:fontRef idx="minor"/>
-      </dsp:style>
-      <dsp:txBody>
-        <a:bodyPr spcFirstLastPara="0" vert="horz" wrap="square" lIns="102870" tIns="102870" rIns="102870" bIns="102870" numCol="1" spcCol="1270" anchor="t" anchorCtr="0">
-          <a:noAutofit/>
-        </a:bodyPr>
-        <a:lstStyle/>
-        <a:p>
-          <a:pPr marL="0" lvl="0" indent="0" algn="l" defTabSz="1200150">
-            <a:lnSpc>
-              <a:spcPct val="90000"/>
-            </a:lnSpc>
-            <a:spcBef>
-              <a:spcPct val="0"/>
-            </a:spcBef>
-            <a:spcAft>
-              <a:spcPct val="35000"/>
-            </a:spcAft>
-            <a:buNone/>
-          </a:pPr>
-          <a:r>
-            <a:rPr lang="zh-TW" sz="2700" kern="1200"/>
-            <a:t>基礎機率及分配、抽樣分配 </a:t>
-          </a:r>
-          <a:endParaRPr lang="en-US" sz="2700" kern="1200"/>
-        </a:p>
-      </dsp:txBody>
-      <dsp:txXfrm>
-        <a:off x="0" y="632610"/>
-        <a:ext cx="4896544" cy="631915"/>
-      </dsp:txXfrm>
-    </dsp:sp>
-    <dsp:sp modelId="{EEF311F4-EF5C-4077-82DE-9276A4E1F1C6}">
-      <dsp:nvSpPr>
-        <dsp:cNvPr id="0" name=""/>
-        <dsp:cNvSpPr/>
-      </dsp:nvSpPr>
-      <dsp:spPr>
-        <a:xfrm>
-          <a:off x="0" y="1264526"/>
-          <a:ext cx="4896544" cy="0"/>
-        </a:xfrm>
-        <a:prstGeom prst="line">
-          <a:avLst/>
-        </a:prstGeom>
-        <a:solidFill>
-          <a:schemeClr val="accent1">
-            <a:hueOff val="0"/>
-            <a:satOff val="0"/>
-            <a:lumOff val="0"/>
-            <a:alphaOff val="0"/>
-          </a:schemeClr>
-        </a:solidFill>
-        <a:ln w="12700" cap="flat" cmpd="sng" algn="ctr">
-          <a:solidFill>
-            <a:schemeClr val="accent1">
-              <a:hueOff val="0"/>
-              <a:satOff val="0"/>
-              <a:lumOff val="0"/>
-              <a:alphaOff val="0"/>
-            </a:schemeClr>
-          </a:solidFill>
-          <a:prstDash val="solid"/>
-        </a:ln>
-        <a:effectLst/>
-      </dsp:spPr>
-      <dsp:style>
-        <a:lnRef idx="2">
-          <a:scrgbClr r="0" g="0" b="0"/>
-        </a:lnRef>
-        <a:fillRef idx="1">
-          <a:scrgbClr r="0" g="0" b="0"/>
-        </a:fillRef>
-        <a:effectRef idx="0">
-          <a:scrgbClr r="0" g="0" b="0"/>
-        </a:effectRef>
-        <a:fontRef idx="minor">
-          <a:schemeClr val="lt1"/>
-        </a:fontRef>
-      </dsp:style>
-    </dsp:sp>
-    <dsp:sp modelId="{16C19FF4-AC88-4BDC-A123-71C79435D594}">
-      <dsp:nvSpPr>
-        <dsp:cNvPr id="0" name=""/>
-        <dsp:cNvSpPr/>
-      </dsp:nvSpPr>
-      <dsp:spPr>
-        <a:xfrm>
-          <a:off x="0" y="1264526"/>
-          <a:ext cx="4896544" cy="631915"/>
-        </a:xfrm>
-        <a:prstGeom prst="rect">
-          <a:avLst/>
-        </a:prstGeom>
-        <a:noFill/>
-        <a:ln>
-          <a:noFill/>
-        </a:ln>
-        <a:effectLst/>
-      </dsp:spPr>
-      <dsp:style>
-        <a:lnRef idx="0">
-          <a:scrgbClr r="0" g="0" b="0"/>
-        </a:lnRef>
-        <a:fillRef idx="0">
-          <a:scrgbClr r="0" g="0" b="0"/>
-        </a:fillRef>
-        <a:effectRef idx="0">
-          <a:scrgbClr r="0" g="0" b="0"/>
-        </a:effectRef>
-        <a:fontRef idx="minor"/>
-      </dsp:style>
-      <dsp:txBody>
-        <a:bodyPr spcFirstLastPara="0" vert="horz" wrap="square" lIns="102870" tIns="102870" rIns="102870" bIns="102870" numCol="1" spcCol="1270" anchor="t" anchorCtr="0">
-          <a:noAutofit/>
-        </a:bodyPr>
-        <a:lstStyle/>
-        <a:p>
-          <a:pPr marL="0" lvl="0" indent="0" algn="l" defTabSz="1200150">
-            <a:lnSpc>
-              <a:spcPct val="90000"/>
-            </a:lnSpc>
-            <a:spcBef>
-              <a:spcPct val="0"/>
-            </a:spcBef>
-            <a:spcAft>
-              <a:spcPct val="35000"/>
-            </a:spcAft>
-            <a:buNone/>
-          </a:pPr>
-          <a:r>
-            <a:rPr lang="zh-TW" sz="2700" kern="1200"/>
-            <a:t>估計及假設檢定 </a:t>
-          </a:r>
-          <a:endParaRPr lang="en-US" sz="2700" kern="1200"/>
-        </a:p>
-      </dsp:txBody>
-      <dsp:txXfrm>
-        <a:off x="0" y="1264526"/>
-        <a:ext cx="4896544" cy="631915"/>
-      </dsp:txXfrm>
-    </dsp:sp>
-    <dsp:sp modelId="{B207FA8F-1A13-4CA2-8354-B51039C53384}">
-      <dsp:nvSpPr>
-        <dsp:cNvPr id="0" name=""/>
-        <dsp:cNvSpPr/>
-      </dsp:nvSpPr>
-      <dsp:spPr>
-        <a:xfrm>
-          <a:off x="0" y="1896442"/>
-          <a:ext cx="4896544" cy="0"/>
-        </a:xfrm>
-        <a:prstGeom prst="line">
-          <a:avLst/>
-        </a:prstGeom>
-        <a:solidFill>
-          <a:schemeClr val="accent1">
-            <a:hueOff val="0"/>
-            <a:satOff val="0"/>
-            <a:lumOff val="0"/>
-            <a:alphaOff val="0"/>
-          </a:schemeClr>
-        </a:solidFill>
-        <a:ln w="12700" cap="flat" cmpd="sng" algn="ctr">
-          <a:solidFill>
-            <a:schemeClr val="accent1">
-              <a:hueOff val="0"/>
-              <a:satOff val="0"/>
-              <a:lumOff val="0"/>
-              <a:alphaOff val="0"/>
-            </a:schemeClr>
-          </a:solidFill>
-          <a:prstDash val="solid"/>
-        </a:ln>
-        <a:effectLst/>
-      </dsp:spPr>
-      <dsp:style>
-        <a:lnRef idx="2">
-          <a:scrgbClr r="0" g="0" b="0"/>
-        </a:lnRef>
-        <a:fillRef idx="1">
-          <a:scrgbClr r="0" g="0" b="0"/>
-        </a:fillRef>
-        <a:effectRef idx="0">
-          <a:scrgbClr r="0" g="0" b="0"/>
-        </a:effectRef>
-        <a:fontRef idx="minor">
-          <a:schemeClr val="lt1"/>
-        </a:fontRef>
-      </dsp:style>
-    </dsp:sp>
-    <dsp:sp modelId="{43C3574B-B92B-47F9-A205-6C9542AC19CD}">
-      <dsp:nvSpPr>
-        <dsp:cNvPr id="0" name=""/>
-        <dsp:cNvSpPr/>
-      </dsp:nvSpPr>
-      <dsp:spPr>
-        <a:xfrm>
-          <a:off x="0" y="1896442"/>
-          <a:ext cx="4896544" cy="631915"/>
-        </a:xfrm>
-        <a:prstGeom prst="rect">
-          <a:avLst/>
-        </a:prstGeom>
-        <a:noFill/>
-        <a:ln>
-          <a:noFill/>
-        </a:ln>
-        <a:effectLst/>
-      </dsp:spPr>
-      <dsp:style>
-        <a:lnRef idx="0">
-          <a:scrgbClr r="0" g="0" b="0"/>
-        </a:lnRef>
-        <a:fillRef idx="0">
-          <a:scrgbClr r="0" g="0" b="0"/>
-        </a:fillRef>
-        <a:effectRef idx="0">
-          <a:scrgbClr r="0" g="0" b="0"/>
-        </a:effectRef>
-        <a:fontRef idx="minor"/>
-      </dsp:style>
-      <dsp:txBody>
-        <a:bodyPr spcFirstLastPara="0" vert="horz" wrap="square" lIns="102870" tIns="102870" rIns="102870" bIns="102870" numCol="1" spcCol="1270" anchor="t" anchorCtr="0">
-          <a:noAutofit/>
-        </a:bodyPr>
-        <a:lstStyle/>
-        <a:p>
-          <a:pPr marL="0" lvl="0" indent="0" algn="l" defTabSz="1200150">
-            <a:lnSpc>
-              <a:spcPct val="90000"/>
-            </a:lnSpc>
-            <a:spcBef>
-              <a:spcPct val="0"/>
-            </a:spcBef>
-            <a:spcAft>
-              <a:spcPct val="35000"/>
-            </a:spcAft>
-            <a:buNone/>
-          </a:pPr>
-          <a:r>
-            <a:rPr lang="zh-TW" sz="2700" kern="1200"/>
-            <a:t>單樣本及雙樣本檢定 </a:t>
-          </a:r>
-          <a:endParaRPr lang="en-US" sz="2700" kern="1200"/>
-        </a:p>
-      </dsp:txBody>
-      <dsp:txXfrm>
-        <a:off x="0" y="1896442"/>
-        <a:ext cx="4896544" cy="631915"/>
-      </dsp:txXfrm>
-    </dsp:sp>
-    <dsp:sp modelId="{64200CC9-369A-4A6E-9357-6CCDF4A8046D}">
-      <dsp:nvSpPr>
-        <dsp:cNvPr id="0" name=""/>
-        <dsp:cNvSpPr/>
-      </dsp:nvSpPr>
-      <dsp:spPr>
-        <a:xfrm>
-          <a:off x="0" y="2528358"/>
-          <a:ext cx="4896544" cy="0"/>
-        </a:xfrm>
-        <a:prstGeom prst="line">
-          <a:avLst/>
-        </a:prstGeom>
-        <a:solidFill>
-          <a:schemeClr val="accent1">
-            <a:hueOff val="0"/>
-            <a:satOff val="0"/>
-            <a:lumOff val="0"/>
-            <a:alphaOff val="0"/>
-          </a:schemeClr>
-        </a:solidFill>
-        <a:ln w="12700" cap="flat" cmpd="sng" algn="ctr">
-          <a:solidFill>
-            <a:schemeClr val="accent1">
-              <a:hueOff val="0"/>
-              <a:satOff val="0"/>
-              <a:lumOff val="0"/>
-              <a:alphaOff val="0"/>
-            </a:schemeClr>
-          </a:solidFill>
-          <a:prstDash val="solid"/>
-        </a:ln>
-        <a:effectLst/>
-      </dsp:spPr>
-      <dsp:style>
-        <a:lnRef idx="2">
-          <a:scrgbClr r="0" g="0" b="0"/>
-        </a:lnRef>
-        <a:fillRef idx="1">
-          <a:scrgbClr r="0" g="0" b="0"/>
-        </a:fillRef>
-        <a:effectRef idx="0">
-          <a:scrgbClr r="0" g="0" b="0"/>
-        </a:effectRef>
-        <a:fontRef idx="minor">
-          <a:schemeClr val="lt1"/>
-        </a:fontRef>
-      </dsp:style>
-    </dsp:sp>
-    <dsp:sp modelId="{4FA2B502-C19E-4AEA-BA20-D6B75AE135DF}">
-      <dsp:nvSpPr>
-        <dsp:cNvPr id="0" name=""/>
-        <dsp:cNvSpPr/>
-      </dsp:nvSpPr>
-      <dsp:spPr>
-        <a:xfrm>
-          <a:off x="0" y="2528358"/>
-          <a:ext cx="4896544" cy="631915"/>
-        </a:xfrm>
-        <a:prstGeom prst="rect">
-          <a:avLst/>
-        </a:prstGeom>
-        <a:noFill/>
-        <a:ln>
-          <a:noFill/>
-        </a:ln>
-        <a:effectLst/>
-      </dsp:spPr>
-      <dsp:style>
-        <a:lnRef idx="0">
-          <a:scrgbClr r="0" g="0" b="0"/>
-        </a:lnRef>
-        <a:fillRef idx="0">
-          <a:scrgbClr r="0" g="0" b="0"/>
-        </a:fillRef>
-        <a:effectRef idx="0">
-          <a:scrgbClr r="0" g="0" b="0"/>
-        </a:effectRef>
-        <a:fontRef idx="minor"/>
-      </dsp:style>
-      <dsp:txBody>
-        <a:bodyPr spcFirstLastPara="0" vert="horz" wrap="square" lIns="102870" tIns="102870" rIns="102870" bIns="102870" numCol="1" spcCol="1270" anchor="t" anchorCtr="0">
-          <a:noAutofit/>
-        </a:bodyPr>
-        <a:lstStyle/>
-        <a:p>
-          <a:pPr marL="0" lvl="0" indent="0" algn="l" defTabSz="1200150">
-            <a:lnSpc>
-              <a:spcPct val="90000"/>
-            </a:lnSpc>
-            <a:spcBef>
-              <a:spcPct val="0"/>
-            </a:spcBef>
-            <a:spcAft>
-              <a:spcPct val="35000"/>
-            </a:spcAft>
-            <a:buNone/>
-          </a:pPr>
-          <a:r>
-            <a:rPr lang="zh-TW" sz="2700" kern="1200"/>
-            <a:t>平均數檢定：多組樣本 </a:t>
-          </a:r>
-          <a:endParaRPr lang="en-US" sz="2700" kern="1200"/>
-        </a:p>
-      </dsp:txBody>
-      <dsp:txXfrm>
-        <a:off x="0" y="2528358"/>
-        <a:ext cx="4896544" cy="631915"/>
-      </dsp:txXfrm>
-    </dsp:sp>
-    <dsp:sp modelId="{D4FC183D-67E0-422F-BF3F-6111C06270ED}">
-      <dsp:nvSpPr>
-        <dsp:cNvPr id="0" name=""/>
-        <dsp:cNvSpPr/>
-      </dsp:nvSpPr>
-      <dsp:spPr>
-        <a:xfrm>
-          <a:off x="0" y="3160273"/>
-          <a:ext cx="4896544" cy="0"/>
-        </a:xfrm>
-        <a:prstGeom prst="line">
-          <a:avLst/>
-        </a:prstGeom>
-        <a:solidFill>
-          <a:schemeClr val="accent1">
-            <a:hueOff val="0"/>
-            <a:satOff val="0"/>
-            <a:lumOff val="0"/>
-            <a:alphaOff val="0"/>
-          </a:schemeClr>
-        </a:solidFill>
-        <a:ln w="12700" cap="flat" cmpd="sng" algn="ctr">
-          <a:solidFill>
-            <a:schemeClr val="accent1">
-              <a:hueOff val="0"/>
-              <a:satOff val="0"/>
-              <a:lumOff val="0"/>
-              <a:alphaOff val="0"/>
-            </a:schemeClr>
-          </a:solidFill>
-          <a:prstDash val="solid"/>
-        </a:ln>
-        <a:effectLst/>
-      </dsp:spPr>
-      <dsp:style>
-        <a:lnRef idx="2">
-          <a:scrgbClr r="0" g="0" b="0"/>
-        </a:lnRef>
-        <a:fillRef idx="1">
-          <a:scrgbClr r="0" g="0" b="0"/>
-        </a:fillRef>
-        <a:effectRef idx="0">
-          <a:scrgbClr r="0" g="0" b="0"/>
-        </a:effectRef>
-        <a:fontRef idx="minor">
-          <a:schemeClr val="lt1"/>
-        </a:fontRef>
-      </dsp:style>
-    </dsp:sp>
-    <dsp:sp modelId="{4BF4FACB-F8F0-40DB-B5CE-533EBE569590}">
-      <dsp:nvSpPr>
-        <dsp:cNvPr id="0" name=""/>
-        <dsp:cNvSpPr/>
-      </dsp:nvSpPr>
-      <dsp:spPr>
-        <a:xfrm>
-          <a:off x="0" y="3160273"/>
-          <a:ext cx="4896544" cy="631915"/>
-        </a:xfrm>
-        <a:prstGeom prst="rect">
-          <a:avLst/>
-        </a:prstGeom>
-        <a:noFill/>
-        <a:ln>
-          <a:noFill/>
-        </a:ln>
-        <a:effectLst/>
-      </dsp:spPr>
-      <dsp:style>
-        <a:lnRef idx="0">
-          <a:scrgbClr r="0" g="0" b="0"/>
-        </a:lnRef>
-        <a:fillRef idx="0">
-          <a:scrgbClr r="0" g="0" b="0"/>
-        </a:fillRef>
-        <a:effectRef idx="0">
-          <a:scrgbClr r="0" g="0" b="0"/>
-        </a:effectRef>
-        <a:fontRef idx="minor"/>
-      </dsp:style>
-      <dsp:txBody>
-        <a:bodyPr spcFirstLastPara="0" vert="horz" wrap="square" lIns="102870" tIns="102870" rIns="102870" bIns="102870" numCol="1" spcCol="1270" anchor="t" anchorCtr="0">
-          <a:noAutofit/>
-        </a:bodyPr>
-        <a:lstStyle/>
-        <a:p>
-          <a:pPr marL="0" lvl="0" indent="0" algn="l" defTabSz="1200150">
-            <a:lnSpc>
-              <a:spcPct val="90000"/>
-            </a:lnSpc>
-            <a:spcBef>
-              <a:spcPct val="0"/>
-            </a:spcBef>
-            <a:spcAft>
-              <a:spcPct val="35000"/>
-            </a:spcAft>
-            <a:buNone/>
-          </a:pPr>
-          <a:r>
-            <a:rPr lang="zh-TW" sz="2700" kern="1200"/>
-            <a:t>兩個類別變數之檢定 </a:t>
-          </a:r>
-          <a:endParaRPr lang="en-US" sz="2700" kern="1200"/>
-        </a:p>
-      </dsp:txBody>
-      <dsp:txXfrm>
-        <a:off x="0" y="3160273"/>
-        <a:ext cx="4896544" cy="631915"/>
-      </dsp:txXfrm>
-    </dsp:sp>
-    <dsp:sp modelId="{DD3E3AFE-9DC8-404D-9F57-A817433F199D}">
-      <dsp:nvSpPr>
-        <dsp:cNvPr id="0" name=""/>
-        <dsp:cNvSpPr/>
-      </dsp:nvSpPr>
-      <dsp:spPr>
-        <a:xfrm>
-          <a:off x="0" y="3792189"/>
-          <a:ext cx="4896544" cy="0"/>
-        </a:xfrm>
-        <a:prstGeom prst="line">
-          <a:avLst/>
-        </a:prstGeom>
-        <a:solidFill>
-          <a:schemeClr val="accent1">
-            <a:hueOff val="0"/>
-            <a:satOff val="0"/>
-            <a:lumOff val="0"/>
-            <a:alphaOff val="0"/>
-          </a:schemeClr>
-        </a:solidFill>
-        <a:ln w="12700" cap="flat" cmpd="sng" algn="ctr">
-          <a:solidFill>
-            <a:schemeClr val="accent1">
-              <a:hueOff val="0"/>
-              <a:satOff val="0"/>
-              <a:lumOff val="0"/>
-              <a:alphaOff val="0"/>
-            </a:schemeClr>
-          </a:solidFill>
-          <a:prstDash val="solid"/>
-        </a:ln>
-        <a:effectLst/>
-      </dsp:spPr>
-      <dsp:style>
-        <a:lnRef idx="2">
-          <a:scrgbClr r="0" g="0" b="0"/>
-        </a:lnRef>
-        <a:fillRef idx="1">
-          <a:scrgbClr r="0" g="0" b="0"/>
-        </a:fillRef>
-        <a:effectRef idx="0">
-          <a:scrgbClr r="0" g="0" b="0"/>
-        </a:effectRef>
-        <a:fontRef idx="minor">
-          <a:schemeClr val="lt1"/>
-        </a:fontRef>
-      </dsp:style>
-    </dsp:sp>
-    <dsp:sp modelId="{51242065-1B4A-462B-9E54-63D443E2961B}">
-      <dsp:nvSpPr>
-        <dsp:cNvPr id="0" name=""/>
-        <dsp:cNvSpPr/>
-      </dsp:nvSpPr>
-      <dsp:spPr>
-        <a:xfrm>
-          <a:off x="0" y="3792189"/>
-          <a:ext cx="4896544" cy="631915"/>
-        </a:xfrm>
-        <a:prstGeom prst="rect">
-          <a:avLst/>
-        </a:prstGeom>
-        <a:noFill/>
-        <a:ln>
-          <a:noFill/>
-        </a:ln>
-        <a:effectLst/>
-      </dsp:spPr>
-      <dsp:style>
-        <a:lnRef idx="0">
-          <a:scrgbClr r="0" g="0" b="0"/>
-        </a:lnRef>
-        <a:fillRef idx="0">
-          <a:scrgbClr r="0" g="0" b="0"/>
-        </a:fillRef>
-        <a:effectRef idx="0">
-          <a:scrgbClr r="0" g="0" b="0"/>
-        </a:effectRef>
-        <a:fontRef idx="minor"/>
-      </dsp:style>
-      <dsp:txBody>
-        <a:bodyPr spcFirstLastPara="0" vert="horz" wrap="square" lIns="102870" tIns="102870" rIns="102870" bIns="102870" numCol="1" spcCol="1270" anchor="t" anchorCtr="0">
-          <a:noAutofit/>
-        </a:bodyPr>
-        <a:lstStyle/>
-        <a:p>
-          <a:pPr marL="0" lvl="0" indent="0" algn="l" defTabSz="1200150">
-            <a:lnSpc>
-              <a:spcPct val="90000"/>
-            </a:lnSpc>
-            <a:spcBef>
-              <a:spcPct val="0"/>
-            </a:spcBef>
-            <a:spcAft>
-              <a:spcPct val="35000"/>
-            </a:spcAft>
-            <a:buNone/>
-          </a:pPr>
-          <a:r>
-            <a:rPr lang="zh-TW" sz="2700" kern="1200"/>
-            <a:t>相關和廻歸分析（一） </a:t>
-          </a:r>
-          <a:endParaRPr lang="en-US" sz="2700" kern="1200"/>
-        </a:p>
-      </dsp:txBody>
-      <dsp:txXfrm>
-        <a:off x="0" y="3792189"/>
-        <a:ext cx="4896544" cy="631915"/>
-      </dsp:txXfrm>
-    </dsp:sp>
-    <dsp:sp modelId="{B2227B60-0538-46C3-A293-858AECC296F0}">
-      <dsp:nvSpPr>
-        <dsp:cNvPr id="0" name=""/>
-        <dsp:cNvSpPr/>
-      </dsp:nvSpPr>
-      <dsp:spPr>
-        <a:xfrm>
-          <a:off x="0" y="4424105"/>
-          <a:ext cx="4896544" cy="0"/>
-        </a:xfrm>
-        <a:prstGeom prst="line">
-          <a:avLst/>
-        </a:prstGeom>
-        <a:solidFill>
-          <a:schemeClr val="accent1">
-            <a:hueOff val="0"/>
-            <a:satOff val="0"/>
-            <a:lumOff val="0"/>
-            <a:alphaOff val="0"/>
-          </a:schemeClr>
-        </a:solidFill>
-        <a:ln w="12700" cap="flat" cmpd="sng" algn="ctr">
-          <a:solidFill>
-            <a:schemeClr val="accent1">
-              <a:hueOff val="0"/>
-              <a:satOff val="0"/>
-              <a:lumOff val="0"/>
-              <a:alphaOff val="0"/>
-            </a:schemeClr>
-          </a:solidFill>
-          <a:prstDash val="solid"/>
-        </a:ln>
-        <a:effectLst/>
-      </dsp:spPr>
-      <dsp:style>
-        <a:lnRef idx="2">
-          <a:scrgbClr r="0" g="0" b="0"/>
-        </a:lnRef>
-        <a:fillRef idx="1">
-          <a:scrgbClr r="0" g="0" b="0"/>
-        </a:fillRef>
-        <a:effectRef idx="0">
-          <a:scrgbClr r="0" g="0" b="0"/>
-        </a:effectRef>
-        <a:fontRef idx="minor">
-          <a:schemeClr val="lt1"/>
-        </a:fontRef>
-      </dsp:style>
-    </dsp:sp>
-    <dsp:sp modelId="{22546DCF-1FC9-4449-A34A-6C0208FB0591}">
-      <dsp:nvSpPr>
-        <dsp:cNvPr id="0" name=""/>
-        <dsp:cNvSpPr/>
-      </dsp:nvSpPr>
-      <dsp:spPr>
-        <a:xfrm>
-          <a:off x="0" y="4424105"/>
-          <a:ext cx="4896544" cy="631915"/>
-        </a:xfrm>
-        <a:prstGeom prst="rect">
-          <a:avLst/>
-        </a:prstGeom>
-        <a:noFill/>
-        <a:ln>
-          <a:noFill/>
-        </a:ln>
-        <a:effectLst/>
-      </dsp:spPr>
-      <dsp:style>
-        <a:lnRef idx="0">
-          <a:scrgbClr r="0" g="0" b="0"/>
-        </a:lnRef>
-        <a:fillRef idx="0">
-          <a:scrgbClr r="0" g="0" b="0"/>
-        </a:fillRef>
-        <a:effectRef idx="0">
-          <a:scrgbClr r="0" g="0" b="0"/>
-        </a:effectRef>
-        <a:fontRef idx="minor"/>
-      </dsp:style>
-      <dsp:txBody>
-        <a:bodyPr spcFirstLastPara="0" vert="horz" wrap="square" lIns="102870" tIns="102870" rIns="102870" bIns="102870" numCol="1" spcCol="1270" anchor="t" anchorCtr="0">
-          <a:noAutofit/>
-        </a:bodyPr>
-        <a:lstStyle/>
-        <a:p>
-          <a:pPr marL="0" lvl="0" indent="0" algn="l" defTabSz="1200150">
-            <a:lnSpc>
-              <a:spcPct val="90000"/>
-            </a:lnSpc>
-            <a:spcBef>
-              <a:spcPct val="0"/>
-            </a:spcBef>
-            <a:spcAft>
-              <a:spcPct val="35000"/>
-            </a:spcAft>
-            <a:buNone/>
-          </a:pPr>
-          <a:r>
-            <a:rPr lang="zh-TW" sz="2700" kern="1200"/>
-            <a:t>相關和廻歸分析（二）</a:t>
-          </a:r>
-          <a:endParaRPr lang="en-US" sz="2700" kern="1200"/>
-        </a:p>
-      </dsp:txBody>
-      <dsp:txXfrm>
-        <a:off x="0" y="4424105"/>
-        <a:ext cx="4896544" cy="631915"/>
-      </dsp:txXfrm>
-    </dsp:sp>
-    <dsp:sp modelId="{10328081-F3D0-4976-BEA7-B48BA1E53F55}">
-      <dsp:nvSpPr>
-        <dsp:cNvPr id="0" name=""/>
-        <dsp:cNvSpPr/>
-      </dsp:nvSpPr>
-      <dsp:spPr>
-        <a:xfrm>
-          <a:off x="0" y="5056021"/>
-          <a:ext cx="4896544" cy="0"/>
-        </a:xfrm>
-        <a:prstGeom prst="line">
-          <a:avLst/>
-        </a:prstGeom>
-        <a:solidFill>
-          <a:schemeClr val="accent1">
-            <a:hueOff val="0"/>
-            <a:satOff val="0"/>
-            <a:lumOff val="0"/>
-            <a:alphaOff val="0"/>
-          </a:schemeClr>
-        </a:solidFill>
-        <a:ln w="12700" cap="flat" cmpd="sng" algn="ctr">
-          <a:solidFill>
-            <a:schemeClr val="accent1">
-              <a:hueOff val="0"/>
-              <a:satOff val="0"/>
-              <a:lumOff val="0"/>
-              <a:alphaOff val="0"/>
-            </a:schemeClr>
-          </a:solidFill>
-          <a:prstDash val="solid"/>
-        </a:ln>
-        <a:effectLst/>
-      </dsp:spPr>
-      <dsp:style>
-        <a:lnRef idx="2">
-          <a:scrgbClr r="0" g="0" b="0"/>
-        </a:lnRef>
-        <a:fillRef idx="1">
-          <a:scrgbClr r="0" g="0" b="0"/>
-        </a:fillRef>
-        <a:effectRef idx="0">
-          <a:scrgbClr r="0" g="0" b="0"/>
-        </a:effectRef>
-        <a:fontRef idx="minor">
-          <a:schemeClr val="lt1"/>
-        </a:fontRef>
-      </dsp:style>
-    </dsp:sp>
-    <dsp:sp modelId="{580F1D3F-E0D3-4B76-8E4C-600E1C5C96BB}">
-      <dsp:nvSpPr>
-        <dsp:cNvPr id="0" name=""/>
-        <dsp:cNvSpPr/>
-      </dsp:nvSpPr>
-      <dsp:spPr>
-        <a:xfrm>
-          <a:off x="0" y="5056021"/>
-          <a:ext cx="4896544" cy="631915"/>
-        </a:xfrm>
-        <a:prstGeom prst="rect">
-          <a:avLst/>
-        </a:prstGeom>
-        <a:noFill/>
-        <a:ln>
-          <a:noFill/>
-        </a:ln>
-        <a:effectLst/>
-      </dsp:spPr>
-      <dsp:style>
-        <a:lnRef idx="0">
-          <a:scrgbClr r="0" g="0" b="0"/>
-        </a:lnRef>
-        <a:fillRef idx="0">
-          <a:scrgbClr r="0" g="0" b="0"/>
-        </a:fillRef>
-        <a:effectRef idx="0">
-          <a:scrgbClr r="0" g="0" b="0"/>
-        </a:effectRef>
-        <a:fontRef idx="minor"/>
-      </dsp:style>
-      <dsp:txBody>
-        <a:bodyPr spcFirstLastPara="0" vert="horz" wrap="square" lIns="102870" tIns="102870" rIns="102870" bIns="102870" numCol="1" spcCol="1270" anchor="t" anchorCtr="0">
-          <a:noAutofit/>
-        </a:bodyPr>
-        <a:lstStyle/>
-        <a:p>
-          <a:pPr marL="0" lvl="0" indent="0" algn="l" defTabSz="1200150">
-            <a:lnSpc>
-              <a:spcPct val="90000"/>
-            </a:lnSpc>
-            <a:spcBef>
-              <a:spcPct val="0"/>
-            </a:spcBef>
-            <a:spcAft>
-              <a:spcPct val="35000"/>
-            </a:spcAft>
-            <a:buNone/>
-          </a:pPr>
-          <a:r>
-            <a:rPr lang="zh-TW" sz="2700" kern="1200"/>
-            <a:t>多變項迴歸分析 </a:t>
-          </a:r>
-          <a:endParaRPr lang="en-US" sz="2700" kern="1200"/>
-        </a:p>
-      </dsp:txBody>
-      <dsp:txXfrm>
-        <a:off x="0" y="5056021"/>
-        <a:ext cx="4896544" cy="631915"/>
-      </dsp:txXfrm>
-    </dsp:sp>
-  </dsp:spTree>
-</dsp:drawing>
-</file>
-
-<file path=ppt/diagrams/layout1.xml><?xml version="1.0" encoding="utf-8"?>
-<dgm:layoutDef xmlns:dgm="http://schemas.openxmlformats.org/drawingml/2006/diagram" xmlns:a="http://schemas.openxmlformats.org/drawingml/2006/main" uniqueId="urn:microsoft.com/office/officeart/2008/layout/LinedList">
-  <dgm:title val=""/>
-  <dgm:desc val=""/>
-  <dgm:catLst>
-    <dgm:cat type="hierarchy" pri="8000"/>
-    <dgm:cat type="list" pri="2500"/>
-  </dgm:catLst>
-  <dgm:sampData>
-    <dgm:dataModel>
-      <dgm:ptLst>
-        <dgm:pt modelId="0" type="doc"/>
-        <dgm:pt modelId="1">
-          <dgm:prSet phldr="1"/>
-        </dgm:pt>
-        <dgm:pt modelId="11">
-          <dgm:prSet phldr="1"/>
-        </dgm:pt>
-        <dgm:pt modelId="12">
-          <dgm:prSet phldr="1"/>
-        </dgm:pt>
-        <dgm:pt modelId="13">
-          <dgm:prSet phldr="1"/>
-        </dgm:pt>
-      </dgm:ptLst>
-      <dgm:cxnLst>
-        <dgm:cxn modelId="2" srcId="0" destId="1" srcOrd="0" destOrd="0"/>
-        <dgm:cxn modelId="3" srcId="1" destId="11" srcOrd="0" destOrd="0"/>
-        <dgm:cxn modelId="4" srcId="1" destId="12" srcOrd="1" destOrd="0"/>
-        <dgm:cxn modelId="5" srcId="1" destId="13" srcOrd="2" destOrd="0"/>
-      </dgm:cxnLst>
-      <dgm:bg/>
-      <dgm:whole/>
-    </dgm:dataModel>
-  </dgm:sampData>
-  <dgm:styleData>
-    <dgm:dataModel>
-      <dgm:ptLst>
-        <dgm:pt modelId="0" type="doc"/>
-        <dgm:pt modelId="1">
-          <dgm:prSet phldr="1"/>
-        </dgm:pt>
-        <dgm:pt modelId="11">
-          <dgm:prSet phldr="1"/>
-        </dgm:pt>
-        <dgm:pt modelId="12">
-          <dgm:prSet phldr="1"/>
-        </dgm:pt>
-      </dgm:ptLst>
-      <dgm:cxnLst>
-        <dgm:cxn modelId="2" srcId="0" destId="1" srcOrd="0" destOrd="0"/>
-        <dgm:cxn modelId="3" srcId="1" destId="11" srcOrd="0" destOrd="0"/>
-        <dgm:cxn modelId="4" srcId="1" destId="12" srcOrd="1" destOrd="0"/>
-      </dgm:cxnLst>
-      <dgm:bg/>
-      <dgm:whole/>
-    </dgm:dataModel>
-  </dgm:styleData>
-  <dgm:clrData>
-    <dgm:dataModel>
-      <dgm:ptLst>
-        <dgm:pt modelId="0" type="doc"/>
-        <dgm:pt modelId="1">
-          <dgm:prSet phldr="1"/>
-        </dgm:pt>
-        <dgm:pt modelId="11">
-          <dgm:prSet phldr="1"/>
-        </dgm:pt>
-        <dgm:pt modelId="12">
-          <dgm:prSet phldr="1"/>
-        </dgm:pt>
-      </dgm:ptLst>
-      <dgm:cxnLst>
-        <dgm:cxn modelId="2" srcId="0" destId="1" srcOrd="0" destOrd="0"/>
-        <dgm:cxn modelId="3" srcId="1" destId="11" srcOrd="0" destOrd="0"/>
-        <dgm:cxn modelId="4" srcId="1" destId="12" srcOrd="1" destOrd="0"/>
-      </dgm:cxnLst>
-      <dgm:bg/>
-      <dgm:whole/>
-    </dgm:dataModel>
-  </dgm:clrData>
-  <dgm:layoutNode name="vert0">
-    <dgm:varLst>
-      <dgm:dir/>
-      <dgm:animOne val="branch"/>
-      <dgm:animLvl val="lvl"/>
-    </dgm:varLst>
-    <dgm:choose name="Name0">
-      <dgm:if name="Name1" func="var" arg="dir" op="equ" val="norm">
-        <dgm:alg type="lin">
-          <dgm:param type="linDir" val="fromT"/>
-          <dgm:param type="nodeHorzAlign" val="l"/>
-        </dgm:alg>
-      </dgm:if>
-      <dgm:else name="Name2">
-        <dgm:alg type="lin">
-          <dgm:param type="linDir" val="fromT"/>
-          <dgm:param type="nodeHorzAlign" val="r"/>
-        </dgm:alg>
-      </dgm:else>
-    </dgm:choose>
-    <dgm:shape xmlns:r="http://schemas.openxmlformats.org/officeDocument/2006/relationships" r:blip="">
-      <dgm:adjLst/>
-    </dgm:shape>
-    <dgm:presOf/>
-    <dgm:constrLst>
-      <dgm:constr type="w" for="ch" forName="horz1" refType="w"/>
-      <dgm:constr type="h" for="ch" forName="horz1" refType="h"/>
-      <dgm:constr type="h" for="des" forName="vert1" refType="h"/>
-      <dgm:constr type="h" for="des" forName="tx1" refType="h"/>
-      <dgm:constr type="h" for="des" forName="horz2" refType="h"/>
-      <dgm:constr type="h" for="des" forName="vert2" refType="h"/>
-      <dgm:constr type="h" for="des" forName="horz3" refType="h"/>
-      <dgm:constr type="h" for="des" forName="vert3" refType="h"/>
-      <dgm:constr type="h" for="des" forName="horz4" refType="h"/>
-      <dgm:constr type="h" for="des" ptType="node" refType="h"/>
-      <dgm:constr type="primFontSz" for="des" forName="tx1" op="equ" val="65"/>
-      <dgm:constr type="primFontSz" for="des" forName="tx2" op="equ" val="65"/>
-      <dgm:constr type="primFontSz" for="des" forName="tx3" op="equ" val="65"/>
-      <dgm:constr type="primFontSz" for="des" forName="tx4" op="equ" val="65"/>
-      <dgm:constr type="w" for="des" forName="thickLine" refType="w"/>
-      <dgm:constr type="h" for="des" forName="thickLine"/>
-      <dgm:constr type="h" for="des" forName="thinLine1"/>
-      <dgm:constr type="h" for="des" forName="thinLine2b"/>
-      <dgm:constr type="h" for="des" forName="thinLine3"/>
-      <dgm:constr type="h" for="des" forName="vertSpace2a" refType="h" fact="0.05"/>
-      <dgm:constr type="h" for="des" forName="vertSpace2b" refType="h" refFor="des" refForName="vertSpace2a"/>
-    </dgm:constrLst>
-    <dgm:forEach name="Name3" axis="ch" ptType="node">
-      <dgm:layoutNode name="thickLine" styleLbl="alignNode1">
-        <dgm:alg type="sp"/>
-        <dgm:shape xmlns:r="http://schemas.openxmlformats.org/officeDocument/2006/relationships" type="line" r:blip="">
-          <dgm:adjLst/>
-        </dgm:shape>
-        <dgm:presOf/>
-      </dgm:layoutNode>
-      <dgm:layoutNode name="horz1">
-        <dgm:choose name="Name4">
-          <dgm:if name="Name5" func="var" arg="dir" op="equ" val="norm">
-            <dgm:alg type="lin">
-              <dgm:param type="linDir" val="fromL"/>
-              <dgm:param type="nodeVertAlign" val="t"/>
-            </dgm:alg>
-          </dgm:if>
-          <dgm:else name="Name6">
-            <dgm:alg type="lin">
-              <dgm:param type="linDir" val="fromR"/>
-              <dgm:param type="nodeVertAlign" val="t"/>
-            </dgm:alg>
-          </dgm:else>
-        </dgm:choose>
-        <dgm:shape xmlns:r="http://schemas.openxmlformats.org/officeDocument/2006/relationships" r:blip="">
-          <dgm:adjLst/>
-        </dgm:shape>
-        <dgm:presOf/>
-        <dgm:choose name="Name7">
-          <dgm:if name="Name8" axis="root des" func="maxDepth" op="equ" val="1">
-            <dgm:constrLst>
-              <dgm:constr type="w" for="ch" forName="tx1" refType="w"/>
-            </dgm:constrLst>
-          </dgm:if>
-          <dgm:if name="Name9" axis="root des" func="maxDepth" op="equ" val="2">
-            <dgm:constrLst>
-              <dgm:constr type="w" for="ch" forName="tx1" refType="w" fact="0.2"/>
-              <dgm:constr type="w" for="des" forName="tx2" refType="w" fact="0.785"/>
-              <dgm:constr type="w" for="des" forName="horzSpace2" refType="w" fact="0.015"/>
-              <dgm:constr type="w" for="des" forName="thinLine2b" refType="w" fact="0.8"/>
-            </dgm:constrLst>
-          </dgm:if>
-          <dgm:if name="Name10" axis="root des" func="maxDepth" op="equ" val="3">
-            <dgm:constrLst>
-              <dgm:constr type="w" for="ch" forName="tx1" refType="w" fact="0.2"/>
-              <dgm:constr type="w" for="des" forName="tx2" refType="w" fact="0.385"/>
-              <dgm:constr type="w" for="des" forName="tx3" refType="w" fact="0.385"/>
-              <dgm:constr type="w" for="des" forName="horzSpace2" refType="w" fact="0.015"/>
-              <dgm:constr type="w" for="des" forName="horzSpace3" refType="w" fact="0.015"/>
-              <dgm:constr type="w" for="des" forName="thinLine2b" refType="w" fact="0.8"/>
-              <dgm:constr type="w" for="des" forName="thinLine3" refType="w" fact="0.385"/>
-            </dgm:constrLst>
-          </dgm:if>
-          <dgm:if name="Name11" axis="root des" func="maxDepth" op="gte" val="4">
-            <dgm:constrLst>
-              <dgm:constr type="w" for="ch" forName="tx1" refType="w" fact="0.2"/>
-              <dgm:constr type="w" for="des" forName="tx2" refType="w" fact="0.2516"/>
-              <dgm:constr type="w" for="des" forName="tx3" refType="w" fact="0.2516"/>
-              <dgm:constr type="w" for="des" forName="tx4" refType="w" fact="0.2516"/>
-              <dgm:constr type="w" for="des" forName="horzSpace2" refType="w" fact="0.015"/>
-              <dgm:constr type="w" for="des" forName="horzSpace3" refType="w" fact="0.015"/>
-              <dgm:constr type="w" for="des" forName="horzSpace4" refType="w" fact="0.015"/>
-              <dgm:constr type="w" for="des" forName="thinLine2b" refType="w" fact="0.8"/>
-              <dgm:constr type="w" for="des" forName="thinLine3" refType="w" fact="0.5332"/>
-            </dgm:constrLst>
-          </dgm:if>
-          <dgm:else name="Name12"/>
-        </dgm:choose>
-        <dgm:layoutNode name="tx1" styleLbl="revTx">
-          <dgm:alg type="tx">
-            <dgm:param type="parTxLTRAlign" val="l"/>
-            <dgm:param type="parTxRTLAlign" val="r"/>
-            <dgm:param type="txAnchorVert" val="t"/>
-          </dgm:alg>
-          <dgm:shape xmlns:r="http://schemas.openxmlformats.org/officeDocument/2006/relationships" type="rect" r:blip="">
-            <dgm:adjLst/>
-          </dgm:shape>
-          <dgm:presOf axis="self"/>
-          <dgm:constrLst>
-            <dgm:constr type="tMarg" refType="primFontSz" fact="0.3"/>
-            <dgm:constr type="bMarg" refType="primFontSz" fact="0.3"/>
-            <dgm:constr type="lMarg" refType="primFontSz" fact="0.3"/>
-            <dgm:constr type="rMarg" refType="primFontSz" fact="0.3"/>
-          </dgm:constrLst>
-          <dgm:ruleLst>
-            <dgm:rule type="primFontSz" val="5" fact="NaN" max="NaN"/>
-          </dgm:ruleLst>
-        </dgm:layoutNode>
-        <dgm:layoutNode name="vert1">
-          <dgm:choose name="Name13">
-            <dgm:if name="Name14" func="var" arg="dir" op="equ" val="norm">
-              <dgm:alg type="lin">
-                <dgm:param type="linDir" val="fromT"/>
-                <dgm:param type="nodeHorzAlign" val="l"/>
-              </dgm:alg>
-            </dgm:if>
-            <dgm:else name="Name15">
-              <dgm:alg type="lin">
-                <dgm:param type="linDir" val="fromT"/>
-                <dgm:param type="nodeHorzAlign" val="r"/>
-              </dgm:alg>
-            </dgm:else>
-          </dgm:choose>
-          <dgm:shape xmlns:r="http://schemas.openxmlformats.org/officeDocument/2006/relationships" r:blip="">
-            <dgm:adjLst/>
-          </dgm:shape>
-          <dgm:presOf/>
-          <dgm:forEach name="Name16" axis="ch" ptType="node">
-            <dgm:choose name="Name17">
-              <dgm:if name="Name18" axis="self" ptType="node" func="pos" op="equ" val="1">
-                <dgm:layoutNode name="vertSpace2a">
-                  <dgm:alg type="sp"/>
-                  <dgm:shape xmlns:r="http://schemas.openxmlformats.org/officeDocument/2006/relationships" r:blip="">
-                    <dgm:adjLst/>
-                  </dgm:shape>
-                  <dgm:presOf/>
-                </dgm:layoutNode>
-              </dgm:if>
-              <dgm:else name="Name19"/>
-            </dgm:choose>
-            <dgm:layoutNode name="horz2">
-              <dgm:choose name="Name20">
-                <dgm:if name="Name21" func="var" arg="dir" op="equ" val="norm">
-                  <dgm:alg type="lin">
-                    <dgm:param type="linDir" val="fromL"/>
-                    <dgm:param type="nodeVertAlign" val="t"/>
-                  </dgm:alg>
-                </dgm:if>
-                <dgm:else name="Name22">
-                  <dgm:alg type="lin">
-                    <dgm:param type="linDir" val="fromR"/>
-                    <dgm:param type="nodeVertAlign" val="t"/>
-                  </dgm:alg>
-                </dgm:else>
-              </dgm:choose>
-              <dgm:shape xmlns:r="http://schemas.openxmlformats.org/officeDocument/2006/relationships" r:blip="">
-                <dgm:adjLst/>
-              </dgm:shape>
-              <dgm:presOf/>
-              <dgm:layoutNode name="horzSpace2">
-                <dgm:alg type="sp"/>
-                <dgm:shape xmlns:r="http://schemas.openxmlformats.org/officeDocument/2006/relationships" r:blip="">
-                  <dgm:adjLst/>
-                </dgm:shape>
-                <dgm:presOf/>
-              </dgm:layoutNode>
-              <dgm:layoutNode name="tx2" styleLbl="revTx">
-                <dgm:alg type="tx">
-                  <dgm:param type="parTxLTRAlign" val="l"/>
-                  <dgm:param type="parTxRTLAlign" val="r"/>
-                  <dgm:param type="txAnchorVert" val="t"/>
-                </dgm:alg>
-                <dgm:shape xmlns:r="http://schemas.openxmlformats.org/officeDocument/2006/relationships" type="rect" r:blip="">
-                  <dgm:adjLst/>
-                </dgm:shape>
-                <dgm:presOf axis="self"/>
-                <dgm:constrLst>
-                  <dgm:constr type="tMarg" refType="primFontSz" fact="0.3"/>
-                  <dgm:constr type="bMarg" refType="primFontSz" fact="0.3"/>
-                  <dgm:constr type="lMarg" refType="primFontSz" fact="0.3"/>
-                  <dgm:constr type="rMarg" refType="primFontSz" fact="0.3"/>
-                </dgm:constrLst>
-                <dgm:ruleLst>
-                  <dgm:rule type="primFontSz" val="5" fact="NaN" max="NaN"/>
-                </dgm:ruleLst>
-              </dgm:layoutNode>
-              <dgm:layoutNode name="vert2">
-                <dgm:choose name="Name23">
-                  <dgm:if name="Name24" func="var" arg="dir" op="equ" val="norm">
-                    <dgm:alg type="lin">
-                      <dgm:param type="linDir" val="fromT"/>
-                      <dgm:param type="nodeHorzAlign" val="l"/>
-                    </dgm:alg>
-                  </dgm:if>
-                  <dgm:else name="Name25">
-                    <dgm:alg type="lin">
-                      <dgm:param type="linDir" val="fromT"/>
-                      <dgm:param type="nodeHorzAlign" val="r"/>
-                    </dgm:alg>
-                  </dgm:else>
-                </dgm:choose>
-                <dgm:shape xmlns:r="http://schemas.openxmlformats.org/officeDocument/2006/relationships" r:blip="">
-                  <dgm:adjLst/>
-                </dgm:shape>
-                <dgm:presOf/>
-                <dgm:forEach name="Name26" axis="ch" ptType="node">
-                  <dgm:layoutNode name="horz3">
-                    <dgm:choose name="Name27">
-                      <dgm:if name="Name28" func="var" arg="dir" op="equ" val="norm">
-                        <dgm:alg type="lin">
-                          <dgm:param type="linDir" val="fromL"/>
-                          <dgm:param type="nodeVertAlign" val="t"/>
-                        </dgm:alg>
-                      </dgm:if>
-                      <dgm:else name="Name29">
-                        <dgm:alg type="lin">
-                          <dgm:param type="linDir" val="fromR"/>
-                          <dgm:param type="nodeVertAlign" val="t"/>
-                        </dgm:alg>
-                      </dgm:else>
-                    </dgm:choose>
-                    <dgm:shape xmlns:r="http://schemas.openxmlformats.org/officeDocument/2006/relationships" r:blip="">
-                      <dgm:adjLst/>
-                    </dgm:shape>
-                    <dgm:presOf/>
-                    <dgm:layoutNode name="horzSpace3">
-                      <dgm:alg type="sp"/>
-                      <dgm:shape xmlns:r="http://schemas.openxmlformats.org/officeDocument/2006/relationships" r:blip="">
-                        <dgm:adjLst/>
-                      </dgm:shape>
-                      <dgm:presOf/>
-                    </dgm:layoutNode>
-                    <dgm:layoutNode name="tx3" styleLbl="revTx">
-                      <dgm:alg type="tx">
-                        <dgm:param type="parTxLTRAlign" val="l"/>
-                        <dgm:param type="parTxRTLAlign" val="r"/>
-                        <dgm:param type="txAnchorVert" val="t"/>
-                      </dgm:alg>
-                      <dgm:shape xmlns:r="http://schemas.openxmlformats.org/officeDocument/2006/relationships" type="rect" r:blip="">
-                        <dgm:adjLst/>
-                      </dgm:shape>
-                      <dgm:presOf axis="self"/>
-                      <dgm:constrLst>
-                        <dgm:constr type="tMarg" refType="primFontSz" fact="0.3"/>
-                        <dgm:constr type="bMarg" refType="primFontSz" fact="0.3"/>
-                        <dgm:constr type="lMarg" refType="primFontSz" fact="0.3"/>
-                        <dgm:constr type="rMarg" refType="primFontSz" fact="0.3"/>
-                      </dgm:constrLst>
-                      <dgm:ruleLst>
-                        <dgm:rule type="primFontSz" val="5" fact="NaN" max="NaN"/>
-                      </dgm:ruleLst>
-                    </dgm:layoutNode>
-                    <dgm:layoutNode name="vert3">
-                      <dgm:choose name="Name30">
-                        <dgm:if name="Name31" func="var" arg="dir" op="equ" val="norm">
-                          <dgm:alg type="lin">
-                            <dgm:param type="linDir" val="fromT"/>
-                            <dgm:param type="nodeHorzAlign" val="l"/>
-                          </dgm:alg>
-                        </dgm:if>
-                        <dgm:else name="Name32">
-                          <dgm:alg type="lin">
-                            <dgm:param type="linDir" val="fromT"/>
-                            <dgm:param type="nodeHorzAlign" val="r"/>
-                          </dgm:alg>
-                        </dgm:else>
-                      </dgm:choose>
-                      <dgm:shape xmlns:r="http://schemas.openxmlformats.org/officeDocument/2006/relationships" r:blip="">
-                        <dgm:adjLst/>
-                      </dgm:shape>
-                      <dgm:presOf/>
-                      <dgm:forEach name="Name33" axis="ch" ptType="node">
-                        <dgm:layoutNode name="horz4">
-                          <dgm:choose name="Name34">
-                            <dgm:if name="Name35" func="var" arg="dir" op="equ" val="norm">
-                              <dgm:alg type="lin">
-                                <dgm:param type="linDir" val="fromL"/>
-                                <dgm:param type="nodeVertAlign" val="t"/>
-                              </dgm:alg>
-                            </dgm:if>
-                            <dgm:else name="Name36">
-                              <dgm:alg type="lin">
-                                <dgm:param type="linDir" val="fromR"/>
-                                <dgm:param type="nodeVertAlign" val="t"/>
-                              </dgm:alg>
-                            </dgm:else>
-                          </dgm:choose>
-                          <dgm:shape xmlns:r="http://schemas.openxmlformats.org/officeDocument/2006/relationships" r:blip="">
-                            <dgm:adjLst/>
-                          </dgm:shape>
-                          <dgm:presOf/>
-                          <dgm:layoutNode name="horzSpace4">
-                            <dgm:alg type="sp"/>
-                            <dgm:shape xmlns:r="http://schemas.openxmlformats.org/officeDocument/2006/relationships" r:blip="">
-                              <dgm:adjLst/>
-                            </dgm:shape>
-                            <dgm:presOf/>
-                          </dgm:layoutNode>
-                          <dgm:layoutNode name="tx4" styleLbl="revTx">
-                            <dgm:varLst>
-                              <dgm:bulletEnabled val="1"/>
-                            </dgm:varLst>
-                            <dgm:alg type="tx">
-                              <dgm:param type="parTxLTRAlign" val="l"/>
-                              <dgm:param type="parTxRTLAlign" val="r"/>
-                              <dgm:param type="txAnchorVert" val="t"/>
-                            </dgm:alg>
-                            <dgm:shape xmlns:r="http://schemas.openxmlformats.org/officeDocument/2006/relationships" type="rect" r:blip="">
-                              <dgm:adjLst/>
-                            </dgm:shape>
-                            <dgm:presOf axis="desOrSelf" ptType="node"/>
-                            <dgm:constrLst>
-                              <dgm:constr type="tMarg" refType="primFontSz" fact="0.3"/>
-                              <dgm:constr type="bMarg" refType="primFontSz" fact="0.3"/>
-                              <dgm:constr type="lMarg" refType="primFontSz" fact="0.3"/>
-                              <dgm:constr type="rMarg" refType="primFontSz" fact="0.3"/>
-                            </dgm:constrLst>
-                            <dgm:ruleLst>
-                              <dgm:rule type="primFontSz" val="5" fact="NaN" max="NaN"/>
-                            </dgm:ruleLst>
-                          </dgm:layoutNode>
-                        </dgm:layoutNode>
-                      </dgm:forEach>
-                    </dgm:layoutNode>
-                  </dgm:layoutNode>
-                  <dgm:forEach name="Name37" axis="followSib" ptType="sibTrans" cnt="1">
-                    <dgm:layoutNode name="thinLine3" styleLbl="callout">
-                      <dgm:alg type="sp"/>
-                      <dgm:shape xmlns:r="http://schemas.openxmlformats.org/officeDocument/2006/relationships" type="line" r:blip="">
-                        <dgm:adjLst/>
-                      </dgm:shape>
-                      <dgm:presOf/>
-                    </dgm:layoutNode>
-                  </dgm:forEach>
-                </dgm:forEach>
-              </dgm:layoutNode>
-            </dgm:layoutNode>
-            <dgm:layoutNode name="thinLine2b" styleLbl="callout">
-              <dgm:alg type="sp"/>
-              <dgm:shape xmlns:r="http://schemas.openxmlformats.org/officeDocument/2006/relationships" type="line" r:blip="">
-                <dgm:adjLst/>
-              </dgm:shape>
-              <dgm:presOf/>
-            </dgm:layoutNode>
-            <dgm:layoutNode name="vertSpace2b">
-              <dgm:alg type="sp"/>
-              <dgm:shape xmlns:r="http://schemas.openxmlformats.org/officeDocument/2006/relationships" r:blip="">
-                <dgm:adjLst/>
-              </dgm:shape>
-              <dgm:presOf/>
-            </dgm:layoutNode>
-          </dgm:forEach>
-        </dgm:layoutNode>
-      </dgm:layoutNode>
-    </dgm:forEach>
-  </dgm:layoutNode>
-</dgm:layoutDef>
-</file>
-
-<file path=ppt/diagrams/quickStyle1.xml><?xml version="1.0" encoding="utf-8"?>
-<dgm:styleDef xmlns:dgm="http://schemas.openxmlformats.org/drawingml/2006/diagram" xmlns:a="http://schemas.openxmlformats.org/drawingml/2006/main" uniqueId="urn:microsoft.com/office/officeart/2005/8/quickstyle/simple1">
-  <dgm:title val=""/>
-  <dgm:desc val=""/>
-  <dgm:catLst>
-    <dgm:cat type="simple" pri="10100"/>
-  </dgm:catLst>
-  <dgm:scene3d>
-    <a:camera prst="orthographicFront"/>
-    <a:lightRig rig="threePt" dir="t"/>
-  </dgm:scene3d>
-  <dgm:styleLbl name="node0">
-    <dgm:scene3d>
-      <a:camera prst="orthographicFront"/>
-      <a:lightRig rig="threePt" dir="t"/>
-    </dgm:scene3d>
-    <dgm:sp3d/>
-    <dgm:txPr/>
-    <dgm:style>
-      <a:lnRef idx="2">
-        <a:scrgbClr r="0" g="0" b="0"/>
-      </a:lnRef>
-      <a:fillRef idx="1">
-        <a:scrgbClr r="0" g="0" b="0"/>
-      </a:fillRef>
-      <a:effectRef idx="0">
-        <a:scrgbClr r="0" g="0" b="0"/>
-      </a:effectRef>
-      <a:fontRef idx="minor">
-        <a:schemeClr val="lt1"/>
-      </a:fontRef>
-    </dgm:style>
-  </dgm:styleLbl>
-  <dgm:styleLbl name="lnNode1">
-    <dgm:scene3d>
-      <a:camera prst="orthographicFront"/>
-      <a:lightRig rig="threePt" dir="t"/>
-    </dgm:scene3d>
-    <dgm:sp3d/>
-    <dgm:txPr/>
-    <dgm:style>
-      <a:lnRef idx="2">
-        <a:scrgbClr r="0" g="0" b="0"/>
-      </a:lnRef>
-      <a:fillRef idx="1">
-        <a:scrgbClr r="0" g="0" b="0"/>
-      </a:fillRef>
-      <a:effectRef idx="0">
-        <a:scrgbClr r="0" g="0" b="0"/>
-      </a:effectRef>
-      <a:fontRef idx="minor">
-        <a:schemeClr val="lt1"/>
-      </a:fontRef>
-    </dgm:style>
-  </dgm:styleLbl>
-  <dgm:styleLbl name="vennNode1">
-    <dgm:scene3d>
-      <a:camera prst="orthographicFront"/>
-      <a:lightRig rig="threePt" dir="t"/>
-    </dgm:scene3d>
-    <dgm:sp3d/>
-    <dgm:txPr/>
-    <dgm:style>
-      <a:lnRef idx="2">
-        <a:scrgbClr r="0" g="0" b="0"/>
-      </a:lnRef>
-      <a:fillRef idx="1">
-        <a:scrgbClr r="0" g="0" b="0"/>
-      </a:fillRef>
-      <a:effectRef idx="0">
-        <a:scrgbClr r="0" g="0" b="0"/>
-      </a:effectRef>
-      <a:fontRef idx="minor">
-        <a:schemeClr val="tx1"/>
-      </a:fontRef>
-    </dgm:style>
-  </dgm:styleLbl>
-  <dgm:styleLbl name="alignNode1">
-    <dgm:scene3d>
-      <a:camera prst="orthographicFront"/>
-      <a:lightRig rig="threePt" dir="t"/>
-    </dgm:scene3d>
-    <dgm:sp3d/>
-    <dgm:txPr/>
-    <dgm:style>
-      <a:lnRef idx="2">
-        <a:scrgbClr r="0" g="0" b="0"/>
-      </a:lnRef>
-      <a:fillRef idx="1">
-        <a:scrgbClr r="0" g="0" b="0"/>
-      </a:fillRef>
-      <a:effectRef idx="0">
-        <a:scrgbClr r="0" g="0" b="0"/>
-      </a:effectRef>
-      <a:fontRef idx="minor">
-        <a:schemeClr val="lt1"/>
-      </a:fontRef>
-    </dgm:style>
-  </dgm:styleLbl>
-  <dgm:styleLbl name="node1">
-    <dgm:scene3d>
-      <a:camera prst="orthographicFront"/>
-      <a:lightRig rig="threePt" dir="t"/>
-    </dgm:scene3d>
-    <dgm:sp3d/>
-    <dgm:txPr/>
-    <dgm:style>
-      <a:lnRef idx="2">
-        <a:scrgbClr r="0" g="0" b="0"/>
-      </a:lnRef>
-      <a:fillRef idx="1">
-        <a:scrgbClr r="0" g="0" b="0"/>
-      </a:fillRef>
-      <a:effectRef idx="0">
-        <a:scrgbClr r="0" g="0" b="0"/>
-      </a:effectRef>
-      <a:fontRef idx="minor">
-        <a:schemeClr val="lt1"/>
-      </a:fontRef>
-    </dgm:style>
-  </dgm:styleLbl>
-  <dgm:styleLbl name="node2">
-    <dgm:scene3d>
-      <a:camera prst="orthographicFront"/>
-      <a:lightRig rig="threePt" dir="t"/>
-    </dgm:scene3d>
-    <dgm:sp3d/>
-    <dgm:txPr/>
-    <dgm:style>
-      <a:lnRef idx="2">
-        <a:scrgbClr r="0" g="0" b="0"/>
-      </a:lnRef>
-      <a:fillRef idx="1">
-        <a:scrgbClr r="0" g="0" b="0"/>
-      </a:fillRef>
-      <a:effectRef idx="0">
-        <a:scrgbClr r="0" g="0" b="0"/>
-      </a:effectRef>
-      <a:fontRef idx="minor">
-        <a:schemeClr val="lt1"/>
-      </a:fontRef>
-    </dgm:style>
-  </dgm:styleLbl>
-  <dgm:styleLbl name="node3">
-    <dgm:scene3d>
-      <a:camera prst="orthographicFront"/>
-      <a:lightRig rig="threePt" dir="t"/>
-    </dgm:scene3d>
-    <dgm:sp3d/>
-    <dgm:txPr/>
-    <dgm:style>
-      <a:lnRef idx="2">
-        <a:scrgbClr r="0" g="0" b="0"/>
-      </a:lnRef>
-      <a:fillRef idx="1">
-        <a:scrgbClr r="0" g="0" b="0"/>
-      </a:fillRef>
-      <a:effectRef idx="0">
-        <a:scrgbClr r="0" g="0" b="0"/>
-      </a:effectRef>
-      <a:fontRef idx="minor">
-        <a:schemeClr val="lt1"/>
-      </a:fontRef>
-    </dgm:style>
-  </dgm:styleLbl>
-  <dgm:styleLbl name="node4">
-    <dgm:scene3d>
-      <a:camera prst="orthographicFront"/>
-      <a:lightRig rig="threePt" dir="t"/>
-    </dgm:scene3d>
-    <dgm:sp3d/>
-    <dgm:txPr/>
-    <dgm:style>
-      <a:lnRef idx="2">
-        <a:scrgbClr r="0" g="0" b="0"/>
-      </a:lnRef>
-      <a:fillRef idx="1">
-        <a:scrgbClr r="0" g="0" b="0"/>
-      </a:fillRef>
-      <a:effectRef idx="0">
-        <a:scrgbClr r="0" g="0" b="0"/>
-      </a:effectRef>
-      <a:fontRef idx="minor">
-        <a:schemeClr val="lt1"/>
-      </a:fontRef>
-    </dgm:style>
-  </dgm:styleLbl>
-  <dgm:styleLbl name="fgImgPlace1">
-    <dgm:scene3d>
-      <a:camera prst="orthographicFront"/>
-      <a:lightRig rig="threePt" dir="t"/>
-    </dgm:scene3d>
-    <dgm:sp3d/>
-    <dgm:txPr/>
-    <dgm:style>
-      <a:lnRef idx="2">
-        <a:scrgbClr r="0" g="0" b="0"/>
-      </a:lnRef>
-      <a:fillRef idx="1">
-        <a:scrgbClr r="0" g="0" b="0"/>
-      </a:fillRef>
-      <a:effectRef idx="0">
-        <a:scrgbClr r="0" g="0" b="0"/>
-      </a:effectRef>
-      <a:fontRef idx="minor"/>
-    </dgm:style>
-  </dgm:styleLbl>
-  <dgm:styleLbl name="alignImgPlace1">
-    <dgm:scene3d>
-      <a:camera prst="orthographicFront"/>
-      <a:lightRig rig="threePt" dir="t"/>
-    </dgm:scene3d>
-    <dgm:sp3d/>
-    <dgm:txPr/>
-    <dgm:style>
-      <a:lnRef idx="2">
-        <a:scrgbClr r="0" g="0" b="0"/>
-      </a:lnRef>
-      <a:fillRef idx="1">
-        <a:scrgbClr r="0" g="0" b="0"/>
-      </a:fillRef>
-      <a:effectRef idx="0">
-        <a:scrgbClr r="0" g="0" b="0"/>
-      </a:effectRef>
-      <a:fontRef idx="minor"/>
-    </dgm:style>
-  </dgm:styleLbl>
-  <dgm:styleLbl name="bgImgPlace1">
-    <dgm:scene3d>
-      <a:camera prst="orthographicFront"/>
-      <a:lightRig rig="threePt" dir="t"/>
-    </dgm:scene3d>
-    <dgm:sp3d/>
-    <dgm:txPr/>
-    <dgm:style>
-      <a:lnRef idx="2">
-        <a:scrgbClr r="0" g="0" b="0"/>
-      </a:lnRef>
-      <a:fillRef idx="1">
-        <a:scrgbClr r="0" g="0" b="0"/>
-      </a:fillRef>
-      <a:effectRef idx="0">
-        <a:scrgbClr r="0" g="0" b="0"/>
-      </a:effectRef>
-      <a:fontRef idx="minor"/>
-    </dgm:style>
-  </dgm:styleLbl>
-  <dgm:styleLbl name="sibTrans2D1">
-    <dgm:scene3d>
-      <a:camera prst="orthographicFront"/>
-      <a:lightRig rig="threePt" dir="t"/>
-    </dgm:scene3d>
-    <dgm:sp3d/>
-    <dgm:txPr/>
-    <dgm:style>
-      <a:lnRef idx="0">
-        <a:scrgbClr r="0" g="0" b="0"/>
-      </a:lnRef>
-      <a:fillRef idx="1">
-        <a:scrgbClr r="0" g="0" b="0"/>
-      </a:fillRef>
-      <a:effectRef idx="0">
-        <a:scrgbClr r="0" g="0" b="0"/>
-      </a:effectRef>
-      <a:fontRef idx="minor">
-        <a:schemeClr val="lt1"/>
-      </a:fontRef>
-    </dgm:style>
-  </dgm:styleLbl>
-  <dgm:styleLbl name="fgSibTrans2D1">
-    <dgm:scene3d>
-      <a:camera prst="orthographicFront"/>
-      <a:lightRig rig="threePt" dir="t"/>
-    </dgm:scene3d>
-    <dgm:sp3d/>
-    <dgm:txPr/>
-    <dgm:style>
-      <a:lnRef idx="0">
-        <a:scrgbClr r="0" g="0" b="0"/>
-      </a:lnRef>
-      <a:fillRef idx="1">
-        <a:scrgbClr r="0" g="0" b="0"/>
-      </a:fillRef>
-      <a:effectRef idx="0">
-        <a:scrgbClr r="0" g="0" b="0"/>
-      </a:effectRef>
-      <a:fontRef idx="minor">
-        <a:schemeClr val="lt1"/>
-      </a:fontRef>
-    </dgm:style>
-  </dgm:styleLbl>
-  <dgm:styleLbl name="bgSibTrans2D1">
-    <dgm:scene3d>
-      <a:camera prst="orthographicFront"/>
-      <a:lightRig rig="threePt" dir="t"/>
-    </dgm:scene3d>
-    <dgm:sp3d/>
-    <dgm:txPr/>
-    <dgm:style>
-      <a:lnRef idx="0">
-        <a:scrgbClr r="0" g="0" b="0"/>
-      </a:lnRef>
-      <a:fillRef idx="1">
-        <a:scrgbClr r="0" g="0" b="0"/>
-      </a:fillRef>
-      <a:effectRef idx="0">
-        <a:scrgbClr r="0" g="0" b="0"/>
-      </a:effectRef>
-      <a:fontRef idx="minor">
-        <a:schemeClr val="lt1"/>
-      </a:fontRef>
-    </dgm:style>
-  </dgm:styleLbl>
-  <dgm:styleLbl name="sibTrans1D1">
-    <dgm:scene3d>
-      <a:camera prst="orthographicFront"/>
-      <a:lightRig rig="threePt" dir="t"/>
-    </dgm:scene3d>
-    <dgm:sp3d/>
-    <dgm:txPr/>
-    <dgm:style>
-      <a:lnRef idx="1">
-        <a:scrgbClr r="0" g="0" b="0"/>
-      </a:lnRef>
-      <a:fillRef idx="0">
-        <a:scrgbClr r="0" g="0" b="0"/>
-      </a:fillRef>
-      <a:effectRef idx="0">
-        <a:scrgbClr r="0" g="0" b="0"/>
-      </a:effectRef>
-      <a:fontRef idx="minor"/>
-    </dgm:style>
-  </dgm:styleLbl>
-  <dgm:styleLbl name="callout">
-    <dgm:scene3d>
-      <a:camera prst="orthographicFront"/>
-      <a:lightRig rig="threePt" dir="t"/>
-    </dgm:scene3d>
-    <dgm:sp3d/>
-    <dgm:txPr/>
-    <dgm:style>
-      <a:lnRef idx="2">
-        <a:scrgbClr r="0" g="0" b="0"/>
-      </a:lnRef>
-      <a:fillRef idx="1">
-        <a:scrgbClr r="0" g="0" b="0"/>
-      </a:fillRef>
-      <a:effectRef idx="0">
-        <a:scrgbClr r="0" g="0" b="0"/>
-      </a:effectRef>
-      <a:fontRef idx="minor"/>
-    </dgm:style>
-  </dgm:styleLbl>
-  <dgm:styleLbl name="asst0">
-    <dgm:scene3d>
-      <a:camera prst="orthographicFront"/>
-      <a:lightRig rig="threePt" dir="t"/>
-    </dgm:scene3d>
-    <dgm:sp3d/>
-    <dgm:txPr/>
-    <dgm:style>
-      <a:lnRef idx="2">
-        <a:scrgbClr r="0" g="0" b="0"/>
-      </a:lnRef>
-      <a:fillRef idx="1">
-        <a:scrgbClr r="0" g="0" b="0"/>
-      </a:fillRef>
-      <a:effectRef idx="0">
-        <a:scrgbClr r="0" g="0" b="0"/>
-      </a:effectRef>
-      <a:fontRef idx="minor">
-        <a:schemeClr val="lt1"/>
-      </a:fontRef>
-    </dgm:style>
-  </dgm:styleLbl>
-  <dgm:styleLbl name="asst1">
-    <dgm:scene3d>
-      <a:camera prst="orthographicFront"/>
-      <a:lightRig rig="threePt" dir="t"/>
-    </dgm:scene3d>
-    <dgm:sp3d/>
-    <dgm:txPr/>
-    <dgm:style>
-      <a:lnRef idx="2">
-        <a:scrgbClr r="0" g="0" b="0"/>
-      </a:lnRef>
-      <a:fillRef idx="1">
-        <a:scrgbClr r="0" g="0" b="0"/>
-      </a:fillRef>
-      <a:effectRef idx="0">
-        <a:scrgbClr r="0" g="0" b="0"/>
-      </a:effectRef>
-      <a:fontRef idx="minor">
-        <a:schemeClr val="lt1"/>
-      </a:fontRef>
-    </dgm:style>
-  </dgm:styleLbl>
-  <dgm:styleLbl name="asst2">
-    <dgm:scene3d>
-      <a:camera prst="orthographicFront"/>
-      <a:lightRig rig="threePt" dir="t"/>
-    </dgm:scene3d>
-    <dgm:sp3d/>
-    <dgm:txPr/>
-    <dgm:style>
-      <a:lnRef idx="2">
-        <a:scrgbClr r="0" g="0" b="0"/>
-      </a:lnRef>
-      <a:fillRef idx="1">
-        <a:scrgbClr r="0" g="0" b="0"/>
-      </a:fillRef>
-      <a:effectRef idx="0">
-        <a:scrgbClr r="0" g="0" b="0"/>
-      </a:effectRef>
-      <a:fontRef idx="minor">
-        <a:schemeClr val="lt1"/>
-      </a:fontRef>
-    </dgm:style>
-  </dgm:styleLbl>
-  <dgm:styleLbl name="asst3">
-    <dgm:scene3d>
-      <a:camera prst="orthographicFront"/>
-      <a:lightRig rig="threePt" dir="t"/>
-    </dgm:scene3d>
-    <dgm:sp3d/>
-    <dgm:txPr/>
-    <dgm:style>
-      <a:lnRef idx="2">
-        <a:scrgbClr r="0" g="0" b="0"/>
-      </a:lnRef>
-      <a:fillRef idx="1">
-        <a:scrgbClr r="0" g="0" b="0"/>
-      </a:fillRef>
-      <a:effectRef idx="0">
-        <a:scrgbClr r="0" g="0" b="0"/>
-      </a:effectRef>
-      <a:fontRef idx="minor">
-        <a:schemeClr val="lt1"/>
-      </a:fontRef>
-    </dgm:style>
-  </dgm:styleLbl>
-  <dgm:styleLbl name="asst4">
-    <dgm:scene3d>
-      <a:camera prst="orthographicFront"/>
-      <a:lightRig rig="threePt" dir="t"/>
-    </dgm:scene3d>
-    <dgm:sp3d/>
-    <dgm:txPr/>
-    <dgm:style>
-      <a:lnRef idx="2">
-        <a:scrgbClr r="0" g="0" b="0"/>
-      </a:lnRef>
-      <a:fillRef idx="1">
-        <a:scrgbClr r="0" g="0" b="0"/>
-      </a:fillRef>
-      <a:effectRef idx="0">
-        <a:scrgbClr r="0" g="0" b="0"/>
-      </a:effectRef>
-      <a:fontRef idx="minor">
-        <a:schemeClr val="lt1"/>
-      </a:fontRef>
-    </dgm:style>
-  </dgm:styleLbl>
-  <dgm:styleLbl name="parChTrans2D1">
-    <dgm:scene3d>
-      <a:camera prst="orthographicFront"/>
-      <a:lightRig rig="threePt" dir="t"/>
-    </dgm:scene3d>
-    <dgm:sp3d/>
-    <dgm:txPr/>
-    <dgm:style>
-      <a:lnRef idx="2">
-        <a:scrgbClr r="0" g="0" b="0"/>
-      </a:lnRef>
-      <a:fillRef idx="1">
-        <a:scrgbClr r="0" g="0" b="0"/>
-      </a:fillRef>
-      <a:effectRef idx="0">
-        <a:scrgbClr r="0" g="0" b="0"/>
-      </a:effectRef>
-      <a:fontRef idx="minor">
-        <a:schemeClr val="lt1"/>
-      </a:fontRef>
-    </dgm:style>
-  </dgm:styleLbl>
-  <dgm:styleLbl name="parChTrans2D2">
-    <dgm:scene3d>
-      <a:camera prst="orthographicFront"/>
-      <a:lightRig rig="threePt" dir="t"/>
-    </dgm:scene3d>
-    <dgm:sp3d/>
-    <dgm:txPr/>
-    <dgm:style>
-      <a:lnRef idx="2">
-        <a:scrgbClr r="0" g="0" b="0"/>
-      </a:lnRef>
-      <a:fillRef idx="1">
-        <a:scrgbClr r="0" g="0" b="0"/>
-      </a:fillRef>
-      <a:effectRef idx="0">
-        <a:scrgbClr r="0" g="0" b="0"/>
-      </a:effectRef>
-      <a:fontRef idx="minor">
-        <a:schemeClr val="lt1"/>
-      </a:fontRef>
-    </dgm:style>
-  </dgm:styleLbl>
-  <dgm:styleLbl name="parChTrans2D3">
-    <dgm:scene3d>
-      <a:camera prst="orthographicFront"/>
-      <a:lightRig rig="threePt" dir="t"/>
-    </dgm:scene3d>
-    <dgm:sp3d/>
-    <dgm:txPr/>
-    <dgm:style>
-      <a:lnRef idx="2">
-        <a:scrgbClr r="0" g="0" b="0"/>
-      </a:lnRef>
-      <a:fillRef idx="1">
-        <a:scrgbClr r="0" g="0" b="0"/>
-      </a:fillRef>
-      <a:effectRef idx="0">
-        <a:scrgbClr r="0" g="0" b="0"/>
-      </a:effectRef>
-      <a:fontRef idx="minor">
-        <a:schemeClr val="lt1"/>
-      </a:fontRef>
-    </dgm:style>
-  </dgm:styleLbl>
-  <dgm:styleLbl name="parChTrans2D4">
-    <dgm:scene3d>
-      <a:camera prst="orthographicFront"/>
-      <a:lightRig rig="threePt" dir="t"/>
-    </dgm:scene3d>
-    <dgm:sp3d/>
-    <dgm:txPr/>
-    <dgm:style>
-      <a:lnRef idx="2">
-        <a:scrgbClr r="0" g="0" b="0"/>
-      </a:lnRef>
-      <a:fillRef idx="1">
-        <a:scrgbClr r="0" g="0" b="0"/>
-      </a:fillRef>
-      <a:effectRef idx="0">
-        <a:scrgbClr r="0" g="0" b="0"/>
-      </a:effectRef>
-      <a:fontRef idx="minor">
-        <a:schemeClr val="lt1"/>
-      </a:fontRef>
-    </dgm:style>
-  </dgm:styleLbl>
-  <dgm:styleLbl name="parChTrans1D1">
-    <dgm:scene3d>
-      <a:camera prst="orthographicFront"/>
-      <a:lightRig rig="threePt" dir="t"/>
-    </dgm:scene3d>
-    <dgm:sp3d/>
-    <dgm:txPr/>
-    <dgm:style>
-      <a:lnRef idx="2">
-        <a:scrgbClr r="0" g="0" b="0"/>
-      </a:lnRef>
-      <a:fillRef idx="0">
-        <a:scrgbClr r="0" g="0" b="0"/>
-      </a:fillRef>
-      <a:effectRef idx="0">
-        <a:scrgbClr r="0" g="0" b="0"/>
-      </a:effectRef>
-      <a:fontRef idx="minor"/>
-    </dgm:style>
-  </dgm:styleLbl>
-  <dgm:styleLbl name="parChTrans1D2">
-    <dgm:scene3d>
-      <a:camera prst="orthographicFront"/>
-      <a:lightRig rig="threePt" dir="t"/>
-    </dgm:scene3d>
-    <dgm:sp3d/>
-    <dgm:txPr/>
-    <dgm:style>
-      <a:lnRef idx="2">
-        <a:scrgbClr r="0" g="0" b="0"/>
-      </a:lnRef>
-      <a:fillRef idx="0">
-        <a:scrgbClr r="0" g="0" b="0"/>
-      </a:fillRef>
-      <a:effectRef idx="0">
-        <a:scrgbClr r="0" g="0" b="0"/>
-      </a:effectRef>
-      <a:fontRef idx="minor"/>
-    </dgm:style>
-  </dgm:styleLbl>
-  <dgm:styleLbl name="parChTrans1D3">
-    <dgm:scene3d>
-      <a:camera prst="orthographicFront"/>
-      <a:lightRig rig="threePt" dir="t"/>
-    </dgm:scene3d>
-    <dgm:sp3d/>
-    <dgm:txPr/>
-    <dgm:style>
-      <a:lnRef idx="2">
-        <a:scrgbClr r="0" g="0" b="0"/>
-      </a:lnRef>
-      <a:fillRef idx="0">
-        <a:scrgbClr r="0" g="0" b="0"/>
-      </a:fillRef>
-      <a:effectRef idx="0">
-        <a:scrgbClr r="0" g="0" b="0"/>
-      </a:effectRef>
-      <a:fontRef idx="minor"/>
-    </dgm:style>
-  </dgm:styleLbl>
-  <dgm:styleLbl name="parChTrans1D4">
-    <dgm:scene3d>
-      <a:camera prst="orthographicFront"/>
-      <a:lightRig rig="threePt" dir="t"/>
-    </dgm:scene3d>
-    <dgm:sp3d/>
-    <dgm:txPr/>
-    <dgm:style>
-      <a:lnRef idx="2">
-        <a:scrgbClr r="0" g="0" b="0"/>
-      </a:lnRef>
-      <a:fillRef idx="0">
-        <a:scrgbClr r="0" g="0" b="0"/>
-      </a:fillRef>
-      <a:effectRef idx="0">
-        <a:scrgbClr r="0" g="0" b="0"/>
-      </a:effectRef>
-      <a:fontRef idx="minor"/>
-    </dgm:style>
-  </dgm:styleLbl>
-  <dgm:styleLbl name="fgAcc1">
-    <dgm:scene3d>
-      <a:camera prst="orthographicFront"/>
-      <a:lightRig rig="threePt" dir="t"/>
-    </dgm:scene3d>
-    <dgm:sp3d/>
-    <dgm:txPr/>
-    <dgm:style>
-      <a:lnRef idx="2">
-        <a:scrgbClr r="0" g="0" b="0"/>
-      </a:lnRef>
-      <a:fillRef idx="1">
-        <a:scrgbClr r="0" g="0" b="0"/>
-      </a:fillRef>
-      <a:effectRef idx="0">
-        <a:scrgbClr r="0" g="0" b="0"/>
-      </a:effectRef>
-      <a:fontRef idx="minor"/>
-    </dgm:style>
-  </dgm:styleLbl>
-  <dgm:styleLbl name="conFgAcc1">
-    <dgm:scene3d>
-      <a:camera prst="orthographicFront"/>
-      <a:lightRig rig="threePt" dir="t"/>
-    </dgm:scene3d>
-    <dgm:sp3d/>
-    <dgm:txPr/>
-    <dgm:style>
-      <a:lnRef idx="2">
-        <a:scrgbClr r="0" g="0" b="0"/>
-      </a:lnRef>
-      <a:fillRef idx="1">
-        <a:scrgbClr r="0" g="0" b="0"/>
-      </a:fillRef>
-      <a:effectRef idx="0">
-        <a:scrgbClr r="0" g="0" b="0"/>
-      </a:effectRef>
-      <a:fontRef idx="minor"/>
-    </dgm:style>
-  </dgm:styleLbl>
-  <dgm:styleLbl name="alignAcc1">
-    <dgm:scene3d>
-      <a:camera prst="orthographicFront"/>
-      <a:lightRig rig="threePt" dir="t"/>
-    </dgm:scene3d>
-    <dgm:sp3d/>
-    <dgm:txPr/>
-    <dgm:style>
-      <a:lnRef idx="2">
-        <a:scrgbClr r="0" g="0" b="0"/>
-      </a:lnRef>
-      <a:fillRef idx="1">
-        <a:scrgbClr r="0" g="0" b="0"/>
-      </a:fillRef>
-      <a:effectRef idx="0">
-        <a:scrgbClr r="0" g="0" b="0"/>
-      </a:effectRef>
-      <a:fontRef idx="minor"/>
-    </dgm:style>
-  </dgm:styleLbl>
-  <dgm:styleLbl name="trAlignAcc1">
-    <dgm:scene3d>
-      <a:camera prst="orthographicFront"/>
-      <a:lightRig rig="threePt" dir="t"/>
-    </dgm:scene3d>
-    <dgm:sp3d/>
-    <dgm:txPr/>
-    <dgm:style>
-      <a:lnRef idx="1">
-        <a:scrgbClr r="0" g="0" b="0"/>
-      </a:lnRef>
-      <a:fillRef idx="1">
-        <a:scrgbClr r="0" g="0" b="0"/>
-      </a:fillRef>
-      <a:effectRef idx="0">
-        <a:scrgbClr r="0" g="0" b="0"/>
-      </a:effectRef>
-      <a:fontRef idx="minor"/>
-    </dgm:style>
-  </dgm:styleLbl>
-  <dgm:styleLbl name="bgAcc1">
-    <dgm:scene3d>
-      <a:camera prst="orthographicFront"/>
-      <a:lightRig rig="threePt" dir="t"/>
-    </dgm:scene3d>
-    <dgm:sp3d/>
-    <dgm:txPr/>
-    <dgm:style>
-      <a:lnRef idx="2">
-        <a:scrgbClr r="0" g="0" b="0"/>
-      </a:lnRef>
-      <a:fillRef idx="1">
-        <a:scrgbClr r="0" g="0" b="0"/>
-      </a:fillRef>
-      <a:effectRef idx="0">
-        <a:scrgbClr r="0" g="0" b="0"/>
-      </a:effectRef>
-      <a:fontRef idx="minor"/>
-    </dgm:style>
-  </dgm:styleLbl>
-  <dgm:styleLbl name="solidFgAcc1">
-    <dgm:scene3d>
-      <a:camera prst="orthographicFront"/>
-      <a:lightRig rig="threePt" dir="t"/>
-    </dgm:scene3d>
-    <dgm:sp3d/>
-    <dgm:txPr/>
-    <dgm:style>
-      <a:lnRef idx="2">
-        <a:scrgbClr r="0" g="0" b="0"/>
-      </a:lnRef>
-      <a:fillRef idx="1">
-        <a:scrgbClr r="0" g="0" b="0"/>
-      </a:fillRef>
-      <a:effectRef idx="0">
-        <a:scrgbClr r="0" g="0" b="0"/>
-      </a:effectRef>
-      <a:fontRef idx="minor"/>
-    </dgm:style>
-  </dgm:styleLbl>
-  <dgm:styleLbl name="solidAlignAcc1">
-    <dgm:scene3d>
-      <a:camera prst="orthographicFront"/>
-      <a:lightRig rig="threePt" dir="t"/>
-    </dgm:scene3d>
-    <dgm:sp3d/>
-    <dgm:txPr/>
-    <dgm:style>
-      <a:lnRef idx="2">
-        <a:scrgbClr r="0" g="0" b="0"/>
-      </a:lnRef>
-      <a:fillRef idx="1">
-        <a:scrgbClr r="0" g="0" b="0"/>
-      </a:fillRef>
-      <a:effectRef idx="0">
-        <a:scrgbClr r="0" g="0" b="0"/>
-      </a:effectRef>
-      <a:fontRef idx="minor"/>
-    </dgm:style>
-  </dgm:styleLbl>
-  <dgm:styleLbl name="solidBgAcc1">
-    <dgm:scene3d>
-      <a:camera prst="orthographicFront"/>
-      <a:lightRig rig="threePt" dir="t"/>
-    </dgm:scene3d>
-    <dgm:sp3d/>
-    <dgm:txPr/>
-    <dgm:style>
-      <a:lnRef idx="2">
-        <a:scrgbClr r="0" g="0" b="0"/>
-      </a:lnRef>
-      <a:fillRef idx="1">
-        <a:scrgbClr r="0" g="0" b="0"/>
-      </a:fillRef>
-      <a:effectRef idx="0">
-        <a:scrgbClr r="0" g="0" b="0"/>
-      </a:effectRef>
-      <a:fontRef idx="minor"/>
-    </dgm:style>
-  </dgm:styleLbl>
-  <dgm:styleLbl name="fgAccFollowNode1">
-    <dgm:scene3d>
-      <a:camera prst="orthographicFront"/>
-      <a:lightRig rig="threePt" dir="t"/>
-    </dgm:scene3d>
-    <dgm:sp3d/>
-    <dgm:txPr/>
-    <dgm:style>
-      <a:lnRef idx="2">
-        <a:scrgbClr r="0" g="0" b="0"/>
-      </a:lnRef>
-      <a:fillRef idx="1">
-        <a:scrgbClr r="0" g="0" b="0"/>
-      </a:fillRef>
-      <a:effectRef idx="0">
-        <a:scrgbClr r="0" g="0" b="0"/>
-      </a:effectRef>
-      <a:fontRef idx="minor"/>
-    </dgm:style>
-  </dgm:styleLbl>
-  <dgm:styleLbl name="alignAccFollowNode1">
-    <dgm:scene3d>
-      <a:camera prst="orthographicFront"/>
-      <a:lightRig rig="threePt" dir="t"/>
-    </dgm:scene3d>
-    <dgm:sp3d/>
-    <dgm:txPr/>
-    <dgm:style>
-      <a:lnRef idx="2">
-        <a:scrgbClr r="0" g="0" b="0"/>
-      </a:lnRef>
-      <a:fillRef idx="1">
-        <a:scrgbClr r="0" g="0" b="0"/>
-      </a:fillRef>
-      <a:effectRef idx="0">
-        <a:scrgbClr r="0" g="0" b="0"/>
-      </a:effectRef>
-      <a:fontRef idx="minor"/>
-    </dgm:style>
-  </dgm:styleLbl>
-  <dgm:styleLbl name="bgAccFollowNode1">
-    <dgm:scene3d>
-      <a:camera prst="orthographicFront"/>
-      <a:lightRig rig="threePt" dir="t"/>
-    </dgm:scene3d>
-    <dgm:sp3d/>
-    <dgm:txPr/>
-    <dgm:style>
-      <a:lnRef idx="2">
-        <a:scrgbClr r="0" g="0" b="0"/>
-      </a:lnRef>
-      <a:fillRef idx="1">
-        <a:scrgbClr r="0" g="0" b="0"/>
-      </a:fillRef>
-      <a:effectRef idx="0">
-        <a:scrgbClr r="0" g="0" b="0"/>
-      </a:effectRef>
-      <a:fontRef idx="minor"/>
-    </dgm:style>
-  </dgm:styleLbl>
-  <dgm:styleLbl name="fgAcc0">
-    <dgm:scene3d>
-      <a:camera prst="orthographicFront"/>
-      <a:lightRig rig="threePt" dir="t"/>
-    </dgm:scene3d>
-    <dgm:sp3d/>
-    <dgm:txPr/>
-    <dgm:style>
-      <a:lnRef idx="2">
-        <a:scrgbClr r="0" g="0" b="0"/>
-      </a:lnRef>
-      <a:fillRef idx="1">
-        <a:scrgbClr r="0" g="0" b="0"/>
-      </a:fillRef>
-      <a:effectRef idx="0">
-        <a:scrgbClr r="0" g="0" b="0"/>
-      </a:effectRef>
-      <a:fontRef idx="minor"/>
-    </dgm:style>
-  </dgm:styleLbl>
-  <dgm:styleLbl name="fgAcc2">
-    <dgm:scene3d>
-      <a:camera prst="orthographicFront"/>
-      <a:lightRig rig="threePt" dir="t"/>
-    </dgm:scene3d>
-    <dgm:sp3d/>
-    <dgm:txPr/>
-    <dgm:style>
-      <a:lnRef idx="2">
-        <a:scrgbClr r="0" g="0" b="0"/>
-      </a:lnRef>
-      <a:fillRef idx="1">
-        <a:scrgbClr r="0" g="0" b="0"/>
-      </a:fillRef>
-      <a:effectRef idx="0">
-        <a:scrgbClr r="0" g="0" b="0"/>
-      </a:effectRef>
-      <a:fontRef idx="minor"/>
-    </dgm:style>
-  </dgm:styleLbl>
-  <dgm:styleLbl name="fgAcc3">
-    <dgm:scene3d>
-      <a:camera prst="orthographicFront"/>
-      <a:lightRig rig="threePt" dir="t"/>
-    </dgm:scene3d>
-    <dgm:sp3d/>
-    <dgm:txPr/>
-    <dgm:style>
-      <a:lnRef idx="2">
-        <a:scrgbClr r="0" g="0" b="0"/>
-      </a:lnRef>
-      <a:fillRef idx="1">
-        <a:scrgbClr r="0" g="0" b="0"/>
-      </a:fillRef>
-      <a:effectRef idx="0">
-        <a:scrgbClr r="0" g="0" b="0"/>
-      </a:effectRef>
-      <a:fontRef idx="minor"/>
-    </dgm:style>
-  </dgm:styleLbl>
-  <dgm:styleLbl name="fgAcc4">
-    <dgm:scene3d>
-      <a:camera prst="orthographicFront"/>
-      <a:lightRig rig="threePt" dir="t"/>
-    </dgm:scene3d>
-    <dgm:sp3d/>
-    <dgm:txPr/>
-    <dgm:style>
-      <a:lnRef idx="2">
-        <a:scrgbClr r="0" g="0" b="0"/>
-      </a:lnRef>
-      <a:fillRef idx="1">
-        <a:scrgbClr r="0" g="0" b="0"/>
-      </a:fillRef>
-      <a:effectRef idx="0">
-        <a:scrgbClr r="0" g="0" b="0"/>
-      </a:effectRef>
-      <a:fontRef idx="minor"/>
-    </dgm:style>
-  </dgm:styleLbl>
-  <dgm:styleLbl name="bgShp">
-    <dgm:scene3d>
-      <a:camera prst="orthographicFront"/>
-      <a:lightRig rig="threePt" dir="t"/>
-    </dgm:scene3d>
-    <dgm:sp3d/>
-    <dgm:txPr/>
-    <dgm:style>
-      <a:lnRef idx="0">
-        <a:scrgbClr r="0" g="0" b="0"/>
-      </a:lnRef>
-      <a:fillRef idx="1">
-        <a:scrgbClr r="0" g="0" b="0"/>
-      </a:fillRef>
-      <a:effectRef idx="0">
-        <a:scrgbClr r="0" g="0" b="0"/>
-      </a:effectRef>
-      <a:fontRef idx="minor"/>
-    </dgm:style>
-  </dgm:styleLbl>
-  <dgm:styleLbl name="dkBgShp">
-    <dgm:scene3d>
-      <a:camera prst="orthographicFront"/>
-      <a:lightRig rig="threePt" dir="t"/>
-    </dgm:scene3d>
-    <dgm:sp3d/>
-    <dgm:txPr/>
-    <dgm:style>
-      <a:lnRef idx="0">
-        <a:scrgbClr r="0" g="0" b="0"/>
-      </a:lnRef>
-      <a:fillRef idx="1">
-        <a:scrgbClr r="0" g="0" b="0"/>
-      </a:fillRef>
-      <a:effectRef idx="0">
-        <a:scrgbClr r="0" g="0" b="0"/>
-      </a:effectRef>
-      <a:fontRef idx="minor"/>
-    </dgm:style>
-  </dgm:styleLbl>
-  <dgm:styleLbl name="trBgShp">
-    <dgm:scene3d>
-      <a:camera prst="orthographicFront"/>
-      <a:lightRig rig="threePt" dir="t"/>
-    </dgm:scene3d>
-    <dgm:sp3d/>
-    <dgm:txPr/>
-    <dgm:style>
-      <a:lnRef idx="0">
-        <a:scrgbClr r="0" g="0" b="0"/>
-      </a:lnRef>
-      <a:fillRef idx="1">
-        <a:scrgbClr r="0" g="0" b="0"/>
-      </a:fillRef>
-      <a:effectRef idx="0">
-        <a:scrgbClr r="0" g="0" b="0"/>
-      </a:effectRef>
-      <a:fontRef idx="minor"/>
-    </dgm:style>
-  </dgm:styleLbl>
-  <dgm:styleLbl name="fgShp">
-    <dgm:scene3d>
-      <a:camera prst="orthographicFront"/>
-      <a:lightRig rig="threePt" dir="t"/>
-    </dgm:scene3d>
-    <dgm:sp3d/>
-    <dgm:txPr/>
-    <dgm:style>
-      <a:lnRef idx="2">
-        <a:scrgbClr r="0" g="0" b="0"/>
-      </a:lnRef>
-      <a:fillRef idx="1">
-        <a:scrgbClr r="0" g="0" b="0"/>
-      </a:fillRef>
-      <a:effectRef idx="0">
-        <a:scrgbClr r="0" g="0" b="0"/>
-      </a:effectRef>
-      <a:fontRef idx="minor"/>
-    </dgm:style>
-  </dgm:styleLbl>
-  <dgm:styleLbl name="revTx">
-    <dgm:scene3d>
-      <a:camera prst="orthographicFront"/>
-      <a:lightRig rig="threePt" dir="t"/>
-    </dgm:scene3d>
-    <dgm:sp3d/>
-    <dgm:txPr/>
-    <dgm:style>
-      <a:lnRef idx="0">
-        <a:scrgbClr r="0" g="0" b="0"/>
-      </a:lnRef>
-      <a:fillRef idx="0">
-        <a:scrgbClr r="0" g="0" b="0"/>
-      </a:fillRef>
-      <a:effectRef idx="0">
-        <a:scrgbClr r="0" g="0" b="0"/>
-      </a:effectRef>
-      <a:fontRef idx="minor"/>
-    </dgm:style>
-  </dgm:styleLbl>
-</dgm:styleDef>
 </file>
 
 <file path=ppt/notesMasters/notesMaster1.xml><?xml version="1.0" encoding="utf-8"?>
@@ -8690,11 +4869,10 @@
           <a:bodyPr/>
           <a:lstStyle/>
           <a:p>
-            <a:fld id="{C68121D2-9246-4B52-9877-10E6A7AF0C69}" type="slidenum">
+            <a:r>
               <a:rPr lang="zh-TW" altLang="en-US" smtClean="0"/>
-              <a:pPr/>
               <a:t>1</a:t>
-            </a:fld>
+            </a:r>
             <a:endParaRPr lang="zh-TW" altLang="en-US"/>
           </a:p>
         </p:txBody>
@@ -8756,11 +4934,10 @@
           <a:bodyPr/>
           <a:lstStyle/>
           <a:p>
-            <a:fld id="{C68121D2-9246-4B52-9877-10E6A7AF0C69}" type="slidenum">
+            <a:r>
               <a:rPr lang="zh-TW" altLang="en-US" smtClean="0"/>
-              <a:pPr/>
               <a:t>10</a:t>
-            </a:fld>
+            </a:r>
             <a:endParaRPr lang="zh-TW" altLang="en-US"/>
           </a:p>
         </p:txBody>
@@ -9256,11 +5433,10 @@
           <a:bodyPr/>
           <a:lstStyle/>
           <a:p>
-            <a:fld id="{C68121D2-9246-4B52-9877-10E6A7AF0C69}" type="slidenum">
+            <a:r>
               <a:rPr lang="zh-TW" altLang="en-US" smtClean="0"/>
-              <a:pPr/>
               <a:t>11</a:t>
-            </a:fld>
+            </a:r>
             <a:endParaRPr lang="zh-TW" altLang="en-US"/>
           </a:p>
         </p:txBody>
@@ -9378,11 +5554,10 @@
           <a:bodyPr/>
           <a:lstStyle/>
           <a:p>
-            <a:fld id="{C68121D2-9246-4B52-9877-10E6A7AF0C69}" type="slidenum">
+            <a:r>
               <a:rPr lang="zh-TW" altLang="en-US" smtClean="0"/>
-              <a:pPr/>
               <a:t>12</a:t>
-            </a:fld>
+            </a:r>
             <a:endParaRPr lang="zh-TW" altLang="en-US"/>
           </a:p>
         </p:txBody>
@@ -10315,11 +6490,10 @@
           <a:bodyPr/>
           <a:lstStyle/>
           <a:p>
-            <a:fld id="{C68121D2-9246-4B52-9877-10E6A7AF0C69}" type="slidenum">
+            <a:r>
               <a:rPr lang="zh-TW" altLang="en-US" smtClean="0"/>
-              <a:pPr/>
               <a:t>13</a:t>
-            </a:fld>
+            </a:r>
             <a:endParaRPr lang="zh-TW" altLang="en-US"/>
           </a:p>
         </p:txBody>
@@ -10594,11 +6768,10 @@
           <a:bodyPr/>
           <a:lstStyle/>
           <a:p>
-            <a:fld id="{C68121D2-9246-4B52-9877-10E6A7AF0C69}" type="slidenum">
+            <a:r>
               <a:rPr lang="zh-TW" altLang="en-US" smtClean="0"/>
-              <a:pPr/>
               <a:t>14</a:t>
-            </a:fld>
+            </a:r>
             <a:endParaRPr lang="zh-TW" altLang="en-US"/>
           </a:p>
         </p:txBody>
@@ -10867,11 +7040,10 @@
           <a:bodyPr/>
           <a:lstStyle/>
           <a:p>
-            <a:fld id="{C68121D2-9246-4B52-9877-10E6A7AF0C69}" type="slidenum">
+            <a:r>
               <a:rPr lang="zh-TW" altLang="en-US" smtClean="0"/>
-              <a:pPr/>
               <a:t>15</a:t>
-            </a:fld>
+            </a:r>
             <a:endParaRPr lang="zh-TW" altLang="en-US"/>
           </a:p>
         </p:txBody>
@@ -11300,11 +7472,10 @@
           <a:bodyPr/>
           <a:lstStyle/>
           <a:p>
-            <a:fld id="{C68121D2-9246-4B52-9877-10E6A7AF0C69}" type="slidenum">
+            <a:r>
               <a:rPr lang="zh-TW" altLang="en-US" smtClean="0"/>
-              <a:pPr/>
               <a:t>16</a:t>
-            </a:fld>
+            </a:r>
             <a:endParaRPr lang="zh-TW" altLang="en-US"/>
           </a:p>
         </p:txBody>
@@ -11821,11 +7992,10 @@
           <a:bodyPr/>
           <a:lstStyle/>
           <a:p>
-            <a:fld id="{C68121D2-9246-4B52-9877-10E6A7AF0C69}" type="slidenum">
+            <a:r>
               <a:rPr lang="zh-TW" altLang="en-US" smtClean="0"/>
-              <a:pPr/>
               <a:t>17</a:t>
-            </a:fld>
+            </a:r>
             <a:endParaRPr lang="zh-TW" altLang="en-US"/>
           </a:p>
         </p:txBody>
@@ -12955,11 +9125,10 @@
           <a:bodyPr/>
           <a:lstStyle/>
           <a:p>
-            <a:fld id="{C68121D2-9246-4B52-9877-10E6A7AF0C69}" type="slidenum">
+            <a:r>
               <a:rPr lang="zh-TW" altLang="en-US" smtClean="0"/>
-              <a:pPr/>
               <a:t>18</a:t>
-            </a:fld>
+            </a:r>
             <a:endParaRPr lang="zh-TW" altLang="en-US"/>
           </a:p>
         </p:txBody>
@@ -13444,11 +9613,10 @@
           <a:bodyPr/>
           <a:lstStyle/>
           <a:p>
-            <a:fld id="{C68121D2-9246-4B52-9877-10E6A7AF0C69}" type="slidenum">
+            <a:r>
               <a:rPr lang="zh-TW" altLang="en-US" smtClean="0"/>
-              <a:pPr/>
               <a:t>19</a:t>
-            </a:fld>
+            </a:r>
             <a:endParaRPr lang="zh-TW" altLang="en-US"/>
           </a:p>
         </p:txBody>
@@ -13457,159 +9625,6 @@
     <p:extLst>
       <p:ext uri="{BB962C8B-B14F-4D97-AF65-F5344CB8AC3E}">
         <p14:creationId xmlns:p14="http://schemas.microsoft.com/office/powerpoint/2010/main" val="4057571354"/>
-      </p:ext>
-    </p:extLst>
-  </p:cSld>
-  <p:clrMapOvr>
-    <a:masterClrMapping/>
-  </p:clrMapOvr>
-  <mc:AlternateContent xmlns:mc="http://schemas.openxmlformats.org/markup-compatibility/2006" xmlns:p14="http://schemas.microsoft.com/office/powerpoint/2010/main">
-    <mc:Choice Requires="p14">
-      <p:transition spd="slow" p14:dur="2000">
-        <p:cut/>
-      </p:transition>
-    </mc:Choice>
-    <mc:Fallback xmlns="">
-      <p:transition spd="slow">
-        <p:cut/>
-      </p:transition>
-    </mc:Fallback>
-  </mc:AlternateContent>
-</p:sld>
-</file>
-
-<file path=ppt/slides/slide2.xml><?xml version="1.0" encoding="utf-8"?>
-<p:sld xmlns:a="http://schemas.openxmlformats.org/drawingml/2006/main" xmlns:r="http://schemas.openxmlformats.org/officeDocument/2006/relationships" xmlns:p="http://schemas.openxmlformats.org/presentationml/2006/main">
-  <p:cSld>
-    <p:spTree>
-      <p:nvGrpSpPr>
-        <p:cNvPr id="1" name=""/>
-        <p:cNvGrpSpPr/>
-        <p:nvPr/>
-      </p:nvGrpSpPr>
-      <p:grpSpPr>
-        <a:xfrm>
-          <a:off x="0" y="0"/>
-          <a:ext cx="0" cy="0"/>
-          <a:chOff x="0" y="0"/>
-          <a:chExt cx="0" cy="0"/>
-        </a:xfrm>
-      </p:grpSpPr>
-      <p:sp>
-        <p:nvSpPr>
-          <p:cNvPr id="2" name="標題 1"/>
-          <p:cNvSpPr>
-            <a:spLocks noGrp="1"/>
-          </p:cNvSpPr>
-          <p:nvPr>
-            <p:ph type="title"/>
-          </p:nvPr>
-        </p:nvSpPr>
-        <p:spPr/>
-        <p:txBody>
-          <a:bodyPr/>
-          <a:lstStyle/>
-          <a:p>
-            <a:r>
-              <a:rPr lang="en-US" altLang="zh-TW" dirty="0">
-                <a:latin typeface="+mj-ea"/>
-                <a:ea typeface="+mj-ea"/>
-              </a:rPr>
-              <a:t>Line </a:t>
-            </a:r>
-            <a:r>
-              <a:rPr lang="zh-TW" altLang="en-US" dirty="0">
-                <a:latin typeface="+mj-ea"/>
-                <a:ea typeface="+mj-ea"/>
-              </a:rPr>
-              <a:t>群</a:t>
-            </a:r>
-          </a:p>
-        </p:txBody>
-      </p:sp>
-      <p:sp>
-        <p:nvSpPr>
-          <p:cNvPr id="4" name="投影片編號版面配置區 3"/>
-          <p:cNvSpPr>
-            <a:spLocks noGrp="1"/>
-          </p:cNvSpPr>
-          <p:nvPr>
-            <p:ph type="sldNum" sz="quarter" idx="12"/>
-          </p:nvPr>
-        </p:nvSpPr>
-        <p:spPr/>
-        <p:txBody>
-          <a:bodyPr/>
-          <a:lstStyle/>
-          <a:p>
-            <a:fld id="{C68121D2-9246-4B52-9877-10E6A7AF0C69}" type="slidenum">
-              <a:rPr lang="zh-TW" altLang="en-US" smtClean="0"/>
-              <a:pPr/>
-              <a:t>2</a:t>
-            </a:fld>
-            <a:endParaRPr lang="zh-TW" altLang="en-US"/>
-          </a:p>
-        </p:txBody>
-      </p:sp>
-      <p:sp>
-        <p:nvSpPr>
-          <p:cNvPr id="5" name="內容版面配置區 4">
-            <a:extLst>
-              <a:ext uri="{FF2B5EF4-FFF2-40B4-BE49-F238E27FC236}">
-                <a16:creationId xmlns:a16="http://schemas.microsoft.com/office/drawing/2014/main" id="{AEA49820-5CD0-F570-029E-9E08BAD57A29}"/>
-              </a:ext>
-            </a:extLst>
-          </p:cNvPr>
-          <p:cNvSpPr>
-            <a:spLocks noGrp="1"/>
-          </p:cNvSpPr>
-          <p:nvPr>
-            <p:ph idx="1"/>
-          </p:nvPr>
-        </p:nvSpPr>
-        <p:spPr/>
-        <p:txBody>
-          <a:bodyPr/>
-          <a:lstStyle/>
-          <a:p>
-            <a:endParaRPr lang="zh-TW" altLang="en-US"/>
-          </a:p>
-        </p:txBody>
-      </p:sp>
-      <p:pic>
-        <p:nvPicPr>
-          <p:cNvPr id="6" name="圖片 5" descr="一張含有 樣式, 圖形, 圓形, 像素 的圖片&#10;&#10;AI 產生的內容可能不正確。">
-            <a:extLst>
-              <a:ext uri="{FF2B5EF4-FFF2-40B4-BE49-F238E27FC236}">
-                <a16:creationId xmlns:a16="http://schemas.microsoft.com/office/drawing/2014/main" id="{13FDA130-3BFA-92C4-7F9F-72CE48BCD9B3}"/>
-              </a:ext>
-            </a:extLst>
-          </p:cNvPr>
-          <p:cNvPicPr>
-            <a:picLocks noChangeAspect="1"/>
-          </p:cNvPicPr>
-          <p:nvPr/>
-        </p:nvPicPr>
-        <p:blipFill>
-          <a:blip r:embed="rId2"/>
-          <a:stretch>
-            <a:fillRect/>
-          </a:stretch>
-        </p:blipFill>
-        <p:spPr>
-          <a:xfrm>
-            <a:off x="2339752" y="908720"/>
-            <a:ext cx="5949280" cy="5949280"/>
-          </a:xfrm>
-          <a:prstGeom prst="rect">
-            <a:avLst/>
-          </a:prstGeom>
-        </p:spPr>
-      </p:pic>
-    </p:spTree>
-    <p:extLst>
-      <p:ext uri="{BB962C8B-B14F-4D97-AF65-F5344CB8AC3E}">
-        <p14:creationId xmlns:p14="http://schemas.microsoft.com/office/powerpoint/2010/main" val="2578833875"/>
       </p:ext>
     </p:extLst>
   </p:cSld>
@@ -14030,11 +10045,10 @@
           <a:bodyPr/>
           <a:lstStyle/>
           <a:p>
-            <a:fld id="{C68121D2-9246-4B52-9877-10E6A7AF0C69}" type="slidenum">
+            <a:r>
               <a:rPr lang="zh-TW" altLang="en-US" smtClean="0"/>
-              <a:pPr/>
               <a:t>20</a:t>
-            </a:fld>
+            </a:r>
             <a:endParaRPr lang="zh-TW" altLang="en-US"/>
           </a:p>
         </p:txBody>
@@ -14402,11 +10416,10 @@
           <a:bodyPr/>
           <a:lstStyle/>
           <a:p>
-            <a:fld id="{C68121D2-9246-4B52-9877-10E6A7AF0C69}" type="slidenum">
+            <a:r>
               <a:rPr lang="zh-TW" altLang="en-US" smtClean="0"/>
-              <a:pPr/>
               <a:t>21</a:t>
-            </a:fld>
+            </a:r>
             <a:endParaRPr lang="zh-TW" altLang="en-US"/>
           </a:p>
         </p:txBody>
@@ -14715,11 +10728,10 @@
           <a:bodyPr/>
           <a:lstStyle/>
           <a:p>
-            <a:fld id="{C68121D2-9246-4B52-9877-10E6A7AF0C69}" type="slidenum">
+            <a:r>
               <a:rPr lang="zh-TW" altLang="en-US" smtClean="0"/>
-              <a:pPr/>
               <a:t>22</a:t>
-            </a:fld>
+            </a:r>
             <a:endParaRPr lang="zh-TW" altLang="en-US"/>
           </a:p>
         </p:txBody>
@@ -15030,11 +11042,10 @@
           <a:bodyPr/>
           <a:lstStyle/>
           <a:p>
-            <a:fld id="{C68121D2-9246-4B52-9877-10E6A7AF0C69}" type="slidenum">
+            <a:r>
               <a:rPr lang="zh-TW" altLang="en-US" smtClean="0"/>
-              <a:pPr/>
               <a:t>23</a:t>
-            </a:fld>
+            </a:r>
             <a:endParaRPr lang="zh-TW" altLang="en-US"/>
           </a:p>
         </p:txBody>
@@ -15467,11 +11478,10 @@
           <a:bodyPr/>
           <a:lstStyle/>
           <a:p>
-            <a:fld id="{C68121D2-9246-4B52-9877-10E6A7AF0C69}" type="slidenum">
+            <a:r>
               <a:rPr lang="zh-TW" altLang="en-US" smtClean="0"/>
-              <a:pPr/>
               <a:t>24</a:t>
-            </a:fld>
+            </a:r>
             <a:endParaRPr lang="zh-TW" altLang="en-US"/>
           </a:p>
         </p:txBody>
@@ -15590,11 +11600,10 @@
           <a:bodyPr/>
           <a:lstStyle/>
           <a:p>
-            <a:fld id="{C68121D2-9246-4B52-9877-10E6A7AF0C69}" type="slidenum">
+            <a:r>
               <a:rPr lang="zh-TW" altLang="en-US" smtClean="0"/>
-              <a:pPr/>
               <a:t>25</a:t>
-            </a:fld>
+            </a:r>
             <a:endParaRPr lang="zh-TW" altLang="en-US"/>
           </a:p>
         </p:txBody>
@@ -15848,11 +11857,10 @@
           <a:bodyPr/>
           <a:lstStyle/>
           <a:p>
-            <a:fld id="{C68121D2-9246-4B52-9877-10E6A7AF0C69}" type="slidenum">
+            <a:r>
               <a:rPr lang="zh-TW" altLang="en-US" smtClean="0"/>
-              <a:pPr/>
               <a:t>26</a:t>
-            </a:fld>
+            </a:r>
             <a:endParaRPr lang="zh-TW" altLang="en-US"/>
           </a:p>
         </p:txBody>
@@ -16246,11 +12254,10 @@
           <a:bodyPr/>
           <a:lstStyle/>
           <a:p>
-            <a:fld id="{C68121D2-9246-4B52-9877-10E6A7AF0C69}" type="slidenum">
+            <a:r>
               <a:rPr lang="zh-TW" altLang="en-US" smtClean="0"/>
-              <a:pPr/>
               <a:t>27</a:t>
-            </a:fld>
+            </a:r>
             <a:endParaRPr lang="zh-TW" altLang="en-US"/>
           </a:p>
         </p:txBody>
@@ -16565,11 +12572,10 @@
           <a:bodyPr/>
           <a:lstStyle/>
           <a:p>
-            <a:fld id="{C68121D2-9246-4B52-9877-10E6A7AF0C69}" type="slidenum">
+            <a:r>
               <a:rPr lang="zh-TW" altLang="en-US" smtClean="0"/>
-              <a:pPr/>
               <a:t>28</a:t>
-            </a:fld>
+            </a:r>
             <a:endParaRPr lang="zh-TW" altLang="en-US"/>
           </a:p>
         </p:txBody>
@@ -16741,11 +12747,10 @@
           <a:bodyPr/>
           <a:lstStyle/>
           <a:p>
-            <a:fld id="{C68121D2-9246-4B52-9877-10E6A7AF0C69}" type="slidenum">
+            <a:r>
               <a:rPr lang="zh-TW" altLang="en-US" smtClean="0"/>
-              <a:pPr/>
               <a:t>29</a:t>
-            </a:fld>
+            </a:r>
             <a:endParaRPr lang="zh-TW" altLang="en-US"/>
           </a:p>
         </p:txBody>
@@ -16810,128 +12815,6 @@
 </p:sld>
 </file>
 
-<file path=ppt/slides/slide3.xml><?xml version="1.0" encoding="utf-8"?>
-<p:sld xmlns:a="http://schemas.openxmlformats.org/drawingml/2006/main" xmlns:r="http://schemas.openxmlformats.org/officeDocument/2006/relationships" xmlns:p="http://schemas.openxmlformats.org/presentationml/2006/main">
-  <p:cSld>
-    <p:spTree>
-      <p:nvGrpSpPr>
-        <p:cNvPr id="1" name=""/>
-        <p:cNvGrpSpPr/>
-        <p:nvPr/>
-      </p:nvGrpSpPr>
-      <p:grpSpPr>
-        <a:xfrm>
-          <a:off x="0" y="0"/>
-          <a:ext cx="0" cy="0"/>
-          <a:chOff x="0" y="0"/>
-          <a:chExt cx="0" cy="0"/>
-        </a:xfrm>
-      </p:grpSpPr>
-      <p:sp>
-        <p:nvSpPr>
-          <p:cNvPr id="4" name="標題 3"/>
-          <p:cNvSpPr>
-            <a:spLocks noGrp="1"/>
-          </p:cNvSpPr>
-          <p:nvPr>
-            <p:ph type="title"/>
-          </p:nvPr>
-        </p:nvSpPr>
-        <p:spPr>
-          <a:xfrm>
-            <a:off x="1403648" y="-22448"/>
-            <a:ext cx="7283152" cy="1143000"/>
-          </a:xfrm>
-        </p:spPr>
-        <p:txBody>
-          <a:bodyPr/>
-          <a:lstStyle/>
-          <a:p>
-            <a:r>
-              <a:rPr lang="zh-TW" altLang="en-US" dirty="0">
-                <a:latin typeface="+mj-ea"/>
-                <a:ea typeface="+mj-ea"/>
-              </a:rPr>
-              <a:t>目錄</a:t>
-            </a:r>
-          </a:p>
-        </p:txBody>
-      </p:sp>
-      <p:graphicFrame>
-        <p:nvGraphicFramePr>
-          <p:cNvPr id="6" name="內容版面配置區 1">
-            <a:extLst>
-              <a:ext uri="{FF2B5EF4-FFF2-40B4-BE49-F238E27FC236}">
-                <a16:creationId xmlns:a16="http://schemas.microsoft.com/office/drawing/2014/main" id="{A809B976-F597-E0E1-0091-E65000C4A044}"/>
-              </a:ext>
-            </a:extLst>
-          </p:cNvPr>
-          <p:cNvGraphicFramePr>
-            <a:graphicFrameLocks noGrp="1"/>
-          </p:cNvGraphicFramePr>
-          <p:nvPr>
-            <p:ph idx="1"/>
-          </p:nvPr>
-        </p:nvGraphicFramePr>
-        <p:xfrm>
-          <a:off x="2051720" y="836712"/>
-          <a:ext cx="4896544" cy="5688632"/>
-        </p:xfrm>
-        <a:graphic>
-          <a:graphicData uri="http://schemas.openxmlformats.org/drawingml/2006/diagram">
-            <dgm:relIds xmlns:dgm="http://schemas.openxmlformats.org/drawingml/2006/diagram" xmlns:r="http://schemas.openxmlformats.org/officeDocument/2006/relationships" r:dm="rId2" r:lo="rId3" r:qs="rId4" r:cs="rId5"/>
-          </a:graphicData>
-        </a:graphic>
-      </p:graphicFrame>
-      <p:sp>
-        <p:nvSpPr>
-          <p:cNvPr id="3" name="投影片編號版面配置區 2"/>
-          <p:cNvSpPr>
-            <a:spLocks noGrp="1"/>
-          </p:cNvSpPr>
-          <p:nvPr>
-            <p:ph type="sldNum" sz="quarter" idx="12"/>
-          </p:nvPr>
-        </p:nvSpPr>
-        <p:spPr/>
-        <p:txBody>
-          <a:bodyPr/>
-          <a:lstStyle/>
-          <a:p>
-            <a:fld id="{C68121D2-9246-4B52-9877-10E6A7AF0C69}" type="slidenum">
-              <a:rPr lang="zh-TW" altLang="en-US" smtClean="0"/>
-              <a:pPr/>
-              <a:t>3</a:t>
-            </a:fld>
-            <a:endParaRPr lang="zh-TW" altLang="en-US"/>
-          </a:p>
-        </p:txBody>
-      </p:sp>
-    </p:spTree>
-    <p:extLst>
-      <p:ext uri="{BB962C8B-B14F-4D97-AF65-F5344CB8AC3E}">
-        <p14:creationId xmlns:p14="http://schemas.microsoft.com/office/powerpoint/2010/main" val="4136216071"/>
-      </p:ext>
-    </p:extLst>
-  </p:cSld>
-  <p:clrMapOvr>
-    <a:masterClrMapping/>
-  </p:clrMapOvr>
-  <mc:AlternateContent xmlns:mc="http://schemas.openxmlformats.org/markup-compatibility/2006" xmlns:p14="http://schemas.microsoft.com/office/powerpoint/2010/main">
-    <mc:Choice Requires="p14">
-      <p:transition spd="slow" p14:dur="2000">
-        <p:cut/>
-      </p:transition>
-    </mc:Choice>
-    <mc:Fallback xmlns="">
-      <p:transition spd="slow">
-        <p:cut/>
-      </p:transition>
-    </mc:Fallback>
-  </mc:AlternateContent>
-</p:sld>
-</file>
-
 <file path=ppt/slides/slide30.xml><?xml version="1.0" encoding="utf-8"?>
 <p:sld xmlns:a="http://schemas.openxmlformats.org/drawingml/2006/main" xmlns:r="http://schemas.openxmlformats.org/officeDocument/2006/relationships" xmlns:p="http://schemas.openxmlformats.org/presentationml/2006/main">
   <p:cSld>
@@ -17413,11 +13296,10 @@
           <a:bodyPr/>
           <a:lstStyle/>
           <a:p>
-            <a:fld id="{C68121D2-9246-4B52-9877-10E6A7AF0C69}" type="slidenum">
+            <a:r>
               <a:rPr lang="zh-TW" altLang="en-US" smtClean="0"/>
-              <a:pPr/>
               <a:t>30</a:t>
-            </a:fld>
+            </a:r>
             <a:endParaRPr lang="zh-TW" altLang="en-US"/>
           </a:p>
         </p:txBody>
@@ -17479,11 +13361,10 @@
           <a:bodyPr/>
           <a:lstStyle/>
           <a:p>
-            <a:fld id="{C68121D2-9246-4B52-9877-10E6A7AF0C69}" type="slidenum">
+            <a:r>
               <a:rPr lang="zh-TW" altLang="en-US" smtClean="0"/>
-              <a:pPr/>
               <a:t>31</a:t>
-            </a:fld>
+            </a:r>
             <a:endParaRPr lang="zh-TW" altLang="en-US"/>
           </a:p>
         </p:txBody>
@@ -17773,11 +13654,10 @@
           <a:bodyPr/>
           <a:lstStyle/>
           <a:p>
-            <a:fld id="{C68121D2-9246-4B52-9877-10E6A7AF0C69}" type="slidenum">
+            <a:r>
               <a:rPr lang="zh-TW" altLang="en-US" smtClean="0"/>
-              <a:pPr/>
               <a:t>32</a:t>
-            </a:fld>
+            </a:r>
             <a:endParaRPr lang="zh-TW" altLang="en-US"/>
           </a:p>
         </p:txBody>
@@ -18219,11 +14099,10 @@
           <a:bodyPr/>
           <a:lstStyle/>
           <a:p>
-            <a:fld id="{C68121D2-9246-4B52-9877-10E6A7AF0C69}" type="slidenum">
+            <a:r>
               <a:rPr lang="zh-TW" altLang="en-US" smtClean="0"/>
-              <a:pPr/>
               <a:t>33</a:t>
-            </a:fld>
+            </a:r>
             <a:endParaRPr lang="zh-TW" altLang="en-US"/>
           </a:p>
         </p:txBody>
@@ -18285,11 +14164,10 @@
           <a:bodyPr/>
           <a:lstStyle/>
           <a:p>
-            <a:fld id="{C68121D2-9246-4B52-9877-10E6A7AF0C69}" type="slidenum">
+            <a:r>
               <a:rPr lang="zh-TW" altLang="en-US" smtClean="0"/>
-              <a:pPr/>
               <a:t>34</a:t>
-            </a:fld>
+            </a:r>
             <a:endParaRPr lang="zh-TW" altLang="en-US"/>
           </a:p>
         </p:txBody>
@@ -18785,11 +14663,10 @@
           <a:bodyPr/>
           <a:lstStyle/>
           <a:p>
-            <a:fld id="{C68121D2-9246-4B52-9877-10E6A7AF0C69}" type="slidenum">
+            <a:r>
               <a:rPr lang="zh-TW" altLang="en-US" smtClean="0"/>
-              <a:pPr/>
               <a:t>35</a:t>
-            </a:fld>
+            </a:r>
             <a:endParaRPr lang="zh-TW" altLang="en-US"/>
           </a:p>
         </p:txBody>
@@ -19103,11 +14980,10 @@
           <a:bodyPr/>
           <a:lstStyle/>
           <a:p>
-            <a:fld id="{C68121D2-9246-4B52-9877-10E6A7AF0C69}" type="slidenum">
+            <a:r>
               <a:rPr lang="zh-TW" altLang="en-US" smtClean="0"/>
-              <a:pPr/>
               <a:t>36</a:t>
-            </a:fld>
+            </a:r>
             <a:endParaRPr lang="zh-TW" altLang="en-US"/>
           </a:p>
         </p:txBody>
@@ -19419,11 +15295,10 @@
           <a:bodyPr/>
           <a:lstStyle/>
           <a:p>
-            <a:fld id="{C68121D2-9246-4B52-9877-10E6A7AF0C69}" type="slidenum">
+            <a:r>
               <a:rPr lang="zh-TW" altLang="en-US" smtClean="0"/>
-              <a:pPr/>
               <a:t>37</a:t>
-            </a:fld>
+            </a:r>
             <a:endParaRPr lang="zh-TW" altLang="en-US"/>
           </a:p>
         </p:txBody>
@@ -19612,272 +15487,6 @@
 </p:sld>
 </file>
 
-<file path=ppt/slides/slide4.xml><?xml version="1.0" encoding="utf-8"?>
-<p:sld xmlns:a="http://schemas.openxmlformats.org/drawingml/2006/main" xmlns:r="http://schemas.openxmlformats.org/officeDocument/2006/relationships" xmlns:p="http://schemas.openxmlformats.org/presentationml/2006/main">
-  <p:cSld>
-    <p:spTree>
-      <p:nvGrpSpPr>
-        <p:cNvPr id="1" name=""/>
-        <p:cNvGrpSpPr/>
-        <p:nvPr/>
-      </p:nvGrpSpPr>
-      <p:grpSpPr>
-        <a:xfrm>
-          <a:off x="0" y="0"/>
-          <a:ext cx="0" cy="0"/>
-          <a:chOff x="0" y="0"/>
-          <a:chExt cx="0" cy="0"/>
-        </a:xfrm>
-      </p:grpSpPr>
-      <p:sp>
-        <p:nvSpPr>
-          <p:cNvPr id="4" name="標題 3"/>
-          <p:cNvSpPr>
-            <a:spLocks noGrp="1"/>
-          </p:cNvSpPr>
-          <p:nvPr>
-            <p:ph type="title"/>
-          </p:nvPr>
-        </p:nvSpPr>
-        <p:spPr>
-          <a:xfrm>
-            <a:off x="733806" y="368049"/>
-            <a:ext cx="8229600" cy="998984"/>
-          </a:xfrm>
-        </p:spPr>
-        <p:txBody>
-          <a:bodyPr/>
-          <a:lstStyle/>
-          <a:p>
-            <a:r>
-              <a:rPr lang="zh-TW" altLang="en-US" dirty="0">
-                <a:latin typeface="+mj-ea"/>
-                <a:ea typeface="+mj-ea"/>
-              </a:rPr>
-              <a:t>成績計算方式</a:t>
-            </a:r>
-          </a:p>
-        </p:txBody>
-      </p:sp>
-      <p:sp>
-        <p:nvSpPr>
-          <p:cNvPr id="2" name="內容版面配置區 1"/>
-          <p:cNvSpPr>
-            <a:spLocks noGrp="1"/>
-          </p:cNvSpPr>
-          <p:nvPr>
-            <p:ph idx="1"/>
-          </p:nvPr>
-        </p:nvSpPr>
-        <p:spPr>
-          <a:xfrm>
-            <a:off x="893378" y="2351311"/>
-            <a:ext cx="8229600" cy="2155377"/>
-          </a:xfrm>
-        </p:spPr>
-        <p:txBody>
-          <a:bodyPr>
-            <a:normAutofit fontScale="92500" lnSpcReduction="10000"/>
-          </a:bodyPr>
-          <a:lstStyle/>
-          <a:p>
-            <a:pPr>
-              <a:lnSpc>
-                <a:spcPct val="150000"/>
-              </a:lnSpc>
-            </a:pPr>
-            <a:r>
-              <a:rPr lang="zh-TW" altLang="en-US" dirty="0">
-                <a:latin typeface="+mj-ea"/>
-                <a:ea typeface="+mj-ea"/>
-              </a:rPr>
-              <a:t>作業</a:t>
-            </a:r>
-            <a:r>
-              <a:rPr lang="en-US" altLang="zh-TW" dirty="0">
-                <a:latin typeface="+mj-ea"/>
-                <a:ea typeface="+mj-ea"/>
-              </a:rPr>
-              <a:t>(20%)</a:t>
-            </a:r>
-          </a:p>
-          <a:p>
-            <a:pPr>
-              <a:lnSpc>
-                <a:spcPct val="150000"/>
-              </a:lnSpc>
-            </a:pPr>
-            <a:r>
-              <a:rPr lang="zh-TW" altLang="en-US" dirty="0">
-                <a:latin typeface="+mj-ea"/>
-                <a:ea typeface="+mj-ea"/>
-              </a:rPr>
-              <a:t>期中考、期末考</a:t>
-            </a:r>
-            <a:r>
-              <a:rPr lang="en-US" altLang="zh-TW" dirty="0">
-                <a:latin typeface="+mj-ea"/>
-                <a:ea typeface="+mj-ea"/>
-              </a:rPr>
-              <a:t>(</a:t>
-            </a:r>
-            <a:r>
-              <a:rPr lang="zh-TW" altLang="en-US" dirty="0">
-                <a:latin typeface="+mj-ea"/>
-                <a:ea typeface="+mj-ea"/>
-              </a:rPr>
-              <a:t>各</a:t>
-            </a:r>
-            <a:r>
-              <a:rPr lang="en-US" altLang="zh-TW">
-                <a:latin typeface="+mj-ea"/>
-                <a:ea typeface="+mj-ea"/>
-              </a:rPr>
-              <a:t>35%)</a:t>
-            </a:r>
-            <a:endParaRPr lang="en-US" altLang="zh-TW" dirty="0">
-              <a:latin typeface="+mj-ea"/>
-              <a:ea typeface="+mj-ea"/>
-            </a:endParaRPr>
-          </a:p>
-          <a:p>
-            <a:pPr>
-              <a:lnSpc>
-                <a:spcPct val="150000"/>
-              </a:lnSpc>
-            </a:pPr>
-            <a:r>
-              <a:rPr lang="zh-TW" altLang="en-US" dirty="0">
-                <a:latin typeface="+mj-ea"/>
-                <a:ea typeface="+mj-ea"/>
-              </a:rPr>
-              <a:t>出席</a:t>
-            </a:r>
-            <a:r>
-              <a:rPr lang="en-US" altLang="zh-TW" dirty="0">
-                <a:latin typeface="+mj-ea"/>
-                <a:ea typeface="+mj-ea"/>
-              </a:rPr>
-              <a:t>(10%)</a:t>
-            </a:r>
-          </a:p>
-          <a:p>
-            <a:endParaRPr lang="zh-TW" altLang="en-US" dirty="0">
-              <a:latin typeface="+mj-ea"/>
-              <a:ea typeface="+mj-ea"/>
-            </a:endParaRPr>
-          </a:p>
-        </p:txBody>
-      </p:sp>
-      <p:sp>
-        <p:nvSpPr>
-          <p:cNvPr id="3" name="投影片編號版面配置區 2"/>
-          <p:cNvSpPr>
-            <a:spLocks noGrp="1"/>
-          </p:cNvSpPr>
-          <p:nvPr>
-            <p:ph type="sldNum" sz="quarter" idx="12"/>
-          </p:nvPr>
-        </p:nvSpPr>
-        <p:spPr/>
-        <p:txBody>
-          <a:bodyPr/>
-          <a:lstStyle/>
-          <a:p>
-            <a:fld id="{C68121D2-9246-4B52-9877-10E6A7AF0C69}" type="slidenum">
-              <a:rPr lang="zh-TW" altLang="en-US" smtClean="0"/>
-              <a:pPr/>
-              <a:t>4</a:t>
-            </a:fld>
-            <a:endParaRPr lang="zh-TW" altLang="en-US"/>
-          </a:p>
-        </p:txBody>
-      </p:sp>
-      <p:sp>
-        <p:nvSpPr>
-          <p:cNvPr id="5" name="標題 3"/>
-          <p:cNvSpPr txBox="1">
-            <a:spLocks/>
-          </p:cNvSpPr>
-          <p:nvPr/>
-        </p:nvSpPr>
-        <p:spPr>
-          <a:xfrm>
-            <a:off x="906497" y="2749573"/>
-            <a:ext cx="8229600" cy="1143000"/>
-          </a:xfrm>
-          <a:prstGeom prst="rect">
-            <a:avLst/>
-          </a:prstGeom>
-        </p:spPr>
-        <p:txBody>
-          <a:bodyPr vert="horz" rtlCol="0" anchor="ctr">
-            <a:normAutofit/>
-            <a:scene3d>
-              <a:camera prst="orthographicFront"/>
-              <a:lightRig rig="soft" dir="t"/>
-            </a:scene3d>
-            <a:sp3d prstMaterial="softEdge">
-              <a:bevelT w="25400" h="25400"/>
-            </a:sp3d>
-          </a:bodyPr>
-          <a:lstStyle>
-            <a:lvl1pPr algn="l" rtl="0" eaLnBrk="1" latinLnBrk="0" hangingPunct="1">
-              <a:spcBef>
-                <a:spcPct val="0"/>
-              </a:spcBef>
-              <a:buNone/>
-              <a:defRPr kumimoji="0" sz="4100" b="1" kern="1200">
-                <a:solidFill>
-                  <a:schemeClr val="tx2"/>
-                </a:solidFill>
-                <a:effectLst>
-                  <a:outerShdw blurRad="31750" dist="25400" dir="5400000" algn="tl" rotWithShape="0">
-                    <a:srgbClr val="000000">
-                      <a:alpha val="25000"/>
-                    </a:srgbClr>
-                  </a:outerShdw>
-                </a:effectLst>
-                <a:latin typeface="+mj-lt"/>
-                <a:ea typeface="+mj-ea"/>
-                <a:cs typeface="+mj-cs"/>
-              </a:defRPr>
-            </a:lvl1pPr>
-            <a:extLst/>
-          </a:lstStyle>
-          <a:p>
-            <a:endParaRPr lang="zh-TW" altLang="en-US" sz="2800" b="0" dirty="0">
-              <a:effectLst/>
-              <a:latin typeface="+mj-ea"/>
-            </a:endParaRPr>
-          </a:p>
-        </p:txBody>
-      </p:sp>
-    </p:spTree>
-    <p:extLst>
-      <p:ext uri="{BB962C8B-B14F-4D97-AF65-F5344CB8AC3E}">
-        <p14:creationId xmlns:p14="http://schemas.microsoft.com/office/powerpoint/2010/main" val="3888677012"/>
-      </p:ext>
-    </p:extLst>
-  </p:cSld>
-  <p:clrMapOvr>
-    <a:masterClrMapping/>
-  </p:clrMapOvr>
-  <mc:AlternateContent xmlns:mc="http://schemas.openxmlformats.org/markup-compatibility/2006" xmlns:p14="http://schemas.microsoft.com/office/powerpoint/2010/main">
-    <mc:Choice Requires="p14">
-      <p:transition spd="slow" p14:dur="2000">
-        <p:cut/>
-      </p:transition>
-    </mc:Choice>
-    <mc:Fallback xmlns="">
-      <p:transition spd="slow">
-        <p:cut/>
-      </p:transition>
-    </mc:Fallback>
-  </mc:AlternateContent>
-</p:sld>
-</file>
-
 <file path=ppt/slides/slide5.xml><?xml version="1.0" encoding="utf-8"?>
 <p:sld xmlns:a="http://schemas.openxmlformats.org/drawingml/2006/main" xmlns:r="http://schemas.openxmlformats.org/officeDocument/2006/relationships" xmlns:p="http://schemas.openxmlformats.org/presentationml/2006/main">
   <p:cSld>
@@ -19960,11 +15569,10 @@
           <a:bodyPr/>
           <a:lstStyle/>
           <a:p>
-            <a:fld id="{C68121D2-9246-4B52-9877-10E6A7AF0C69}" type="slidenum">
+            <a:r>
               <a:rPr lang="zh-TW" altLang="en-US" smtClean="0"/>
-              <a:pPr/>
               <a:t>5</a:t>
-            </a:fld>
+            </a:r>
             <a:endParaRPr lang="zh-TW" altLang="en-US"/>
           </a:p>
         </p:txBody>
@@ -20155,11 +15763,10 @@
           <a:bodyPr/>
           <a:lstStyle/>
           <a:p>
-            <a:fld id="{C68121D2-9246-4B52-9877-10E6A7AF0C69}" type="slidenum">
+            <a:r>
               <a:rPr lang="zh-TW" altLang="en-US" smtClean="0"/>
-              <a:pPr/>
               <a:t>6</a:t>
-            </a:fld>
+            </a:r>
             <a:endParaRPr lang="zh-TW" altLang="en-US"/>
           </a:p>
         </p:txBody>
@@ -20516,11 +16123,10 @@
           <a:bodyPr/>
           <a:lstStyle/>
           <a:p>
-            <a:fld id="{C68121D2-9246-4B52-9877-10E6A7AF0C69}" type="slidenum">
+            <a:r>
               <a:rPr lang="zh-TW" altLang="en-US" smtClean="0"/>
-              <a:pPr/>
               <a:t>7</a:t>
-            </a:fld>
+            </a:r>
             <a:endParaRPr lang="zh-TW" altLang="en-US"/>
           </a:p>
         </p:txBody>
@@ -20748,11 +16354,10 @@
           <a:bodyPr/>
           <a:lstStyle/>
           <a:p>
-            <a:fld id="{C68121D2-9246-4B52-9877-10E6A7AF0C69}" type="slidenum">
+            <a:r>
               <a:rPr lang="zh-TW" altLang="en-US" smtClean="0"/>
-              <a:pPr/>
               <a:t>8</a:t>
-            </a:fld>
+            </a:r>
             <a:endParaRPr lang="zh-TW" altLang="en-US"/>
           </a:p>
         </p:txBody>
@@ -21030,11 +16635,10 @@
           <a:bodyPr/>
           <a:lstStyle/>
           <a:p>
-            <a:fld id="{C68121D2-9246-4B52-9877-10E6A7AF0C69}" type="slidenum">
+            <a:r>
               <a:rPr lang="zh-TW" altLang="en-US" smtClean="0"/>
-              <a:pPr/>
               <a:t>9</a:t>
-            </a:fld>
+            </a:r>
             <a:endParaRPr lang="zh-TW" altLang="en-US"/>
           </a:p>
         </p:txBody>
